--- a/modules/06-advanced-analytics-ai/assets/advanced-analytics-ai.pptx
+++ b/modules/06-advanced-analytics-ai/assets/advanced-analytics-ai.pptx
@@ -119,6 +119,1841 @@
     </a:lvl9pPr>
   </p:defaultTextStyle>
 </p:presentation>
+</file>
+
+<file path=ppt/notesMasters/notesMaster1.xml><?xml version="1.0" encoding="utf-8"?>
+<p:notesMaster xmlns:a="http://schemas.openxmlformats.org/drawingml/2006/main" xmlns:p="http://schemas.openxmlformats.org/presentationml/2006/main" xmlns:r="http://schemas.openxmlformats.org/officeDocument/2006/relationships">
+  <p:cSld>
+    <p:bg>
+      <p:bgRef idx="1001">
+        <a:schemeClr val="bg1"/>
+      </p:bgRef>
+    </p:bg>
+    <p:spTree>
+      <p:nvGrpSpPr>
+        <p:cNvPr id="1" name=""/>
+        <p:cNvGrpSpPr/>
+        <p:nvPr/>
+      </p:nvGrpSpPr>
+      <p:grpSpPr>
+        <a:xfrm>
+          <a:off x="0" y="0"/>
+          <a:ext cx="0" cy="0"/>
+          <a:chOff x="0" y="0"/>
+          <a:chExt cx="0" cy="0"/>
+        </a:xfrm>
+      </p:grpSpPr>
+      <p:sp>
+        <p:nvSpPr>
+          <p:cNvPr id="2" name="Header Placeholder 1"/>
+          <p:cNvSpPr>
+            <a:spLocks noGrp="1"/>
+          </p:cNvSpPr>
+          <p:nvPr>
+            <p:ph type="hdr" sz="quarter"/>
+          </p:nvPr>
+        </p:nvSpPr>
+        <p:spPr>
+          <a:xfrm>
+            <a:off x="0" y="0"/>
+            <a:ext cx="2971800" cy="457200"/>
+          </a:xfrm>
+          <a:prstGeom prst="rect">
+            <a:avLst/>
+          </a:prstGeom>
+        </p:spPr>
+        <p:txBody>
+          <a:bodyPr vert="horz" lIns="91440" tIns="45720" rIns="91440" bIns="45720" rtlCol="0"/>
+          <a:lstStyle>
+            <a:lvl1pPr algn="l">
+              <a:defRPr sz="1200"/>
+            </a:lvl1pPr>
+          </a:lstStyle>
+          <a:p>
+            <a:endParaRPr lang="en-US"/>
+          </a:p>
+        </p:txBody>
+      </p:sp>
+      <p:sp>
+        <p:nvSpPr>
+          <p:cNvPr id="3" name="Date Placeholder 2"/>
+          <p:cNvSpPr>
+            <a:spLocks noGrp="1"/>
+          </p:cNvSpPr>
+          <p:nvPr>
+            <p:ph type="dt" idx="1"/>
+          </p:nvPr>
+        </p:nvSpPr>
+        <p:spPr>
+          <a:xfrm>
+            <a:off x="3884613" y="0"/>
+            <a:ext cx="2971800" cy="457200"/>
+          </a:xfrm>
+          <a:prstGeom prst="rect">
+            <a:avLst/>
+          </a:prstGeom>
+        </p:spPr>
+        <p:txBody>
+          <a:bodyPr vert="horz" lIns="91440" tIns="45720" rIns="91440" bIns="45720" rtlCol="0"/>
+          <a:lstStyle>
+            <a:lvl1pPr algn="r">
+              <a:defRPr sz="1200"/>
+            </a:lvl1pPr>
+          </a:lstStyle>
+          <a:p>
+            <a:fld id="{0F89C1C7-3DCD-1040-A9CF-14679D8B5DDD}" type="datetimeFigureOut">
+              <a:rPr lang="en-US" smtClean="0"/>
+              <a:t>10/17/16</a:t>
+            </a:fld>
+            <a:endParaRPr lang="en-US"/>
+          </a:p>
+        </p:txBody>
+      </p:sp>
+      <p:sp>
+        <p:nvSpPr>
+          <p:cNvPr id="4" name="Slide Image Placeholder 3"/>
+          <p:cNvSpPr>
+            <a:spLocks noGrp="1" noRot="1" noChangeAspect="1"/>
+          </p:cNvSpPr>
+          <p:nvPr>
+            <p:ph type="sldImg" idx="2"/>
+          </p:nvPr>
+        </p:nvSpPr>
+        <p:spPr>
+          <a:xfrm>
+            <a:off x="1143000" y="685800"/>
+            <a:ext cx="4572000" cy="3429000"/>
+          </a:xfrm>
+          <a:prstGeom prst="rect">
+            <a:avLst/>
+          </a:prstGeom>
+          <a:noFill/>
+          <a:ln w="12700">
+            <a:solidFill>
+              <a:prstClr val="black"/>
+            </a:solidFill>
+          </a:ln>
+        </p:spPr>
+        <p:txBody>
+          <a:bodyPr vert="horz" lIns="91440" tIns="45720" rIns="91440" bIns="45720" rtlCol="0" anchor="ctr"/>
+          <a:lstStyle/>
+          <a:p>
+            <a:endParaRPr lang="en-US"/>
+          </a:p>
+        </p:txBody>
+      </p:sp>
+      <p:sp>
+        <p:nvSpPr>
+          <p:cNvPr id="5" name="Notes Placeholder 4"/>
+          <p:cNvSpPr>
+            <a:spLocks noGrp="1"/>
+          </p:cNvSpPr>
+          <p:nvPr>
+            <p:ph type="body" sz="quarter" idx="3"/>
+          </p:nvPr>
+        </p:nvSpPr>
+        <p:spPr>
+          <a:xfrm>
+            <a:off x="685800" y="4343400"/>
+            <a:ext cx="5486400" cy="4114800"/>
+          </a:xfrm>
+          <a:prstGeom prst="rect">
+            <a:avLst/>
+          </a:prstGeom>
+        </p:spPr>
+        <p:txBody>
+          <a:bodyPr vert="horz" lIns="91440" tIns="45720" rIns="91440" bIns="45720" rtlCol="0"/>
+          <a:lstStyle/>
+          <a:p>
+            <a:pPr lvl="0"/>
+            <a:r>
+              <a:rPr lang="en-US" smtClean="0"/>
+              <a:t>Click to edit Master text styles</a:t>
+            </a:r>
+          </a:p>
+          <a:p>
+            <a:pPr lvl="1"/>
+            <a:r>
+              <a:rPr lang="en-US" smtClean="0"/>
+              <a:t>Second level</a:t>
+            </a:r>
+          </a:p>
+          <a:p>
+            <a:pPr lvl="2"/>
+            <a:r>
+              <a:rPr lang="en-US" smtClean="0"/>
+              <a:t>Third level</a:t>
+            </a:r>
+          </a:p>
+          <a:p>
+            <a:pPr lvl="3"/>
+            <a:r>
+              <a:rPr lang="en-US" smtClean="0"/>
+              <a:t>Fourth level</a:t>
+            </a:r>
+          </a:p>
+          <a:p>
+            <a:pPr lvl="4"/>
+            <a:r>
+              <a:rPr lang="en-US" smtClean="0"/>
+              <a:t>Fifth level</a:t>
+            </a:r>
+            <a:endParaRPr lang="en-US"/>
+          </a:p>
+        </p:txBody>
+      </p:sp>
+      <p:sp>
+        <p:nvSpPr>
+          <p:cNvPr id="6" name="Footer Placeholder 5"/>
+          <p:cNvSpPr>
+            <a:spLocks noGrp="1"/>
+          </p:cNvSpPr>
+          <p:nvPr>
+            <p:ph type="ftr" sz="quarter" idx="4"/>
+          </p:nvPr>
+        </p:nvSpPr>
+        <p:spPr>
+          <a:xfrm>
+            <a:off x="0" y="8685213"/>
+            <a:ext cx="2971800" cy="457200"/>
+          </a:xfrm>
+          <a:prstGeom prst="rect">
+            <a:avLst/>
+          </a:prstGeom>
+        </p:spPr>
+        <p:txBody>
+          <a:bodyPr vert="horz" lIns="91440" tIns="45720" rIns="91440" bIns="45720" rtlCol="0" anchor="b"/>
+          <a:lstStyle>
+            <a:lvl1pPr algn="l">
+              <a:defRPr sz="1200"/>
+            </a:lvl1pPr>
+          </a:lstStyle>
+          <a:p>
+            <a:endParaRPr lang="en-US"/>
+          </a:p>
+        </p:txBody>
+      </p:sp>
+      <p:sp>
+        <p:nvSpPr>
+          <p:cNvPr id="7" name="Slide Number Placeholder 6"/>
+          <p:cNvSpPr>
+            <a:spLocks noGrp="1"/>
+          </p:cNvSpPr>
+          <p:nvPr>
+            <p:ph type="sldNum" sz="quarter" idx="5"/>
+          </p:nvPr>
+        </p:nvSpPr>
+        <p:spPr>
+          <a:xfrm>
+            <a:off x="3884613" y="8685213"/>
+            <a:ext cx="2971800" cy="457200"/>
+          </a:xfrm>
+          <a:prstGeom prst="rect">
+            <a:avLst/>
+          </a:prstGeom>
+        </p:spPr>
+        <p:txBody>
+          <a:bodyPr vert="horz" lIns="91440" tIns="45720" rIns="91440" bIns="45720" rtlCol="0" anchor="b"/>
+          <a:lstStyle>
+            <a:lvl1pPr algn="r">
+              <a:defRPr sz="1200"/>
+            </a:lvl1pPr>
+          </a:lstStyle>
+          <a:p>
+            <a:fld id="{BB5E49A5-4136-284D-997B-48E1D791AD67}" type="slidenum">
+              <a:rPr lang="en-US" smtClean="0"/>
+              <a:t>‹#›</a:t>
+            </a:fld>
+            <a:endParaRPr lang="en-US"/>
+          </a:p>
+        </p:txBody>
+      </p:sp>
+    </p:spTree>
+    <p:extLst>
+      <p:ext uri="{BB962C8B-B14F-4D97-AF65-F5344CB8AC3E}">
+        <p14:creationId xmlns:p14="http://schemas.microsoft.com/office/powerpoint/2010/main" val="2623252185"/>
+      </p:ext>
+    </p:extLst>
+  </p:cSld>
+  <p:clrMap bg1="lt1" tx1="dk1" bg2="lt2" tx2="dk2" accent1="accent1" accent2="accent2" accent3="accent3" accent4="accent4" accent5="accent5" accent6="accent6" hlink="hlink" folHlink="folHlink"/>
+  <p:notesStyle>
+    <a:lvl1pPr marL="0" algn="l" defTabSz="457200" rtl="0" eaLnBrk="1" latinLnBrk="0" hangingPunct="1">
+      <a:defRPr sz="1200" kern="1200">
+        <a:solidFill>
+          <a:schemeClr val="tx1"/>
+        </a:solidFill>
+        <a:latin typeface="+mn-lt"/>
+        <a:ea typeface="+mn-ea"/>
+        <a:cs typeface="+mn-cs"/>
+      </a:defRPr>
+    </a:lvl1pPr>
+    <a:lvl2pPr marL="457200" algn="l" defTabSz="457200" rtl="0" eaLnBrk="1" latinLnBrk="0" hangingPunct="1">
+      <a:defRPr sz="1200" kern="1200">
+        <a:solidFill>
+          <a:schemeClr val="tx1"/>
+        </a:solidFill>
+        <a:latin typeface="+mn-lt"/>
+        <a:ea typeface="+mn-ea"/>
+        <a:cs typeface="+mn-cs"/>
+      </a:defRPr>
+    </a:lvl2pPr>
+    <a:lvl3pPr marL="914400" algn="l" defTabSz="457200" rtl="0" eaLnBrk="1" latinLnBrk="0" hangingPunct="1">
+      <a:defRPr sz="1200" kern="1200">
+        <a:solidFill>
+          <a:schemeClr val="tx1"/>
+        </a:solidFill>
+        <a:latin typeface="+mn-lt"/>
+        <a:ea typeface="+mn-ea"/>
+        <a:cs typeface="+mn-cs"/>
+      </a:defRPr>
+    </a:lvl3pPr>
+    <a:lvl4pPr marL="1371600" algn="l" defTabSz="457200" rtl="0" eaLnBrk="1" latinLnBrk="0" hangingPunct="1">
+      <a:defRPr sz="1200" kern="1200">
+        <a:solidFill>
+          <a:schemeClr val="tx1"/>
+        </a:solidFill>
+        <a:latin typeface="+mn-lt"/>
+        <a:ea typeface="+mn-ea"/>
+        <a:cs typeface="+mn-cs"/>
+      </a:defRPr>
+    </a:lvl4pPr>
+    <a:lvl5pPr marL="1828800" algn="l" defTabSz="457200" rtl="0" eaLnBrk="1" latinLnBrk="0" hangingPunct="1">
+      <a:defRPr sz="1200" kern="1200">
+        <a:solidFill>
+          <a:schemeClr val="tx1"/>
+        </a:solidFill>
+        <a:latin typeface="+mn-lt"/>
+        <a:ea typeface="+mn-ea"/>
+        <a:cs typeface="+mn-cs"/>
+      </a:defRPr>
+    </a:lvl5pPr>
+    <a:lvl6pPr marL="2286000" algn="l" defTabSz="457200" rtl="0" eaLnBrk="1" latinLnBrk="0" hangingPunct="1">
+      <a:defRPr sz="1200" kern="1200">
+        <a:solidFill>
+          <a:schemeClr val="tx1"/>
+        </a:solidFill>
+        <a:latin typeface="+mn-lt"/>
+        <a:ea typeface="+mn-ea"/>
+        <a:cs typeface="+mn-cs"/>
+      </a:defRPr>
+    </a:lvl6pPr>
+    <a:lvl7pPr marL="2743200" algn="l" defTabSz="457200" rtl="0" eaLnBrk="1" latinLnBrk="0" hangingPunct="1">
+      <a:defRPr sz="1200" kern="1200">
+        <a:solidFill>
+          <a:schemeClr val="tx1"/>
+        </a:solidFill>
+        <a:latin typeface="+mn-lt"/>
+        <a:ea typeface="+mn-ea"/>
+        <a:cs typeface="+mn-cs"/>
+      </a:defRPr>
+    </a:lvl7pPr>
+    <a:lvl8pPr marL="3200400" algn="l" defTabSz="457200" rtl="0" eaLnBrk="1" latinLnBrk="0" hangingPunct="1">
+      <a:defRPr sz="1200" kern="1200">
+        <a:solidFill>
+          <a:schemeClr val="tx1"/>
+        </a:solidFill>
+        <a:latin typeface="+mn-lt"/>
+        <a:ea typeface="+mn-ea"/>
+        <a:cs typeface="+mn-cs"/>
+      </a:defRPr>
+    </a:lvl8pPr>
+    <a:lvl9pPr marL="3657600" algn="l" defTabSz="457200" rtl="0" eaLnBrk="1" latinLnBrk="0" hangingPunct="1">
+      <a:defRPr sz="1200" kern="1200">
+        <a:solidFill>
+          <a:schemeClr val="tx1"/>
+        </a:solidFill>
+        <a:latin typeface="+mn-lt"/>
+        <a:ea typeface="+mn-ea"/>
+        <a:cs typeface="+mn-cs"/>
+      </a:defRPr>
+    </a:lvl9pPr>
+  </p:notesStyle>
+</p:notesMaster>
+</file>
+
+<file path=ppt/notesSlides/notesSlide1.xml><?xml version="1.0" encoding="utf-8"?>
+<p:notes xmlns:a="http://schemas.openxmlformats.org/drawingml/2006/main" xmlns:p="http://schemas.openxmlformats.org/presentationml/2006/main" xmlns:r="http://schemas.openxmlformats.org/officeDocument/2006/relationships">
+  <p:cSld>
+    <p:spTree>
+      <p:nvGrpSpPr>
+        <p:cNvPr id="1" name=""/>
+        <p:cNvGrpSpPr/>
+        <p:nvPr/>
+      </p:nvGrpSpPr>
+      <p:grpSpPr>
+        <a:xfrm>
+          <a:off x="0" y="0"/>
+          <a:ext cx="0" cy="0"/>
+          <a:chOff x="0" y="0"/>
+          <a:chExt cx="0" cy="0"/>
+        </a:xfrm>
+      </p:grpSpPr>
+      <p:sp>
+        <p:nvSpPr>
+          <p:cNvPr id="2" name="Slide Image Placeholder 1"/>
+          <p:cNvSpPr>
+            <a:spLocks noGrp="1"/>
+          </p:cNvSpPr>
+          <p:nvPr>
+            <p:ph type="sldImg" idx="2"/>
+          </p:nvPr>
+        </p:nvSpPr>
+        <p:spPr/>
+      </p:sp>
+      <p:sp>
+        <p:nvSpPr>
+          <p:cNvPr id="3" name="Notes Placeholder 2"/>
+          <p:cNvSpPr>
+            <a:spLocks noGrp="1"/>
+          </p:cNvSpPr>
+          <p:nvPr>
+            <p:ph type="body" idx="3" sz="quarter"/>
+          </p:nvPr>
+        </p:nvSpPr>
+        <p:spPr/>
+        <p:txBody>
+          <a:bodyPr/>
+          <a:lstStyle/>
+          <a:p>
+            <a:r>
+              <a:t>Opening talk track: Welcome students to this module and explain that the goal is not to memorize features. The goal is to understand when a pattern helps authors build more trustworthy, maintainable, user-friendly Power BI solutions.</a:t>
+            </a:r>
+          </a:p>
+          <a:p>
+            <a:r>
+              <a:t>Module framing: Frame this module as scenario analysis with responsible use of advanced and AI-assisted features. Always provide Gov-safe fallbacks.</a:t>
+            </a:r>
+          </a:p>
+          <a:p>
+            <a:r>
+              <a:t>Set expectations: presentation will introduce the theme, then the lab will let learners build or evaluate the pattern hands-on. Encourage questions about tradeoffs, not just button clicks.</a:t>
+            </a:r>
+          </a:p>
+          <a:p>
+            <a:r>
+              <a:t>Further learning: What-if parameters: https://learn.microsoft.com/power-bi/transform-model/desktop-what-if | Analytics pane: https://learn.microsoft.com/power-bi/create-reports/desktop-analytics-pane | AI visuals overview: https://learn.microsoft.com/power-bi/visuals/power-bi-visualization-influencers</a:t>
+            </a:r>
+          </a:p>
+        </p:txBody>
+      </p:sp>
+      <p:sp>
+        <p:nvSpPr>
+          <p:cNvPr id="4" name="Slide Number Placeholder 3"/>
+          <p:cNvSpPr>
+            <a:spLocks noGrp="1"/>
+          </p:cNvSpPr>
+          <p:nvPr>
+            <p:ph type="sldNum" idx="5" sz="quarter"/>
+          </p:nvPr>
+        </p:nvSpPr>
+        <p:spPr/>
+      </p:sp>
+    </p:spTree>
+  </p:cSld>
+  <p:clrMapOvr>
+    <a:masterClrMapping/>
+  </p:clrMapOvr>
+</p:notes>
+</file>
+
+<file path=ppt/notesSlides/notesSlide10.xml><?xml version="1.0" encoding="utf-8"?>
+<p:notes xmlns:a="http://schemas.openxmlformats.org/drawingml/2006/main" xmlns:p="http://schemas.openxmlformats.org/presentationml/2006/main" xmlns:r="http://schemas.openxmlformats.org/officeDocument/2006/relationships">
+  <p:cSld>
+    <p:spTree>
+      <p:nvGrpSpPr>
+        <p:cNvPr id="1" name=""/>
+        <p:cNvGrpSpPr/>
+        <p:nvPr/>
+      </p:nvGrpSpPr>
+      <p:grpSpPr>
+        <a:xfrm>
+          <a:off x="0" y="0"/>
+          <a:ext cx="0" cy="0"/>
+          <a:chOff x="0" y="0"/>
+          <a:chExt cx="0" cy="0"/>
+        </a:xfrm>
+      </p:grpSpPr>
+      <p:sp>
+        <p:nvSpPr>
+          <p:cNvPr id="2" name="Slide Image Placeholder 1"/>
+          <p:cNvSpPr>
+            <a:spLocks noGrp="1"/>
+          </p:cNvSpPr>
+          <p:nvPr>
+            <p:ph type="sldImg" idx="2"/>
+          </p:nvPr>
+        </p:nvSpPr>
+        <p:spPr/>
+      </p:sp>
+      <p:sp>
+        <p:nvSpPr>
+          <p:cNvPr id="3" name="Notes Placeholder 2"/>
+          <p:cNvSpPr>
+            <a:spLocks noGrp="1"/>
+          </p:cNvSpPr>
+          <p:nvPr>
+            <p:ph type="body" idx="3" sz="quarter"/>
+          </p:nvPr>
+        </p:nvSpPr>
+        <p:spPr/>
+        <p:txBody>
+          <a:bodyPr/>
+          <a:lstStyle/>
+          <a:p>
+            <a:r>
+              <a:t>Core message: 8. Azure Machine Learning integration.</a:t>
+            </a:r>
+          </a:p>
+          <a:p>
+            <a:r>
+              <a:t>Talking points to expand: Talking points, learner value, and lab connection Talking points • Architecture overview • Identity and network Why it helps • Region and cloud alignment • Model governance Lab connection Coverage: Covered. Use the lab README to demonstrate or discuss this topic. Review terms: alignment, overview. 10</a:t>
+            </a:r>
+          </a:p>
+          <a:p>
+            <a:r>
+              <a:t>Why it matters: Frame this module as scenario analysis with responsible use of advanced and AI-assisted features. Always provide Gov-safe fallbacks.</a:t>
+            </a:r>
+          </a:p>
+          <a:p>
+            <a:r>
+              <a:t>How it helps users: connect the technical pattern to clearer decisions, fewer confusing report interactions, better trust in results, or easier support.</a:t>
+            </a:r>
+          </a:p>
+          <a:p>
+            <a:r>
+              <a:t>How it builds on prior lessons: reference the previous layer in the workshop, such as prepared data, a clean model, tested measures, or report UX conventions.</a:t>
+            </a:r>
+          </a:p>
+          <a:p>
+            <a:r>
+              <a:t>Lab connection: Show where this concept appears in the module lab. If the lab path is conceptual or Verify for Gov, explain what learners should document instead of building hands-on.</a:t>
+            </a:r>
+          </a:p>
+          <a:p>
+            <a:r>
+              <a:t>Instructor prompt: Ask one learner to describe the risk of skipping this pattern or using it without validation.</a:t>
+            </a:r>
+          </a:p>
+          <a:p>
+            <a:r>
+              <a:t>Further learning: What-if parameters: https://learn.microsoft.com/power-bi/transform-model/desktop-what-if | Analytics pane: https://learn.microsoft.com/power-bi/create-reports/desktop-analytics-pane | AI visuals overview: https://learn.microsoft.com/power-bi/visuals/power-bi-visualization-influencers</a:t>
+            </a:r>
+          </a:p>
+        </p:txBody>
+      </p:sp>
+      <p:sp>
+        <p:nvSpPr>
+          <p:cNvPr id="4" name="Slide Number Placeholder 3"/>
+          <p:cNvSpPr>
+            <a:spLocks noGrp="1"/>
+          </p:cNvSpPr>
+          <p:nvPr>
+            <p:ph type="sldNum" idx="5" sz="quarter"/>
+          </p:nvPr>
+        </p:nvSpPr>
+        <p:spPr/>
+      </p:sp>
+    </p:spTree>
+  </p:cSld>
+  <p:clrMapOvr>
+    <a:masterClrMapping/>
+  </p:clrMapOvr>
+</p:notes>
+</file>
+
+<file path=ppt/notesSlides/notesSlide11.xml><?xml version="1.0" encoding="utf-8"?>
+<p:notes xmlns:a="http://schemas.openxmlformats.org/drawingml/2006/main" xmlns:p="http://schemas.openxmlformats.org/presentationml/2006/main" xmlns:r="http://schemas.openxmlformats.org/officeDocument/2006/relationships">
+  <p:cSld>
+    <p:spTree>
+      <p:nvGrpSpPr>
+        <p:cNvPr id="1" name=""/>
+        <p:cNvGrpSpPr/>
+        <p:nvPr/>
+      </p:nvGrpSpPr>
+      <p:grpSpPr>
+        <a:xfrm>
+          <a:off x="0" y="0"/>
+          <a:ext cx="0" cy="0"/>
+          <a:chOff x="0" y="0"/>
+          <a:chExt cx="0" cy="0"/>
+        </a:xfrm>
+      </p:grpSpPr>
+      <p:sp>
+        <p:nvSpPr>
+          <p:cNvPr id="2" name="Slide Image Placeholder 1"/>
+          <p:cNvSpPr>
+            <a:spLocks noGrp="1"/>
+          </p:cNvSpPr>
+          <p:nvPr>
+            <p:ph type="sldImg" idx="2"/>
+          </p:nvPr>
+        </p:nvSpPr>
+        <p:spPr/>
+      </p:sp>
+      <p:sp>
+        <p:nvSpPr>
+          <p:cNvPr id="3" name="Notes Placeholder 2"/>
+          <p:cNvSpPr>
+            <a:spLocks noGrp="1"/>
+          </p:cNvSpPr>
+          <p:nvPr>
+            <p:ph type="body" idx="3" sz="quarter"/>
+          </p:nvPr>
+        </p:nvSpPr>
+        <p:spPr/>
+        <p:txBody>
+          <a:bodyPr/>
+          <a:lstStyle/>
+          <a:p>
+            <a:r>
+              <a:t>Core message: 9. Copilot in Power BI/Fabric.</a:t>
+            </a:r>
+          </a:p>
+          <a:p>
+            <a:r>
+              <a:t>Talking points to expand: Talking points, learner value, and lab connection Talking points • Authoring assistance • Summarization • Data exploration Why it helps • Tenant/capacity constraints • Gov availability caveats Lab connection Coverage: Covered. Use the lab README to demonstrate or discuss this topic. Review terms: assistance, authoring, caveats, exploration, summarization. 11</a:t>
+            </a:r>
+          </a:p>
+          <a:p>
+            <a:r>
+              <a:t>Why it matters: Frame this module as scenario analysis with responsible use of advanced and AI-assisted features. Always provide Gov-safe fallbacks.</a:t>
+            </a:r>
+          </a:p>
+          <a:p>
+            <a:r>
+              <a:t>How it helps users: connect the technical pattern to clearer decisions, fewer confusing report interactions, better trust in results, or easier support.</a:t>
+            </a:r>
+          </a:p>
+          <a:p>
+            <a:r>
+              <a:t>How it builds on prior lessons: reference the previous layer in the workshop, such as prepared data, a clean model, tested measures, or report UX conventions.</a:t>
+            </a:r>
+          </a:p>
+          <a:p>
+            <a:r>
+              <a:t>Lab connection: Show where this concept appears in the module lab. If the lab path is conceptual or Verify for Gov, explain what learners should document instead of building hands-on.</a:t>
+            </a:r>
+          </a:p>
+          <a:p>
+            <a:r>
+              <a:t>Instructor prompt: Ask one learner to describe the risk of skipping this pattern or using it without validation.</a:t>
+            </a:r>
+          </a:p>
+          <a:p>
+            <a:r>
+              <a:t>Further learning: What-if parameters: https://learn.microsoft.com/power-bi/transform-model/desktop-what-if | Analytics pane: https://learn.microsoft.com/power-bi/create-reports/desktop-analytics-pane | AI visuals overview: https://learn.microsoft.com/power-bi/visuals/power-bi-visualization-influencers</a:t>
+            </a:r>
+          </a:p>
+        </p:txBody>
+      </p:sp>
+      <p:sp>
+        <p:nvSpPr>
+          <p:cNvPr id="4" name="Slide Number Placeholder 3"/>
+          <p:cNvSpPr>
+            <a:spLocks noGrp="1"/>
+          </p:cNvSpPr>
+          <p:nvPr>
+            <p:ph type="sldNum" idx="5" sz="quarter"/>
+          </p:nvPr>
+        </p:nvSpPr>
+        <p:spPr/>
+      </p:sp>
+    </p:spTree>
+  </p:cSld>
+  <p:clrMapOvr>
+    <a:masterClrMapping/>
+  </p:clrMapOvr>
+</p:notes>
+</file>
+
+<file path=ppt/notesSlides/notesSlide12.xml><?xml version="1.0" encoding="utf-8"?>
+<p:notes xmlns:a="http://schemas.openxmlformats.org/drawingml/2006/main" xmlns:p="http://schemas.openxmlformats.org/presentationml/2006/main" xmlns:r="http://schemas.openxmlformats.org/officeDocument/2006/relationships">
+  <p:cSld>
+    <p:spTree>
+      <p:nvGrpSpPr>
+        <p:cNvPr id="1" name=""/>
+        <p:cNvGrpSpPr/>
+        <p:nvPr/>
+      </p:nvGrpSpPr>
+      <p:grpSpPr>
+        <a:xfrm>
+          <a:off x="0" y="0"/>
+          <a:ext cx="0" cy="0"/>
+          <a:chOff x="0" y="0"/>
+          <a:chExt cx="0" cy="0"/>
+        </a:xfrm>
+      </p:grpSpPr>
+      <p:sp>
+        <p:nvSpPr>
+          <p:cNvPr id="2" name="Slide Image Placeholder 1"/>
+          <p:cNvSpPr>
+            <a:spLocks noGrp="1"/>
+          </p:cNvSpPr>
+          <p:nvPr>
+            <p:ph type="sldImg" idx="2"/>
+          </p:nvPr>
+        </p:nvSpPr>
+        <p:spPr/>
+      </p:sp>
+      <p:sp>
+        <p:nvSpPr>
+          <p:cNvPr id="3" name="Notes Placeholder 2"/>
+          <p:cNvSpPr>
+            <a:spLocks noGrp="1"/>
+          </p:cNvSpPr>
+          <p:nvPr>
+            <p:ph type="body" idx="3" sz="quarter"/>
+          </p:nvPr>
+        </p:nvSpPr>
+        <p:spPr/>
+        <p:txBody>
+          <a:bodyPr/>
+          <a:lstStyle/>
+          <a:p>
+            <a:r>
+              <a:t>Core message: 10. Gov-safe alternate paths.</a:t>
+            </a:r>
+          </a:p>
+          <a:p>
+            <a:r>
+              <a:t>Talking points to expand: Talking points, learner value, and lab connection Talking points • What-if parameters • Manual driver analysis • Decomposition with standard visuals Why it helps • DAX-based exception flags • Documented assumptions Lab connection Coverage: Covered. Use the lab README to demonstrate or discuss this topic. Review terms: exception, flags, standard. 12</a:t>
+            </a:r>
+          </a:p>
+          <a:p>
+            <a:r>
+              <a:t>Why it matters: Frame this module as scenario analysis with responsible use of advanced and AI-assisted features. Always provide Gov-safe fallbacks.</a:t>
+            </a:r>
+          </a:p>
+          <a:p>
+            <a:r>
+              <a:t>How it helps users: connect the technical pattern to clearer decisions, fewer confusing report interactions, better trust in results, or easier support.</a:t>
+            </a:r>
+          </a:p>
+          <a:p>
+            <a:r>
+              <a:t>How it builds on prior lessons: reference the previous layer in the workshop, such as prepared data, a clean model, tested measures, or report UX conventions.</a:t>
+            </a:r>
+          </a:p>
+          <a:p>
+            <a:r>
+              <a:t>Lab connection: Show where this concept appears in the module lab. If the lab path is conceptual or Verify for Gov, explain what learners should document instead of building hands-on.</a:t>
+            </a:r>
+          </a:p>
+          <a:p>
+            <a:r>
+              <a:t>Instructor prompt: Ask one learner to describe the risk of skipping this pattern or using it without validation.</a:t>
+            </a:r>
+          </a:p>
+          <a:p>
+            <a:r>
+              <a:t>Further learning: What-if parameters: https://learn.microsoft.com/power-bi/transform-model/desktop-what-if | Analytics pane: https://learn.microsoft.com/power-bi/create-reports/desktop-analytics-pane | AI visuals overview: https://learn.microsoft.com/power-bi/visuals/power-bi-visualization-influencers</a:t>
+            </a:r>
+          </a:p>
+        </p:txBody>
+      </p:sp>
+      <p:sp>
+        <p:nvSpPr>
+          <p:cNvPr id="4" name="Slide Number Placeholder 3"/>
+          <p:cNvSpPr>
+            <a:spLocks noGrp="1"/>
+          </p:cNvSpPr>
+          <p:nvPr>
+            <p:ph type="sldNum" idx="5" sz="quarter"/>
+          </p:nvPr>
+        </p:nvSpPr>
+        <p:spPr/>
+      </p:sp>
+    </p:spTree>
+  </p:cSld>
+  <p:clrMapOvr>
+    <a:masterClrMapping/>
+  </p:clrMapOvr>
+</p:notes>
+</file>
+
+<file path=ppt/notesSlides/notesSlide13.xml><?xml version="1.0" encoding="utf-8"?>
+<p:notes xmlns:a="http://schemas.openxmlformats.org/drawingml/2006/main" xmlns:p="http://schemas.openxmlformats.org/presentationml/2006/main" xmlns:r="http://schemas.openxmlformats.org/officeDocument/2006/relationships">
+  <p:cSld>
+    <p:spTree>
+      <p:nvGrpSpPr>
+        <p:cNvPr id="1" name=""/>
+        <p:cNvGrpSpPr/>
+        <p:nvPr/>
+      </p:nvGrpSpPr>
+      <p:grpSpPr>
+        <a:xfrm>
+          <a:off x="0" y="0"/>
+          <a:ext cx="0" cy="0"/>
+          <a:chOff x="0" y="0"/>
+          <a:chExt cx="0" cy="0"/>
+        </a:xfrm>
+      </p:grpSpPr>
+      <p:sp>
+        <p:nvSpPr>
+          <p:cNvPr id="2" name="Slide Image Placeholder 1"/>
+          <p:cNvSpPr>
+            <a:spLocks noGrp="1"/>
+          </p:cNvSpPr>
+          <p:nvPr>
+            <p:ph type="sldImg" idx="2"/>
+          </p:nvPr>
+        </p:nvSpPr>
+        <p:spPr/>
+      </p:sp>
+      <p:sp>
+        <p:nvSpPr>
+          <p:cNvPr id="3" name="Notes Placeholder 2"/>
+          <p:cNvSpPr>
+            <a:spLocks noGrp="1"/>
+          </p:cNvSpPr>
+          <p:nvPr>
+            <p:ph type="body" idx="3" sz="quarter"/>
+          </p:nvPr>
+        </p:nvSpPr>
+        <p:spPr/>
+        <p:txBody>
+          <a:bodyPr/>
+          <a:lstStyle/>
+          <a:p>
+            <a:r>
+              <a:t>Core message: 11. Delivery decision framework.</a:t>
+            </a:r>
+          </a:p>
+          <a:p>
+            <a:r>
+              <a:t>Talking points to expand: Talking points, learner value, and lab connection Talking points • Is the feature available? • Is it approved? Why it helps • Is data residency acceptable? • Is there a non-AI fallback? Lab connection Coverage: Covered. Use the lab README to demonstrate or discuss this topic. Review terms: acceptable, decision, framework. 13</a:t>
+            </a:r>
+          </a:p>
+          <a:p>
+            <a:r>
+              <a:t>Why it matters: Frame this module as scenario analysis with responsible use of advanced and AI-assisted features. Always provide Gov-safe fallbacks.</a:t>
+            </a:r>
+          </a:p>
+          <a:p>
+            <a:r>
+              <a:t>How it helps users: connect the technical pattern to clearer decisions, fewer confusing report interactions, better trust in results, or easier support.</a:t>
+            </a:r>
+          </a:p>
+          <a:p>
+            <a:r>
+              <a:t>How it builds on prior lessons: reference the previous layer in the workshop, such as prepared data, a clean model, tested measures, or report UX conventions.</a:t>
+            </a:r>
+          </a:p>
+          <a:p>
+            <a:r>
+              <a:t>Lab connection: Show where this concept appears in the module lab. If the lab path is conceptual or Verify for Gov, explain what learners should document instead of building hands-on.</a:t>
+            </a:r>
+          </a:p>
+          <a:p>
+            <a:r>
+              <a:t>Instructor prompt: Ask one learner to describe the risk of skipping this pattern or using it without validation.</a:t>
+            </a:r>
+          </a:p>
+          <a:p>
+            <a:r>
+              <a:t>Further learning: What-if parameters: https://learn.microsoft.com/power-bi/transform-model/desktop-what-if | Analytics pane: https://learn.microsoft.com/power-bi/create-reports/desktop-analytics-pane | AI visuals overview: https://learn.microsoft.com/power-bi/visuals/power-bi-visualization-influencers</a:t>
+            </a:r>
+          </a:p>
+        </p:txBody>
+      </p:sp>
+      <p:sp>
+        <p:nvSpPr>
+          <p:cNvPr id="4" name="Slide Number Placeholder 3"/>
+          <p:cNvSpPr>
+            <a:spLocks noGrp="1"/>
+          </p:cNvSpPr>
+          <p:nvPr>
+            <p:ph type="sldNum" idx="5" sz="quarter"/>
+          </p:nvPr>
+        </p:nvSpPr>
+        <p:spPr/>
+      </p:sp>
+    </p:spTree>
+  </p:cSld>
+  <p:clrMapOvr>
+    <a:masterClrMapping/>
+  </p:clrMapOvr>
+</p:notes>
+</file>
+
+<file path=ppt/notesSlides/notesSlide14.xml><?xml version="1.0" encoding="utf-8"?>
+<p:notes xmlns:a="http://schemas.openxmlformats.org/drawingml/2006/main" xmlns:p="http://schemas.openxmlformats.org/presentationml/2006/main" xmlns:r="http://schemas.openxmlformats.org/officeDocument/2006/relationships">
+  <p:cSld>
+    <p:spTree>
+      <p:nvGrpSpPr>
+        <p:cNvPr id="1" name=""/>
+        <p:cNvGrpSpPr/>
+        <p:nvPr/>
+      </p:nvGrpSpPr>
+      <p:grpSpPr>
+        <a:xfrm>
+          <a:off x="0" y="0"/>
+          <a:ext cx="0" cy="0"/>
+          <a:chOff x="0" y="0"/>
+          <a:chExt cx="0" cy="0"/>
+        </a:xfrm>
+      </p:grpSpPr>
+      <p:sp>
+        <p:nvSpPr>
+          <p:cNvPr id="2" name="Slide Image Placeholder 1"/>
+          <p:cNvSpPr>
+            <a:spLocks noGrp="1"/>
+          </p:cNvSpPr>
+          <p:nvPr>
+            <p:ph type="sldImg" idx="2"/>
+          </p:nvPr>
+        </p:nvSpPr>
+        <p:spPr/>
+      </p:sp>
+      <p:sp>
+        <p:nvSpPr>
+          <p:cNvPr id="3" name="Notes Placeholder 2"/>
+          <p:cNvSpPr>
+            <a:spLocks noGrp="1"/>
+          </p:cNvSpPr>
+          <p:nvPr>
+            <p:ph type="body" idx="3" sz="quarter"/>
+          </p:nvPr>
+        </p:nvSpPr>
+        <p:spPr/>
+        <p:txBody>
+          <a:bodyPr/>
+          <a:lstStyle/>
+          <a:p>
+            <a:r>
+              <a:t>Speaker guidance: Treat this as a checkpoint. Ask learners to explain the pattern in their own words and identify where they would use it in a real report.</a:t>
+            </a:r>
+          </a:p>
+          <a:p>
+            <a:r>
+              <a:t>Validation prompt: What would prove this worked? Look for a simple visual, expected filter behavior, or a documented before/after result.</a:t>
+            </a:r>
+          </a:p>
+          <a:p>
+            <a:r>
+              <a:t>Further learning: What-if parameters: https://learn.microsoft.com/power-bi/transform-model/desktop-what-if | Analytics pane: https://learn.microsoft.com/power-bi/create-reports/desktop-analytics-pane | AI visuals overview: https://learn.microsoft.com/power-bi/visuals/power-bi-visualization-influencers</a:t>
+            </a:r>
+          </a:p>
+        </p:txBody>
+      </p:sp>
+      <p:sp>
+        <p:nvSpPr>
+          <p:cNvPr id="4" name="Slide Number Placeholder 3"/>
+          <p:cNvSpPr>
+            <a:spLocks noGrp="1"/>
+          </p:cNvSpPr>
+          <p:nvPr>
+            <p:ph type="sldNum" idx="5" sz="quarter"/>
+          </p:nvPr>
+        </p:nvSpPr>
+        <p:spPr/>
+      </p:sp>
+    </p:spTree>
+  </p:cSld>
+  <p:clrMapOvr>
+    <a:masterClrMapping/>
+  </p:clrMapOvr>
+</p:notes>
+</file>
+
+<file path=ppt/notesSlides/notesSlide15.xml><?xml version="1.0" encoding="utf-8"?>
+<p:notes xmlns:a="http://schemas.openxmlformats.org/drawingml/2006/main" xmlns:p="http://schemas.openxmlformats.org/presentationml/2006/main" xmlns:r="http://schemas.openxmlformats.org/officeDocument/2006/relationships">
+  <p:cSld>
+    <p:spTree>
+      <p:nvGrpSpPr>
+        <p:cNvPr id="1" name=""/>
+        <p:cNvGrpSpPr/>
+        <p:nvPr/>
+      </p:nvGrpSpPr>
+      <p:grpSpPr>
+        <a:xfrm>
+          <a:off x="0" y="0"/>
+          <a:ext cx="0" cy="0"/>
+          <a:chOff x="0" y="0"/>
+          <a:chExt cx="0" cy="0"/>
+        </a:xfrm>
+      </p:grpSpPr>
+      <p:sp>
+        <p:nvSpPr>
+          <p:cNvPr id="2" name="Slide Image Placeholder 1"/>
+          <p:cNvSpPr>
+            <a:spLocks noGrp="1"/>
+          </p:cNvSpPr>
+          <p:nvPr>
+            <p:ph type="sldImg" idx="2"/>
+          </p:nvPr>
+        </p:nvSpPr>
+        <p:spPr/>
+      </p:sp>
+      <p:sp>
+        <p:nvSpPr>
+          <p:cNvPr id="3" name="Notes Placeholder 2"/>
+          <p:cNvSpPr>
+            <a:spLocks noGrp="1"/>
+          </p:cNvSpPr>
+          <p:nvPr>
+            <p:ph type="body" idx="3" sz="quarter"/>
+          </p:nvPr>
+        </p:nvSpPr>
+        <p:spPr/>
+        <p:txBody>
+          <a:bodyPr/>
+          <a:lstStyle/>
+          <a:p>
+            <a:r>
+              <a:t>Speaker guidance: Use this slide as the handoff for self-study. Do not read every link aloud. Point out which source is most relevant to the lab just completed and which source helps learners go deeper after class.</a:t>
+            </a:r>
+          </a:p>
+          <a:p>
+            <a:r>
+              <a:t>Suggested prompt: Ask learners to bookmark the source that best matches the skill they want to improve next.</a:t>
+            </a:r>
+          </a:p>
+          <a:p>
+            <a:r>
+              <a:t>Further learning: What-if parameters: https://learn.microsoft.com/power-bi/transform-model/desktop-what-if | Analytics pane: https://learn.microsoft.com/power-bi/create-reports/desktop-analytics-pane | AI visuals overview: https://learn.microsoft.com/power-bi/visuals/power-bi-visualization-influencers</a:t>
+            </a:r>
+          </a:p>
+        </p:txBody>
+      </p:sp>
+      <p:sp>
+        <p:nvSpPr>
+          <p:cNvPr id="4" name="Slide Number Placeholder 3"/>
+          <p:cNvSpPr>
+            <a:spLocks noGrp="1"/>
+          </p:cNvSpPr>
+          <p:nvPr>
+            <p:ph type="sldNum" idx="5" sz="quarter"/>
+          </p:nvPr>
+        </p:nvSpPr>
+        <p:spPr/>
+      </p:sp>
+    </p:spTree>
+  </p:cSld>
+  <p:clrMapOvr>
+    <a:masterClrMapping/>
+  </p:clrMapOvr>
+</p:notes>
+</file>
+
+<file path=ppt/notesSlides/notesSlide2.xml><?xml version="1.0" encoding="utf-8"?>
+<p:notes xmlns:a="http://schemas.openxmlformats.org/drawingml/2006/main" xmlns:p="http://schemas.openxmlformats.org/presentationml/2006/main" xmlns:r="http://schemas.openxmlformats.org/officeDocument/2006/relationships">
+  <p:cSld>
+    <p:spTree>
+      <p:nvGrpSpPr>
+        <p:cNvPr id="1" name=""/>
+        <p:cNvGrpSpPr/>
+        <p:nvPr/>
+      </p:nvGrpSpPr>
+      <p:grpSpPr>
+        <a:xfrm>
+          <a:off x="0" y="0"/>
+          <a:ext cx="0" cy="0"/>
+          <a:chOff x="0" y="0"/>
+          <a:chExt cx="0" cy="0"/>
+        </a:xfrm>
+      </p:grpSpPr>
+      <p:sp>
+        <p:nvSpPr>
+          <p:cNvPr id="2" name="Slide Image Placeholder 1"/>
+          <p:cNvSpPr>
+            <a:spLocks noGrp="1"/>
+          </p:cNvSpPr>
+          <p:nvPr>
+            <p:ph type="sldImg" idx="2"/>
+          </p:nvPr>
+        </p:nvSpPr>
+        <p:spPr/>
+      </p:sp>
+      <p:sp>
+        <p:nvSpPr>
+          <p:cNvPr id="3" name="Notes Placeholder 2"/>
+          <p:cNvSpPr>
+            <a:spLocks noGrp="1"/>
+          </p:cNvSpPr>
+          <p:nvPr>
+            <p:ph type="body" idx="3" sz="quarter"/>
+          </p:nvPr>
+        </p:nvSpPr>
+        <p:spPr/>
+        <p:txBody>
+          <a:bodyPr/>
+          <a:lstStyle/>
+          <a:p>
+            <a:r>
+              <a:t>Speaker guidance: Emphasize sequence and dependency. Explain what students should already know from prior modules and what this module adds on top.</a:t>
+            </a:r>
+          </a:p>
+          <a:p>
+            <a:r>
+              <a:t>Module framing: Frame this module as scenario analysis with responsible use of advanced and AI-assisted features. Always provide Gov-safe fallbacks.</a:t>
+            </a:r>
+          </a:p>
+          <a:p>
+            <a:r>
+              <a:t>Transition: After this slide, move from the concept map into the specific pattern or lab activity.</a:t>
+            </a:r>
+          </a:p>
+          <a:p>
+            <a:r>
+              <a:t>Further learning: What-if parameters: https://learn.microsoft.com/power-bi/transform-model/desktop-what-if | Analytics pane: https://learn.microsoft.com/power-bi/create-reports/desktop-analytics-pane | AI visuals overview: https://learn.microsoft.com/power-bi/visuals/power-bi-visualization-influencers</a:t>
+            </a:r>
+          </a:p>
+        </p:txBody>
+      </p:sp>
+      <p:sp>
+        <p:nvSpPr>
+          <p:cNvPr id="4" name="Slide Number Placeholder 3"/>
+          <p:cNvSpPr>
+            <a:spLocks noGrp="1"/>
+          </p:cNvSpPr>
+          <p:nvPr>
+            <p:ph type="sldNum" idx="5" sz="quarter"/>
+          </p:nvPr>
+        </p:nvSpPr>
+        <p:spPr/>
+      </p:sp>
+    </p:spTree>
+  </p:cSld>
+  <p:clrMapOvr>
+    <a:masterClrMapping/>
+  </p:clrMapOvr>
+</p:notes>
+</file>
+
+<file path=ppt/notesSlides/notesSlide3.xml><?xml version="1.0" encoding="utf-8"?>
+<p:notes xmlns:a="http://schemas.openxmlformats.org/drawingml/2006/main" xmlns:p="http://schemas.openxmlformats.org/presentationml/2006/main" xmlns:r="http://schemas.openxmlformats.org/officeDocument/2006/relationships">
+  <p:cSld>
+    <p:spTree>
+      <p:nvGrpSpPr>
+        <p:cNvPr id="1" name=""/>
+        <p:cNvGrpSpPr/>
+        <p:nvPr/>
+      </p:nvGrpSpPr>
+      <p:grpSpPr>
+        <a:xfrm>
+          <a:off x="0" y="0"/>
+          <a:ext cx="0" cy="0"/>
+          <a:chOff x="0" y="0"/>
+          <a:chExt cx="0" cy="0"/>
+        </a:xfrm>
+      </p:grpSpPr>
+      <p:sp>
+        <p:nvSpPr>
+          <p:cNvPr id="2" name="Slide Image Placeholder 1"/>
+          <p:cNvSpPr>
+            <a:spLocks noGrp="1"/>
+          </p:cNvSpPr>
+          <p:nvPr>
+            <p:ph type="sldImg" idx="2"/>
+          </p:nvPr>
+        </p:nvSpPr>
+        <p:spPr/>
+      </p:sp>
+      <p:sp>
+        <p:nvSpPr>
+          <p:cNvPr id="3" name="Notes Placeholder 2"/>
+          <p:cNvSpPr>
+            <a:spLocks noGrp="1"/>
+          </p:cNvSpPr>
+          <p:nvPr>
+            <p:ph type="body" idx="3" sz="quarter"/>
+          </p:nvPr>
+        </p:nvSpPr>
+        <p:spPr/>
+        <p:txBody>
+          <a:bodyPr/>
+          <a:lstStyle/>
+          <a:p>
+            <a:r>
+              <a:t>Core message: 1. Advanced analytics vs. AI-assisted features.</a:t>
+            </a:r>
+          </a:p>
+          <a:p>
+            <a:r>
+              <a:t>Talking points to expand: Talking points, learner value, and lab connection Talking points • Analytical patterns • AI visuals • External ML integration Why it helps • Copilot experiences • Governance and availability Lab connection Coverage: Covered. Use the lab README to demonstrate or discuss this topic. Review terms: experiences, external, patterns. 03</a:t>
+            </a:r>
+          </a:p>
+          <a:p>
+            <a:r>
+              <a:t>Why it matters: Frame this module as scenario analysis with responsible use of advanced and AI-assisted features. Always provide Gov-safe fallbacks.</a:t>
+            </a:r>
+          </a:p>
+          <a:p>
+            <a:r>
+              <a:t>How it helps users: connect the technical pattern to clearer decisions, fewer confusing report interactions, better trust in results, or easier support.</a:t>
+            </a:r>
+          </a:p>
+          <a:p>
+            <a:r>
+              <a:t>How it builds on prior lessons: reference the previous layer in the workshop, such as prepared data, a clean model, tested measures, or report UX conventions.</a:t>
+            </a:r>
+          </a:p>
+          <a:p>
+            <a:r>
+              <a:t>Lab connection: Show where this concept appears in the module lab. If the lab path is conceptual or Verify for Gov, explain what learners should document instead of building hands-on.</a:t>
+            </a:r>
+          </a:p>
+          <a:p>
+            <a:r>
+              <a:t>Instructor prompt: Ask one learner to describe the risk of skipping this pattern or using it without validation.</a:t>
+            </a:r>
+          </a:p>
+          <a:p>
+            <a:r>
+              <a:t>Further learning: What-if parameters: https://learn.microsoft.com/power-bi/transform-model/desktop-what-if | Analytics pane: https://learn.microsoft.com/power-bi/create-reports/desktop-analytics-pane | AI visuals overview: https://learn.microsoft.com/power-bi/visuals/power-bi-visualization-influencers</a:t>
+            </a:r>
+          </a:p>
+        </p:txBody>
+      </p:sp>
+      <p:sp>
+        <p:nvSpPr>
+          <p:cNvPr id="4" name="Slide Number Placeholder 3"/>
+          <p:cNvSpPr>
+            <a:spLocks noGrp="1"/>
+          </p:cNvSpPr>
+          <p:nvPr>
+            <p:ph type="sldNum" idx="5" sz="quarter"/>
+          </p:nvPr>
+        </p:nvSpPr>
+        <p:spPr/>
+      </p:sp>
+    </p:spTree>
+  </p:cSld>
+  <p:clrMapOvr>
+    <a:masterClrMapping/>
+  </p:clrMapOvr>
+</p:notes>
+</file>
+
+<file path=ppt/notesSlides/notesSlide4.xml><?xml version="1.0" encoding="utf-8"?>
+<p:notes xmlns:a="http://schemas.openxmlformats.org/drawingml/2006/main" xmlns:p="http://schemas.openxmlformats.org/presentationml/2006/main" xmlns:r="http://schemas.openxmlformats.org/officeDocument/2006/relationships">
+  <p:cSld>
+    <p:spTree>
+      <p:nvGrpSpPr>
+        <p:cNvPr id="1" name=""/>
+        <p:cNvGrpSpPr/>
+        <p:nvPr/>
+      </p:nvGrpSpPr>
+      <p:grpSpPr>
+        <a:xfrm>
+          <a:off x="0" y="0"/>
+          <a:ext cx="0" cy="0"/>
+          <a:chOff x="0" y="0"/>
+          <a:chExt cx="0" cy="0"/>
+        </a:xfrm>
+      </p:grpSpPr>
+      <p:sp>
+        <p:nvSpPr>
+          <p:cNvPr id="2" name="Slide Image Placeholder 1"/>
+          <p:cNvSpPr>
+            <a:spLocks noGrp="1"/>
+          </p:cNvSpPr>
+          <p:nvPr>
+            <p:ph type="sldImg" idx="2"/>
+          </p:nvPr>
+        </p:nvSpPr>
+        <p:spPr/>
+      </p:sp>
+      <p:sp>
+        <p:nvSpPr>
+          <p:cNvPr id="3" name="Notes Placeholder 2"/>
+          <p:cNvSpPr>
+            <a:spLocks noGrp="1"/>
+          </p:cNvSpPr>
+          <p:nvPr>
+            <p:ph type="body" idx="3" sz="quarter"/>
+          </p:nvPr>
+        </p:nvSpPr>
+        <p:spPr/>
+        <p:txBody>
+          <a:bodyPr/>
+          <a:lstStyle/>
+          <a:p>
+            <a:r>
+              <a:t>Core message: 2. What-if parameters.</a:t>
+            </a:r>
+          </a:p>
+          <a:p>
+            <a:r>
+              <a:t>Talking points to expand: Talking points, learner value, and lab connection Talking points • Parameter table • Generated measure Why it helps • Scenario analysis • Business interpretation Lab connection Coverage: Covered. Use the lab README to demonstrate or discuss this topic. Review terms: business. 04</a:t>
+            </a:r>
+          </a:p>
+          <a:p>
+            <a:r>
+              <a:t>Why it matters: Frame this module as scenario analysis with responsible use of advanced and AI-assisted features. Always provide Gov-safe fallbacks.</a:t>
+            </a:r>
+          </a:p>
+          <a:p>
+            <a:r>
+              <a:t>How it helps users: connect the technical pattern to clearer decisions, fewer confusing report interactions, better trust in results, or easier support.</a:t>
+            </a:r>
+          </a:p>
+          <a:p>
+            <a:r>
+              <a:t>How it builds on prior lessons: reference the previous layer in the workshop, such as prepared data, a clean model, tested measures, or report UX conventions.</a:t>
+            </a:r>
+          </a:p>
+          <a:p>
+            <a:r>
+              <a:t>Lab connection: Show where this concept appears in the module lab. If the lab path is conceptual or Verify for Gov, explain what learners should document instead of building hands-on.</a:t>
+            </a:r>
+          </a:p>
+          <a:p>
+            <a:r>
+              <a:t>Instructor prompt: Ask one learner to describe the risk of skipping this pattern or using it without validation.</a:t>
+            </a:r>
+          </a:p>
+          <a:p>
+            <a:r>
+              <a:t>Further learning: What-if parameters: https://learn.microsoft.com/power-bi/transform-model/desktop-what-if | Analytics pane: https://learn.microsoft.com/power-bi/create-reports/desktop-analytics-pane | AI visuals overview: https://learn.microsoft.com/power-bi/visuals/power-bi-visualization-influencers</a:t>
+            </a:r>
+          </a:p>
+        </p:txBody>
+      </p:sp>
+      <p:sp>
+        <p:nvSpPr>
+          <p:cNvPr id="4" name="Slide Number Placeholder 3"/>
+          <p:cNvSpPr>
+            <a:spLocks noGrp="1"/>
+          </p:cNvSpPr>
+          <p:nvPr>
+            <p:ph type="sldNum" idx="5" sz="quarter"/>
+          </p:nvPr>
+        </p:nvSpPr>
+        <p:spPr/>
+      </p:sp>
+    </p:spTree>
+  </p:cSld>
+  <p:clrMapOvr>
+    <a:masterClrMapping/>
+  </p:clrMapOvr>
+</p:notes>
+</file>
+
+<file path=ppt/notesSlides/notesSlide5.xml><?xml version="1.0" encoding="utf-8"?>
+<p:notes xmlns:a="http://schemas.openxmlformats.org/drawingml/2006/main" xmlns:p="http://schemas.openxmlformats.org/presentationml/2006/main" xmlns:r="http://schemas.openxmlformats.org/officeDocument/2006/relationships">
+  <p:cSld>
+    <p:spTree>
+      <p:nvGrpSpPr>
+        <p:cNvPr id="1" name=""/>
+        <p:cNvGrpSpPr/>
+        <p:nvPr/>
+      </p:nvGrpSpPr>
+      <p:grpSpPr>
+        <a:xfrm>
+          <a:off x="0" y="0"/>
+          <a:ext cx="0" cy="0"/>
+          <a:chOff x="0" y="0"/>
+          <a:chExt cx="0" cy="0"/>
+        </a:xfrm>
+      </p:grpSpPr>
+      <p:sp>
+        <p:nvSpPr>
+          <p:cNvPr id="2" name="Slide Image Placeholder 1"/>
+          <p:cNvSpPr>
+            <a:spLocks noGrp="1"/>
+          </p:cNvSpPr>
+          <p:nvPr>
+            <p:ph type="sldImg" idx="2"/>
+          </p:nvPr>
+        </p:nvSpPr>
+        <p:spPr/>
+      </p:sp>
+      <p:sp>
+        <p:nvSpPr>
+          <p:cNvPr id="3" name="Notes Placeholder 2"/>
+          <p:cNvSpPr>
+            <a:spLocks noGrp="1"/>
+          </p:cNvSpPr>
+          <p:nvPr>
+            <p:ph type="body" idx="3" sz="quarter"/>
+          </p:nvPr>
+        </p:nvSpPr>
+        <p:spPr/>
+        <p:txBody>
+          <a:bodyPr/>
+          <a:lstStyle/>
+          <a:p>
+            <a:r>
+              <a:t>Core message: 3. Decomposition tree.</a:t>
+            </a:r>
+          </a:p>
+          <a:p>
+            <a:r>
+              <a:t>Talking points to expand: Talking points, learner value, and lab connection Talking points • Driver analysis • Explain by fields Why it helps • Guided exploration • Availability validation Lab connection Coverage: Covered. Use the lab README to demonstrate or discuss this topic. Review terms: exploration, guided. 05</a:t>
+            </a:r>
+          </a:p>
+          <a:p>
+            <a:r>
+              <a:t>Why it matters: Frame this module as scenario analysis with responsible use of advanced and AI-assisted features. Always provide Gov-safe fallbacks.</a:t>
+            </a:r>
+          </a:p>
+          <a:p>
+            <a:r>
+              <a:t>How it helps users: connect the technical pattern to clearer decisions, fewer confusing report interactions, better trust in results, or easier support.</a:t>
+            </a:r>
+          </a:p>
+          <a:p>
+            <a:r>
+              <a:t>How it builds on prior lessons: reference the previous layer in the workshop, such as prepared data, a clean model, tested measures, or report UX conventions.</a:t>
+            </a:r>
+          </a:p>
+          <a:p>
+            <a:r>
+              <a:t>Lab connection: Show where this concept appears in the module lab. If the lab path is conceptual or Verify for Gov, explain what learners should document instead of building hands-on.</a:t>
+            </a:r>
+          </a:p>
+          <a:p>
+            <a:r>
+              <a:t>Instructor prompt: Ask one learner to describe the risk of skipping this pattern or using it without validation.</a:t>
+            </a:r>
+          </a:p>
+          <a:p>
+            <a:r>
+              <a:t>Further learning: What-if parameters: https://learn.microsoft.com/power-bi/transform-model/desktop-what-if | Analytics pane: https://learn.microsoft.com/power-bi/create-reports/desktop-analytics-pane | AI visuals overview: https://learn.microsoft.com/power-bi/visuals/power-bi-visualization-influencers</a:t>
+            </a:r>
+          </a:p>
+        </p:txBody>
+      </p:sp>
+      <p:sp>
+        <p:nvSpPr>
+          <p:cNvPr id="4" name="Slide Number Placeholder 3"/>
+          <p:cNvSpPr>
+            <a:spLocks noGrp="1"/>
+          </p:cNvSpPr>
+          <p:nvPr>
+            <p:ph type="sldNum" idx="5" sz="quarter"/>
+          </p:nvPr>
+        </p:nvSpPr>
+        <p:spPr/>
+      </p:sp>
+    </p:spTree>
+  </p:cSld>
+  <p:clrMapOvr>
+    <a:masterClrMapping/>
+  </p:clrMapOvr>
+</p:notes>
+</file>
+
+<file path=ppt/notesSlides/notesSlide6.xml><?xml version="1.0" encoding="utf-8"?>
+<p:notes xmlns:a="http://schemas.openxmlformats.org/drawingml/2006/main" xmlns:p="http://schemas.openxmlformats.org/presentationml/2006/main" xmlns:r="http://schemas.openxmlformats.org/officeDocument/2006/relationships">
+  <p:cSld>
+    <p:spTree>
+      <p:nvGrpSpPr>
+        <p:cNvPr id="1" name=""/>
+        <p:cNvGrpSpPr/>
+        <p:nvPr/>
+      </p:nvGrpSpPr>
+      <p:grpSpPr>
+        <a:xfrm>
+          <a:off x="0" y="0"/>
+          <a:ext cx="0" cy="0"/>
+          <a:chOff x="0" y="0"/>
+          <a:chExt cx="0" cy="0"/>
+        </a:xfrm>
+      </p:grpSpPr>
+      <p:sp>
+        <p:nvSpPr>
+          <p:cNvPr id="2" name="Slide Image Placeholder 1"/>
+          <p:cNvSpPr>
+            <a:spLocks noGrp="1"/>
+          </p:cNvSpPr>
+          <p:nvPr>
+            <p:ph type="sldImg" idx="2"/>
+          </p:nvPr>
+        </p:nvSpPr>
+        <p:spPr/>
+      </p:sp>
+      <p:sp>
+        <p:nvSpPr>
+          <p:cNvPr id="3" name="Notes Placeholder 2"/>
+          <p:cNvSpPr>
+            <a:spLocks noGrp="1"/>
+          </p:cNvSpPr>
+          <p:nvPr>
+            <p:ph type="body" idx="3" sz="quarter"/>
+          </p:nvPr>
+        </p:nvSpPr>
+        <p:spPr/>
+        <p:txBody>
+          <a:bodyPr/>
+          <a:lstStyle/>
+          <a:p>
+            <a:r>
+              <a:t>Core message: 4. Forecasting.</a:t>
+            </a:r>
+          </a:p>
+          <a:p>
+            <a:r>
+              <a:t>Talking points to expand: Talking points, learner value, and lab connection Talking points • Time-series requirements • Confidence intervals Why it helps • Seasonality considerations • Validation and interpretation Lab connection Coverage: Covered. Use the lab README to demonstrate or discuss this topic. Review terms: considerations, seasonality, series. 06</a:t>
+            </a:r>
+          </a:p>
+          <a:p>
+            <a:r>
+              <a:t>Why it matters: Frame this module as scenario analysis with responsible use of advanced and AI-assisted features. Always provide Gov-safe fallbacks.</a:t>
+            </a:r>
+          </a:p>
+          <a:p>
+            <a:r>
+              <a:t>How it helps users: connect the technical pattern to clearer decisions, fewer confusing report interactions, better trust in results, or easier support.</a:t>
+            </a:r>
+          </a:p>
+          <a:p>
+            <a:r>
+              <a:t>How it builds on prior lessons: reference the previous layer in the workshop, such as prepared data, a clean model, tested measures, or report UX conventions.</a:t>
+            </a:r>
+          </a:p>
+          <a:p>
+            <a:r>
+              <a:t>Lab connection: Show where this concept appears in the module lab. If the lab path is conceptual or Verify for Gov, explain what learners should document instead of building hands-on.</a:t>
+            </a:r>
+          </a:p>
+          <a:p>
+            <a:r>
+              <a:t>Instructor prompt: Ask one learner to describe the risk of skipping this pattern or using it without validation.</a:t>
+            </a:r>
+          </a:p>
+          <a:p>
+            <a:r>
+              <a:t>Further learning: What-if parameters: https://learn.microsoft.com/power-bi/transform-model/desktop-what-if | Analytics pane: https://learn.microsoft.com/power-bi/create-reports/desktop-analytics-pane | AI visuals overview: https://learn.microsoft.com/power-bi/visuals/power-bi-visualization-influencers</a:t>
+            </a:r>
+          </a:p>
+        </p:txBody>
+      </p:sp>
+      <p:sp>
+        <p:nvSpPr>
+          <p:cNvPr id="4" name="Slide Number Placeholder 3"/>
+          <p:cNvSpPr>
+            <a:spLocks noGrp="1"/>
+          </p:cNvSpPr>
+          <p:nvPr>
+            <p:ph type="sldNum" idx="5" sz="quarter"/>
+          </p:nvPr>
+        </p:nvSpPr>
+        <p:spPr/>
+      </p:sp>
+    </p:spTree>
+  </p:cSld>
+  <p:clrMapOvr>
+    <a:masterClrMapping/>
+  </p:clrMapOvr>
+</p:notes>
+</file>
+
+<file path=ppt/notesSlides/notesSlide7.xml><?xml version="1.0" encoding="utf-8"?>
+<p:notes xmlns:a="http://schemas.openxmlformats.org/drawingml/2006/main" xmlns:p="http://schemas.openxmlformats.org/presentationml/2006/main" xmlns:r="http://schemas.openxmlformats.org/officeDocument/2006/relationships">
+  <p:cSld>
+    <p:spTree>
+      <p:nvGrpSpPr>
+        <p:cNvPr id="1" name=""/>
+        <p:cNvGrpSpPr/>
+        <p:nvPr/>
+      </p:nvGrpSpPr>
+      <p:grpSpPr>
+        <a:xfrm>
+          <a:off x="0" y="0"/>
+          <a:ext cx="0" cy="0"/>
+          <a:chOff x="0" y="0"/>
+          <a:chExt cx="0" cy="0"/>
+        </a:xfrm>
+      </p:grpSpPr>
+      <p:sp>
+        <p:nvSpPr>
+          <p:cNvPr id="2" name="Slide Image Placeholder 1"/>
+          <p:cNvSpPr>
+            <a:spLocks noGrp="1"/>
+          </p:cNvSpPr>
+          <p:nvPr>
+            <p:ph type="sldImg" idx="2"/>
+          </p:nvPr>
+        </p:nvSpPr>
+        <p:spPr/>
+      </p:sp>
+      <p:sp>
+        <p:nvSpPr>
+          <p:cNvPr id="3" name="Notes Placeholder 2"/>
+          <p:cNvSpPr>
+            <a:spLocks noGrp="1"/>
+          </p:cNvSpPr>
+          <p:nvPr>
+            <p:ph type="body" idx="3" sz="quarter"/>
+          </p:nvPr>
+        </p:nvSpPr>
+        <p:spPr/>
+        <p:txBody>
+          <a:bodyPr/>
+          <a:lstStyle/>
+          <a:p>
+            <a:r>
+              <a:t>Core message: 5. Anomaly detection.</a:t>
+            </a:r>
+          </a:p>
+          <a:p>
+            <a:r>
+              <a:t>Talking points to expand: Talking points, learner value, and lab connection Talking points • Unusual trend identification • Interpretation limits Why it helps • Data quality considerations • Availability validation Lab connection Coverage: Covered. Use the lab README to demonstrate or discuss this topic. Review terms: considerations, identification, quality, unusual. 07</a:t>
+            </a:r>
+          </a:p>
+          <a:p>
+            <a:r>
+              <a:t>Why it matters: Frame this module as scenario analysis with responsible use of advanced and AI-assisted features. Always provide Gov-safe fallbacks.</a:t>
+            </a:r>
+          </a:p>
+          <a:p>
+            <a:r>
+              <a:t>How it helps users: connect the technical pattern to clearer decisions, fewer confusing report interactions, better trust in results, or easier support.</a:t>
+            </a:r>
+          </a:p>
+          <a:p>
+            <a:r>
+              <a:t>How it builds on prior lessons: reference the previous layer in the workshop, such as prepared data, a clean model, tested measures, or report UX conventions.</a:t>
+            </a:r>
+          </a:p>
+          <a:p>
+            <a:r>
+              <a:t>Lab connection: Show where this concept appears in the module lab. If the lab path is conceptual or Verify for Gov, explain what learners should document instead of building hands-on.</a:t>
+            </a:r>
+          </a:p>
+          <a:p>
+            <a:r>
+              <a:t>Instructor prompt: Ask one learner to describe the risk of skipping this pattern or using it without validation.</a:t>
+            </a:r>
+          </a:p>
+          <a:p>
+            <a:r>
+              <a:t>Further learning: What-if parameters: https://learn.microsoft.com/power-bi/transform-model/desktop-what-if | Analytics pane: https://learn.microsoft.com/power-bi/create-reports/desktop-analytics-pane | AI visuals overview: https://learn.microsoft.com/power-bi/visuals/power-bi-visualization-influencers</a:t>
+            </a:r>
+          </a:p>
+        </p:txBody>
+      </p:sp>
+      <p:sp>
+        <p:nvSpPr>
+          <p:cNvPr id="4" name="Slide Number Placeholder 3"/>
+          <p:cNvSpPr>
+            <a:spLocks noGrp="1"/>
+          </p:cNvSpPr>
+          <p:nvPr>
+            <p:ph type="sldNum" idx="5" sz="quarter"/>
+          </p:nvPr>
+        </p:nvSpPr>
+        <p:spPr/>
+      </p:sp>
+    </p:spTree>
+  </p:cSld>
+  <p:clrMapOvr>
+    <a:masterClrMapping/>
+  </p:clrMapOvr>
+</p:notes>
+</file>
+
+<file path=ppt/notesSlides/notesSlide8.xml><?xml version="1.0" encoding="utf-8"?>
+<p:notes xmlns:a="http://schemas.openxmlformats.org/drawingml/2006/main" xmlns:p="http://schemas.openxmlformats.org/presentationml/2006/main" xmlns:r="http://schemas.openxmlformats.org/officeDocument/2006/relationships">
+  <p:cSld>
+    <p:spTree>
+      <p:nvGrpSpPr>
+        <p:cNvPr id="1" name=""/>
+        <p:cNvGrpSpPr/>
+        <p:nvPr/>
+      </p:nvGrpSpPr>
+      <p:grpSpPr>
+        <a:xfrm>
+          <a:off x="0" y="0"/>
+          <a:ext cx="0" cy="0"/>
+          <a:chOff x="0" y="0"/>
+          <a:chExt cx="0" cy="0"/>
+        </a:xfrm>
+      </p:grpSpPr>
+      <p:sp>
+        <p:nvSpPr>
+          <p:cNvPr id="2" name="Slide Image Placeholder 1"/>
+          <p:cNvSpPr>
+            <a:spLocks noGrp="1"/>
+          </p:cNvSpPr>
+          <p:nvPr>
+            <p:ph type="sldImg" idx="2"/>
+          </p:nvPr>
+        </p:nvSpPr>
+        <p:spPr/>
+      </p:sp>
+      <p:sp>
+        <p:nvSpPr>
+          <p:cNvPr id="3" name="Notes Placeholder 2"/>
+          <p:cNvSpPr>
+            <a:spLocks noGrp="1"/>
+          </p:cNvSpPr>
+          <p:nvPr>
+            <p:ph type="body" idx="3" sz="quarter"/>
+          </p:nvPr>
+        </p:nvSpPr>
+        <p:spPr/>
+        <p:txBody>
+          <a:bodyPr/>
+          <a:lstStyle/>
+          <a:p>
+            <a:r>
+              <a:t>Core message: 6. Key influencers.</a:t>
+            </a:r>
+          </a:p>
+          <a:p>
+            <a:r>
+              <a:t>Talking points to expand: Talking points, learner value, and lab connection Talking points • Influencer analysis • Categorical and numeric outcomes Why it helps • Explainability and limitations • Availability validation Lab connection Coverage: Covered. Use the lab README to demonstrate or discuss this topic. Review terms: categorical, explainability, outcomes. 08</a:t>
+            </a:r>
+          </a:p>
+          <a:p>
+            <a:r>
+              <a:t>Why it matters: Frame this module as scenario analysis with responsible use of advanced and AI-assisted features. Always provide Gov-safe fallbacks.</a:t>
+            </a:r>
+          </a:p>
+          <a:p>
+            <a:r>
+              <a:t>How it helps users: connect the technical pattern to clearer decisions, fewer confusing report interactions, better trust in results, or easier support.</a:t>
+            </a:r>
+          </a:p>
+          <a:p>
+            <a:r>
+              <a:t>How it builds on prior lessons: reference the previous layer in the workshop, such as prepared data, a clean model, tested measures, or report UX conventions.</a:t>
+            </a:r>
+          </a:p>
+          <a:p>
+            <a:r>
+              <a:t>Lab connection: Show where this concept appears in the module lab. If the lab path is conceptual or Verify for Gov, explain what learners should document instead of building hands-on.</a:t>
+            </a:r>
+          </a:p>
+          <a:p>
+            <a:r>
+              <a:t>Instructor prompt: Ask one learner to describe the risk of skipping this pattern or using it without validation.</a:t>
+            </a:r>
+          </a:p>
+          <a:p>
+            <a:r>
+              <a:t>Further learning: What-if parameters: https://learn.microsoft.com/power-bi/transform-model/desktop-what-if | Analytics pane: https://learn.microsoft.com/power-bi/create-reports/desktop-analytics-pane | AI visuals overview: https://learn.microsoft.com/power-bi/visuals/power-bi-visualization-influencers</a:t>
+            </a:r>
+          </a:p>
+        </p:txBody>
+      </p:sp>
+      <p:sp>
+        <p:nvSpPr>
+          <p:cNvPr id="4" name="Slide Number Placeholder 3"/>
+          <p:cNvSpPr>
+            <a:spLocks noGrp="1"/>
+          </p:cNvSpPr>
+          <p:nvPr>
+            <p:ph type="sldNum" idx="5" sz="quarter"/>
+          </p:nvPr>
+        </p:nvSpPr>
+        <p:spPr/>
+      </p:sp>
+    </p:spTree>
+  </p:cSld>
+  <p:clrMapOvr>
+    <a:masterClrMapping/>
+  </p:clrMapOvr>
+</p:notes>
+</file>
+
+<file path=ppt/notesSlides/notesSlide9.xml><?xml version="1.0" encoding="utf-8"?>
+<p:notes xmlns:a="http://schemas.openxmlformats.org/drawingml/2006/main" xmlns:p="http://schemas.openxmlformats.org/presentationml/2006/main" xmlns:r="http://schemas.openxmlformats.org/officeDocument/2006/relationships">
+  <p:cSld>
+    <p:spTree>
+      <p:nvGrpSpPr>
+        <p:cNvPr id="1" name=""/>
+        <p:cNvGrpSpPr/>
+        <p:nvPr/>
+      </p:nvGrpSpPr>
+      <p:grpSpPr>
+        <a:xfrm>
+          <a:off x="0" y="0"/>
+          <a:ext cx="0" cy="0"/>
+          <a:chOff x="0" y="0"/>
+          <a:chExt cx="0" cy="0"/>
+        </a:xfrm>
+      </p:grpSpPr>
+      <p:sp>
+        <p:nvSpPr>
+          <p:cNvPr id="2" name="Slide Image Placeholder 1"/>
+          <p:cNvSpPr>
+            <a:spLocks noGrp="1"/>
+          </p:cNvSpPr>
+          <p:nvPr>
+            <p:ph type="sldImg" idx="2"/>
+          </p:nvPr>
+        </p:nvSpPr>
+        <p:spPr/>
+      </p:sp>
+      <p:sp>
+        <p:nvSpPr>
+          <p:cNvPr id="3" name="Notes Placeholder 2"/>
+          <p:cNvSpPr>
+            <a:spLocks noGrp="1"/>
+          </p:cNvSpPr>
+          <p:nvPr>
+            <p:ph type="body" idx="3" sz="quarter"/>
+          </p:nvPr>
+        </p:nvSpPr>
+        <p:spPr/>
+        <p:txBody>
+          <a:bodyPr/>
+          <a:lstStyle/>
+          <a:p>
+            <a:r>
+              <a:t>Core message: 7. Python and R visuals.</a:t>
+            </a:r>
+          </a:p>
+          <a:p>
+            <a:r>
+              <a:t>Talking points to expand: Talking points, learner value, and lab connection Talking points • Runtime requirements • Package governance Why it helps • Service limitations • Security considerations Lab connection Coverage: Covered. Use the lab README to demonstrate or discuss this topic. Review terms: considerations, security. 09</a:t>
+            </a:r>
+          </a:p>
+          <a:p>
+            <a:r>
+              <a:t>Why it matters: Frame this module as scenario analysis with responsible use of advanced and AI-assisted features. Always provide Gov-safe fallbacks.</a:t>
+            </a:r>
+          </a:p>
+          <a:p>
+            <a:r>
+              <a:t>How it helps users: connect the technical pattern to clearer decisions, fewer confusing report interactions, better trust in results, or easier support.</a:t>
+            </a:r>
+          </a:p>
+          <a:p>
+            <a:r>
+              <a:t>How it builds on prior lessons: reference the previous layer in the workshop, such as prepared data, a clean model, tested measures, or report UX conventions.</a:t>
+            </a:r>
+          </a:p>
+          <a:p>
+            <a:r>
+              <a:t>Lab connection: Show where this concept appears in the module lab. If the lab path is conceptual or Verify for Gov, explain what learners should document instead of building hands-on.</a:t>
+            </a:r>
+          </a:p>
+          <a:p>
+            <a:r>
+              <a:t>Instructor prompt: Ask one learner to describe the risk of skipping this pattern or using it without validation.</a:t>
+            </a:r>
+          </a:p>
+          <a:p>
+            <a:r>
+              <a:t>Further learning: What-if parameters: https://learn.microsoft.com/power-bi/transform-model/desktop-what-if | Analytics pane: https://learn.microsoft.com/power-bi/create-reports/desktop-analytics-pane | AI visuals overview: https://learn.microsoft.com/power-bi/visuals/power-bi-visualization-influencers</a:t>
+            </a:r>
+          </a:p>
+        </p:txBody>
+      </p:sp>
+      <p:sp>
+        <p:nvSpPr>
+          <p:cNvPr id="4" name="Slide Number Placeholder 3"/>
+          <p:cNvSpPr>
+            <a:spLocks noGrp="1"/>
+          </p:cNvSpPr>
+          <p:nvPr>
+            <p:ph type="sldNum" idx="5" sz="quarter"/>
+          </p:nvPr>
+        </p:nvSpPr>
+        <p:spPr/>
+      </p:sp>
+    </p:spTree>
+  </p:cSld>
+  <p:clrMapOvr>
+    <a:masterClrMapping/>
+  </p:clrMapOvr>
+</p:notes>
 </file>
 
 <file path=ppt/slideLayouts/slideLayout1.xml><?xml version="1.0" encoding="utf-8"?>
@@ -13279,4 +15114,324 @@
   </a:objectDefaults>
   <a:extraClrSchemeLst/>
 </a:theme>
+</file>
+
+<file path=ppt/theme/theme2.xml><?xml version="1.0" encoding="utf-8"?>
+<a:theme xmlns:a="http://schemas.openxmlformats.org/drawingml/2006/main" name="Office Theme">
+  <a:themeElements>
+    <a:clrScheme name="Office">
+      <a:dk1>
+        <a:sysClr val="windowText" lastClr="000000"/>
+      </a:dk1>
+      <a:lt1>
+        <a:sysClr val="window" lastClr="FFFFFF"/>
+      </a:lt1>
+      <a:dk2>
+        <a:srgbClr val="1F497D"/>
+      </a:dk2>
+      <a:lt2>
+        <a:srgbClr val="EEECE1"/>
+      </a:lt2>
+      <a:accent1>
+        <a:srgbClr val="4F81BD"/>
+      </a:accent1>
+      <a:accent2>
+        <a:srgbClr val="C0504D"/>
+      </a:accent2>
+      <a:accent3>
+        <a:srgbClr val="9BBB59"/>
+      </a:accent3>
+      <a:accent4>
+        <a:srgbClr val="8064A2"/>
+      </a:accent4>
+      <a:accent5>
+        <a:srgbClr val="4BACC6"/>
+      </a:accent5>
+      <a:accent6>
+        <a:srgbClr val="F79646"/>
+      </a:accent6>
+      <a:hlink>
+        <a:srgbClr val="0000FF"/>
+      </a:hlink>
+      <a:folHlink>
+        <a:srgbClr val="800080"/>
+      </a:folHlink>
+    </a:clrScheme>
+    <a:fontScheme name="Office">
+      <a:majorFont>
+        <a:latin typeface="Calibri"/>
+        <a:ea typeface=""/>
+        <a:cs typeface=""/>
+        <a:font script="Jpan" typeface="ＭＳ Ｐゴシック"/>
+        <a:font script="Hang" typeface="맑은 고딕"/>
+        <a:font script="Hans" typeface="宋体"/>
+        <a:font script="Hant" typeface="新細明體"/>
+        <a:font script="Arab" typeface="Times New Roman"/>
+        <a:font script="Hebr" typeface="Times New Roman"/>
+        <a:font script="Thai" typeface="Angsana New"/>
+        <a:font script="Ethi" typeface="Nyala"/>
+        <a:font script="Beng" typeface="Vrinda"/>
+        <a:font script="Gujr" typeface="Shruti"/>
+        <a:font script="Khmr" typeface="MoolBoran"/>
+        <a:font script="Knda" typeface="Tunga"/>
+        <a:font script="Guru" typeface="Raavi"/>
+        <a:font script="Cans" typeface="Euphemia"/>
+        <a:font script="Cher" typeface="Plantagenet Cherokee"/>
+        <a:font script="Yiii" typeface="Microsoft Yi Baiti"/>
+        <a:font script="Tibt" typeface="Microsoft Himalaya"/>
+        <a:font script="Thaa" typeface="MV Boli"/>
+        <a:font script="Deva" typeface="Mangal"/>
+        <a:font script="Telu" typeface="Gautami"/>
+        <a:font script="Taml" typeface="Latha"/>
+        <a:font script="Syrc" typeface="Estrangelo Edessa"/>
+        <a:font script="Orya" typeface="Kalinga"/>
+        <a:font script="Mlym" typeface="Kartika"/>
+        <a:font script="Laoo" typeface="DokChampa"/>
+        <a:font script="Sinh" typeface="Iskoola Pota"/>
+        <a:font script="Mong" typeface="Mongolian Baiti"/>
+        <a:font script="Viet" typeface="Times New Roman"/>
+        <a:font script="Uigh" typeface="Microsoft Uighur"/>
+        <a:font script="Geor" typeface="Sylfaen"/>
+      </a:majorFont>
+      <a:minorFont>
+        <a:latin typeface="Calibri"/>
+        <a:ea typeface=""/>
+        <a:cs typeface=""/>
+        <a:font script="Jpan" typeface="ＭＳ Ｐゴシック"/>
+        <a:font script="Hang" typeface="맑은 고딕"/>
+        <a:font script="Hans" typeface="宋体"/>
+        <a:font script="Hant" typeface="新細明體"/>
+        <a:font script="Arab" typeface="Arial"/>
+        <a:font script="Hebr" typeface="Arial"/>
+        <a:font script="Thai" typeface="Cordia New"/>
+        <a:font script="Ethi" typeface="Nyala"/>
+        <a:font script="Beng" typeface="Vrinda"/>
+        <a:font script="Gujr" typeface="Shruti"/>
+        <a:font script="Khmr" typeface="DaunPenh"/>
+        <a:font script="Knda" typeface="Tunga"/>
+        <a:font script="Guru" typeface="Raavi"/>
+        <a:font script="Cans" typeface="Euphemia"/>
+        <a:font script="Cher" typeface="Plantagenet Cherokee"/>
+        <a:font script="Yiii" typeface="Microsoft Yi Baiti"/>
+        <a:font script="Tibt" typeface="Microsoft Himalaya"/>
+        <a:font script="Thaa" typeface="MV Boli"/>
+        <a:font script="Deva" typeface="Mangal"/>
+        <a:font script="Telu" typeface="Gautami"/>
+        <a:font script="Taml" typeface="Latha"/>
+        <a:font script="Syrc" typeface="Estrangelo Edessa"/>
+        <a:font script="Orya" typeface="Kalinga"/>
+        <a:font script="Mlym" typeface="Kartika"/>
+        <a:font script="Laoo" typeface="DokChampa"/>
+        <a:font script="Sinh" typeface="Iskoola Pota"/>
+        <a:font script="Mong" typeface="Mongolian Baiti"/>
+        <a:font script="Viet" typeface="Arial"/>
+        <a:font script="Uigh" typeface="Microsoft Uighur"/>
+        <a:font script="Geor" typeface="Sylfaen"/>
+      </a:minorFont>
+    </a:fontScheme>
+    <a:fmtScheme name="Office">
+      <a:fillStyleLst>
+        <a:solidFill>
+          <a:schemeClr val="phClr"/>
+        </a:solidFill>
+        <a:gradFill rotWithShape="1">
+          <a:gsLst>
+            <a:gs pos="0">
+              <a:schemeClr val="phClr">
+                <a:tint val="50000"/>
+                <a:satMod val="300000"/>
+              </a:schemeClr>
+            </a:gs>
+            <a:gs pos="35000">
+              <a:schemeClr val="phClr">
+                <a:tint val="37000"/>
+                <a:satMod val="300000"/>
+              </a:schemeClr>
+            </a:gs>
+            <a:gs pos="100000">
+              <a:schemeClr val="phClr">
+                <a:tint val="15000"/>
+                <a:satMod val="350000"/>
+              </a:schemeClr>
+            </a:gs>
+          </a:gsLst>
+          <a:lin ang="16200000" scaled="1"/>
+        </a:gradFill>
+        <a:gradFill rotWithShape="1">
+          <a:gsLst>
+            <a:gs pos="0">
+              <a:schemeClr val="phClr">
+                <a:tint val="100000"/>
+                <a:shade val="100000"/>
+                <a:satMod val="130000"/>
+              </a:schemeClr>
+            </a:gs>
+            <a:gs pos="100000">
+              <a:schemeClr val="phClr">
+                <a:tint val="50000"/>
+                <a:shade val="100000"/>
+                <a:satMod val="350000"/>
+              </a:schemeClr>
+            </a:gs>
+          </a:gsLst>
+          <a:lin ang="16200000" scaled="0"/>
+        </a:gradFill>
+      </a:fillStyleLst>
+      <a:lnStyleLst>
+        <a:ln w="9525" cap="flat" cmpd="sng" algn="ctr">
+          <a:solidFill>
+            <a:schemeClr val="phClr">
+              <a:shade val="95000"/>
+              <a:satMod val="105000"/>
+            </a:schemeClr>
+          </a:solidFill>
+          <a:prstDash val="solid"/>
+        </a:ln>
+        <a:ln w="25400" cap="flat" cmpd="sng" algn="ctr">
+          <a:solidFill>
+            <a:schemeClr val="phClr"/>
+          </a:solidFill>
+          <a:prstDash val="solid"/>
+        </a:ln>
+        <a:ln w="38100" cap="flat" cmpd="sng" algn="ctr">
+          <a:solidFill>
+            <a:schemeClr val="phClr"/>
+          </a:solidFill>
+          <a:prstDash val="solid"/>
+        </a:ln>
+      </a:lnStyleLst>
+      <a:effectStyleLst>
+        <a:effectStyle>
+          <a:effectLst>
+            <a:outerShdw blurRad="40000" dist="20000" dir="5400000" rotWithShape="0">
+              <a:srgbClr val="000000">
+                <a:alpha val="38000"/>
+              </a:srgbClr>
+            </a:outerShdw>
+          </a:effectLst>
+        </a:effectStyle>
+        <a:effectStyle>
+          <a:effectLst>
+            <a:outerShdw blurRad="40000" dist="23000" dir="5400000" rotWithShape="0">
+              <a:srgbClr val="000000">
+                <a:alpha val="35000"/>
+              </a:srgbClr>
+            </a:outerShdw>
+          </a:effectLst>
+        </a:effectStyle>
+        <a:effectStyle>
+          <a:effectLst>
+            <a:outerShdw blurRad="40000" dist="23000" dir="5400000" rotWithShape="0">
+              <a:srgbClr val="000000">
+                <a:alpha val="35000"/>
+              </a:srgbClr>
+            </a:outerShdw>
+          </a:effectLst>
+          <a:scene3d>
+            <a:camera prst="orthographicFront">
+              <a:rot lat="0" lon="0" rev="0"/>
+            </a:camera>
+            <a:lightRig rig="threePt" dir="t">
+              <a:rot lat="0" lon="0" rev="1200000"/>
+            </a:lightRig>
+          </a:scene3d>
+          <a:sp3d>
+            <a:bevelT w="63500" h="25400"/>
+          </a:sp3d>
+        </a:effectStyle>
+      </a:effectStyleLst>
+      <a:bgFillStyleLst>
+        <a:solidFill>
+          <a:schemeClr val="phClr"/>
+        </a:solidFill>
+        <a:gradFill rotWithShape="1">
+          <a:gsLst>
+            <a:gs pos="0">
+              <a:schemeClr val="phClr">
+                <a:tint val="40000"/>
+                <a:satMod val="350000"/>
+              </a:schemeClr>
+            </a:gs>
+            <a:gs pos="40000">
+              <a:schemeClr val="phClr">
+                <a:tint val="45000"/>
+                <a:shade val="99000"/>
+                <a:satMod val="350000"/>
+              </a:schemeClr>
+            </a:gs>
+            <a:gs pos="100000">
+              <a:schemeClr val="phClr">
+                <a:shade val="20000"/>
+                <a:satMod val="255000"/>
+              </a:schemeClr>
+            </a:gs>
+          </a:gsLst>
+          <a:path path="circle">
+            <a:fillToRect l="50000" t="-80000" r="50000" b="180000"/>
+          </a:path>
+        </a:gradFill>
+        <a:gradFill rotWithShape="1">
+          <a:gsLst>
+            <a:gs pos="0">
+              <a:schemeClr val="phClr">
+                <a:tint val="80000"/>
+                <a:satMod val="300000"/>
+              </a:schemeClr>
+            </a:gs>
+            <a:gs pos="100000">
+              <a:schemeClr val="phClr">
+                <a:shade val="30000"/>
+                <a:satMod val="200000"/>
+              </a:schemeClr>
+            </a:gs>
+          </a:gsLst>
+          <a:path path="circle">
+            <a:fillToRect l="50000" t="50000" r="50000" b="50000"/>
+          </a:path>
+        </a:gradFill>
+      </a:bgFillStyleLst>
+    </a:fmtScheme>
+  </a:themeElements>
+  <a:objectDefaults>
+    <a:spDef>
+      <a:spPr/>
+      <a:bodyPr/>
+      <a:lstStyle/>
+      <a:style>
+        <a:lnRef idx="1">
+          <a:schemeClr val="accent1"/>
+        </a:lnRef>
+        <a:fillRef idx="3">
+          <a:schemeClr val="accent1"/>
+        </a:fillRef>
+        <a:effectRef idx="2">
+          <a:schemeClr val="accent1"/>
+        </a:effectRef>
+        <a:fontRef idx="minor">
+          <a:schemeClr val="lt1"/>
+        </a:fontRef>
+      </a:style>
+    </a:spDef>
+    <a:lnDef>
+      <a:spPr/>
+      <a:bodyPr/>
+      <a:lstStyle/>
+      <a:style>
+        <a:lnRef idx="2">
+          <a:schemeClr val="accent1"/>
+        </a:lnRef>
+        <a:fillRef idx="0">
+          <a:schemeClr val="accent1"/>
+        </a:fillRef>
+        <a:effectRef idx="1">
+          <a:schemeClr val="accent1"/>
+        </a:effectRef>
+        <a:fontRef idx="minor">
+          <a:schemeClr val="tx1"/>
+        </a:fontRef>
+      </a:style>
+    </a:lnDef>
+  </a:objectDefaults>
+  <a:extraClrSchemeLst/>
+</a:theme>
 </file>
--- a/modules/06-advanced-analytics-ai/assets/advanced-analytics-ai.pptx
+++ b/modules/06-advanced-analytics-ai/assets/advanced-analytics-ai.pptx
@@ -5047,7 +5047,7 @@
               </a:defRPr>
             </a:pPr>
             <a:r>
-              <a:t>Power BI Advanced Factory teaching deck</a:t>
+              <a:t>Student module overview</a:t>
             </a:r>
           </a:p>
         </p:txBody>
@@ -5571,42 +5571,6 @@
       </p:sp>
       <p:sp>
         <p:nvSpPr>
-          <p:cNvPr id="4" name="TextBox 3"/>
-          <p:cNvSpPr txBox="1"/>
-          <p:nvPr/>
-        </p:nvSpPr>
-        <p:spPr>
-          <a:xfrm>
-            <a:off x="530352" y="914400"/>
-            <a:ext cx="10515600" cy="320040"/>
-          </a:xfrm>
-          <a:prstGeom prst="rect">
-            <a:avLst/>
-          </a:prstGeom>
-          <a:noFill/>
-        </p:spPr>
-        <p:txBody>
-          <a:bodyPr wrap="none">
-            <a:spAutoFit/>
-          </a:bodyPr>
-          <a:lstStyle/>
-          <a:p>
-            <a:pPr>
-              <a:defRPr sz="1200">
-                <a:solidFill>
-                  <a:srgbClr val="5C5C5C"/>
-                </a:solidFill>
-                <a:latin typeface="Aptos"/>
-              </a:defRPr>
-            </a:pPr>
-            <a:r>
-              <a:t>Talking points, learner value, and lab connection</a:t>
-            </a:r>
-          </a:p>
-        </p:txBody>
-      </p:sp>
-      <p:sp>
-        <p:nvSpPr>
           <p:cNvPr id="5" name="Rounded Rectangle 4"/>
           <p:cNvSpPr/>
           <p:nvPr/>
@@ -5724,7 +5688,139 @@
               </a:defRPr>
             </a:pPr>
             <a:r>
-              <a:t>Talking points</a:t>
+              <a:t>Key ideas</a:t>
+            </a:r>
+            <a:br/>
+            <a:r>
+              <a:t>• Architecture overview</a:t>
+            </a:r>
+            <a:br/>
+            <a:r>
+              <a:t>• Identity and network</a:t>
+            </a:r>
+          </a:p>
+        </p:txBody>
+      </p:sp>
+      <p:sp>
+        <p:nvSpPr>
+          <p:cNvPr id="8" name="Rounded Rectangle 7"/>
+          <p:cNvSpPr/>
+          <p:nvPr/>
+        </p:nvSpPr>
+        <p:spPr>
+          <a:xfrm>
+            <a:off x="6263640" y="1234440"/>
+            <a:ext cx="5303520" cy="1828800"/>
+          </a:xfrm>
+          <a:prstGeom prst="roundRect">
+            <a:avLst/>
+          </a:prstGeom>
+          <a:solidFill>
+            <a:srgbClr val="FFFFFF"/>
+          </a:solidFill>
+          <a:ln>
+            <a:solidFill>
+              <a:srgbClr val="DCDCDC"/>
+            </a:solidFill>
+          </a:ln>
+        </p:spPr>
+        <p:style>
+          <a:lnRef idx="1">
+            <a:schemeClr val="accent1"/>
+          </a:lnRef>
+          <a:fillRef idx="3">
+            <a:schemeClr val="accent1"/>
+          </a:fillRef>
+          <a:effectRef idx="2">
+            <a:schemeClr val="accent1"/>
+          </a:effectRef>
+          <a:fontRef idx="minor">
+            <a:schemeClr val="lt1"/>
+          </a:fontRef>
+        </p:style>
+        <p:txBody>
+          <a:bodyPr rtlCol="0" anchor="ctr"/>
+          <a:lstStyle/>
+          <a:p>
+            <a:pPr algn="ctr"/>
+          </a:p>
+        </p:txBody>
+      </p:sp>
+      <p:sp>
+        <p:nvSpPr>
+          <p:cNvPr id="9" name="Rectangle 8"/>
+          <p:cNvSpPr/>
+          <p:nvPr/>
+        </p:nvSpPr>
+        <p:spPr>
+          <a:xfrm>
+            <a:off x="6263640" y="1234440"/>
+            <a:ext cx="91440" cy="1828800"/>
+          </a:xfrm>
+          <a:prstGeom prst="rect">
+            <a:avLst/>
+          </a:prstGeom>
+          <a:solidFill>
+            <a:srgbClr val="02C39A"/>
+          </a:solidFill>
+          <a:ln>
+            <a:noFill/>
+          </a:ln>
+        </p:spPr>
+        <p:style>
+          <a:lnRef idx="1">
+            <a:schemeClr val="accent1"/>
+          </a:lnRef>
+          <a:fillRef idx="3">
+            <a:schemeClr val="accent1"/>
+          </a:fillRef>
+          <a:effectRef idx="2">
+            <a:schemeClr val="accent1"/>
+          </a:effectRef>
+          <a:fontRef idx="minor">
+            <a:schemeClr val="lt1"/>
+          </a:fontRef>
+        </p:style>
+        <p:txBody>
+          <a:bodyPr rtlCol="0" anchor="ctr"/>
+          <a:lstStyle/>
+          <a:p>
+            <a:pPr algn="ctr"/>
+          </a:p>
+        </p:txBody>
+      </p:sp>
+      <p:sp>
+        <p:nvSpPr>
+          <p:cNvPr id="10" name="TextBox 9"/>
+          <p:cNvSpPr txBox="1"/>
+          <p:nvPr/>
+        </p:nvSpPr>
+        <p:spPr>
+          <a:xfrm>
+            <a:off x="6446520" y="1344168"/>
+            <a:ext cx="4983480" cy="1664208"/>
+          </a:xfrm>
+          <a:prstGeom prst="rect">
+            <a:avLst/>
+          </a:prstGeom>
+          <a:noFill/>
+        </p:spPr>
+        <p:txBody>
+          <a:bodyPr wrap="square" lIns="0" rIns="0">
+            <a:spAutoFit/>
+          </a:bodyPr>
+          <a:lstStyle/>
+          <a:p>
+            <a:pPr>
+              <a:defRPr b="1" sz="1500">
+                <a:solidFill>
+                  <a:srgbClr val="1E2761"/>
+                </a:solidFill>
+                <a:latin typeface="Aptos Display"/>
+              </a:defRPr>
+            </a:pPr>
+            <a:r>
+              <a:t>Why it helps</a:t>
             </a:r>
           </a:p>
           <a:p>
@@ -5740,25 +5836,25 @@
               </a:defRPr>
             </a:pPr>
             <a:r>
-              <a:t>• Architecture overview</a:t>
+              <a:t>• Region and cloud alignment</a:t>
             </a:r>
             <a:br/>
             <a:r>
-              <a:t>• Identity and network</a:t>
-            </a:r>
-          </a:p>
-        </p:txBody>
-      </p:sp>
-      <p:sp>
-        <p:nvSpPr>
-          <p:cNvPr id="8" name="Rounded Rectangle 7"/>
+              <a:t>• Model governance</a:t>
+            </a:r>
+          </a:p>
+        </p:txBody>
+      </p:sp>
+      <p:sp>
+        <p:nvSpPr>
+          <p:cNvPr id="11" name="Rounded Rectangle 10"/>
           <p:cNvSpPr/>
           <p:nvPr/>
         </p:nvSpPr>
         <p:spPr>
           <a:xfrm>
-            <a:off x="6263640" y="1234440"/>
-            <a:ext cx="5303520" cy="1828800"/>
+            <a:off x="822960" y="4160520"/>
+            <a:ext cx="10424160" cy="868680"/>
           </a:xfrm>
           <a:prstGeom prst="roundRect">
             <a:avLst/>
@@ -5796,20 +5892,20 @@
       </p:sp>
       <p:sp>
         <p:nvSpPr>
-          <p:cNvPr id="9" name="Rectangle 8"/>
+          <p:cNvPr id="12" name="Rectangle 11"/>
           <p:cNvSpPr/>
           <p:nvPr/>
         </p:nvSpPr>
         <p:spPr>
           <a:xfrm>
-            <a:off x="6263640" y="1234440"/>
-            <a:ext cx="91440" cy="1828800"/>
+            <a:off x="822960" y="4160520"/>
+            <a:ext cx="91440" cy="868680"/>
           </a:xfrm>
           <a:prstGeom prst="rect">
             <a:avLst/>
           </a:prstGeom>
           <a:solidFill>
-            <a:srgbClr val="02C39A"/>
+            <a:srgbClr val="F9B700"/>
           </a:solidFill>
           <a:ln>
             <a:noFill/>
@@ -5839,14 +5935,14 @@
       </p:sp>
       <p:sp>
         <p:nvSpPr>
-          <p:cNvPr id="10" name="TextBox 9"/>
+          <p:cNvPr id="13" name="TextBox 12"/>
           <p:cNvSpPr txBox="1"/>
           <p:nvPr/>
         </p:nvSpPr>
         <p:spPr>
           <a:xfrm>
-            <a:off x="6446520" y="1344168"/>
-            <a:ext cx="4983480" cy="1664208"/>
+            <a:off x="1005840" y="4270248"/>
+            <a:ext cx="10104120" cy="704088"/>
           </a:xfrm>
           <a:prstGeom prst="rect">
             <a:avLst/>
@@ -5868,167 +5964,7 @@
               </a:defRPr>
             </a:pPr>
             <a:r>
-              <a:t>Why it helps</a:t>
-            </a:r>
-          </a:p>
-          <a:p>
-            <a:pPr>
-              <a:spcBef>
-                <a:spcPts val="400"/>
-              </a:spcBef>
-              <a:defRPr sz="1050">
-                <a:solidFill>
-                  <a:srgbClr val="242424"/>
-                </a:solidFill>
-                <a:latin typeface="Aptos"/>
-              </a:defRPr>
-            </a:pPr>
-            <a:r>
-              <a:t>• Region and cloud alignment</a:t>
-            </a:r>
-            <a:br/>
-            <a:r>
-              <a:t>• Model governance</a:t>
-            </a:r>
-          </a:p>
-        </p:txBody>
-      </p:sp>
-      <p:sp>
-        <p:nvSpPr>
-          <p:cNvPr id="11" name="Rounded Rectangle 10"/>
-          <p:cNvSpPr/>
-          <p:nvPr/>
-        </p:nvSpPr>
-        <p:spPr>
-          <a:xfrm>
-            <a:off x="822960" y="4160520"/>
-            <a:ext cx="10424160" cy="868680"/>
-          </a:xfrm>
-          <a:prstGeom prst="roundRect">
-            <a:avLst/>
-          </a:prstGeom>
-          <a:solidFill>
-            <a:srgbClr val="FFFFFF"/>
-          </a:solidFill>
-          <a:ln>
-            <a:solidFill>
-              <a:srgbClr val="DCDCDC"/>
-            </a:solidFill>
-          </a:ln>
-        </p:spPr>
-        <p:style>
-          <a:lnRef idx="1">
-            <a:schemeClr val="accent1"/>
-          </a:lnRef>
-          <a:fillRef idx="3">
-            <a:schemeClr val="accent1"/>
-          </a:fillRef>
-          <a:effectRef idx="2">
-            <a:schemeClr val="accent1"/>
-          </a:effectRef>
-          <a:fontRef idx="minor">
-            <a:schemeClr val="lt1"/>
-          </a:fontRef>
-        </p:style>
-        <p:txBody>
-          <a:bodyPr rtlCol="0" anchor="ctr"/>
-          <a:lstStyle/>
-          <a:p>
-            <a:pPr algn="ctr"/>
-          </a:p>
-        </p:txBody>
-      </p:sp>
-      <p:sp>
-        <p:nvSpPr>
-          <p:cNvPr id="12" name="Rectangle 11"/>
-          <p:cNvSpPr/>
-          <p:nvPr/>
-        </p:nvSpPr>
-        <p:spPr>
-          <a:xfrm>
-            <a:off x="822960" y="4160520"/>
-            <a:ext cx="91440" cy="868680"/>
-          </a:xfrm>
-          <a:prstGeom prst="rect">
-            <a:avLst/>
-          </a:prstGeom>
-          <a:solidFill>
-            <a:srgbClr val="F9B700"/>
-          </a:solidFill>
-          <a:ln>
-            <a:noFill/>
-          </a:ln>
-        </p:spPr>
-        <p:style>
-          <a:lnRef idx="1">
-            <a:schemeClr val="accent1"/>
-          </a:lnRef>
-          <a:fillRef idx="3">
-            <a:schemeClr val="accent1"/>
-          </a:fillRef>
-          <a:effectRef idx="2">
-            <a:schemeClr val="accent1"/>
-          </a:effectRef>
-          <a:fontRef idx="minor">
-            <a:schemeClr val="lt1"/>
-          </a:fontRef>
-        </p:style>
-        <p:txBody>
-          <a:bodyPr rtlCol="0" anchor="ctr"/>
-          <a:lstStyle/>
-          <a:p>
-            <a:pPr algn="ctr"/>
-          </a:p>
-        </p:txBody>
-      </p:sp>
-      <p:sp>
-        <p:nvSpPr>
-          <p:cNvPr id="13" name="TextBox 12"/>
-          <p:cNvSpPr txBox="1"/>
-          <p:nvPr/>
-        </p:nvSpPr>
-        <p:spPr>
-          <a:xfrm>
-            <a:off x="1005840" y="4270248"/>
-            <a:ext cx="10104120" cy="704088"/>
-          </a:xfrm>
-          <a:prstGeom prst="rect">
-            <a:avLst/>
-          </a:prstGeom>
-          <a:noFill/>
-        </p:spPr>
-        <p:txBody>
-          <a:bodyPr wrap="square" lIns="0" rIns="0">
-            <a:spAutoFit/>
-          </a:bodyPr>
-          <a:lstStyle/>
-          <a:p>
-            <a:pPr>
-              <a:defRPr b="1" sz="1500">
-                <a:solidFill>
-                  <a:srgbClr val="1E2761"/>
-                </a:solidFill>
-                <a:latin typeface="Aptos Display"/>
-              </a:defRPr>
-            </a:pPr>
-            <a:r>
-              <a:t>Lab connection</a:t>
-            </a:r>
-          </a:p>
-          <a:p>
-            <a:pPr>
-              <a:spcBef>
-                <a:spcPts val="400"/>
-              </a:spcBef>
-              <a:defRPr sz="1050">
-                <a:solidFill>
-                  <a:srgbClr val="242424"/>
-                </a:solidFill>
-                <a:latin typeface="Aptos"/>
-              </a:defRPr>
-            </a:pPr>
-            <a:r>
-              <a:t>Coverage: Covered. Use the lab README to demonstrate or discuss this topic. Review terms: alignment, overview.</a:t>
+              <a:t>In the lab, you will apply this pattern, validate the expected behavior, and discuss where it fits in a real Power BI solution.</a:t>
             </a:r>
           </a:p>
         </p:txBody>
@@ -6167,42 +6103,6 @@
       </p:sp>
       <p:sp>
         <p:nvSpPr>
-          <p:cNvPr id="4" name="TextBox 3"/>
-          <p:cNvSpPr txBox="1"/>
-          <p:nvPr/>
-        </p:nvSpPr>
-        <p:spPr>
-          <a:xfrm>
-            <a:off x="530352" y="914400"/>
-            <a:ext cx="10515600" cy="320040"/>
-          </a:xfrm>
-          <a:prstGeom prst="rect">
-            <a:avLst/>
-          </a:prstGeom>
-          <a:noFill/>
-        </p:spPr>
-        <p:txBody>
-          <a:bodyPr wrap="none">
-            <a:spAutoFit/>
-          </a:bodyPr>
-          <a:lstStyle/>
-          <a:p>
-            <a:pPr>
-              <a:defRPr sz="1200">
-                <a:solidFill>
-                  <a:srgbClr val="5C5C5C"/>
-                </a:solidFill>
-                <a:latin typeface="Aptos"/>
-              </a:defRPr>
-            </a:pPr>
-            <a:r>
-              <a:t>Talking points, learner value, and lab connection</a:t>
-            </a:r>
-          </a:p>
-        </p:txBody>
-      </p:sp>
-      <p:sp>
-        <p:nvSpPr>
           <p:cNvPr id="5" name="Rounded Rectangle 4"/>
           <p:cNvSpPr/>
           <p:nvPr/>
@@ -6320,7 +6220,143 @@
               </a:defRPr>
             </a:pPr>
             <a:r>
-              <a:t>Talking points</a:t>
+              <a:t>Key ideas</a:t>
+            </a:r>
+            <a:br/>
+            <a:r>
+              <a:t>• Authoring assistance</a:t>
+            </a:r>
+            <a:br/>
+            <a:r>
+              <a:t>• Summarization</a:t>
+            </a:r>
+            <a:br/>
+            <a:r>
+              <a:t>• Data exploration</a:t>
+            </a:r>
+          </a:p>
+        </p:txBody>
+      </p:sp>
+      <p:sp>
+        <p:nvSpPr>
+          <p:cNvPr id="8" name="Rounded Rectangle 7"/>
+          <p:cNvSpPr/>
+          <p:nvPr/>
+        </p:nvSpPr>
+        <p:spPr>
+          <a:xfrm>
+            <a:off x="6263640" y="1234440"/>
+            <a:ext cx="5303520" cy="1828800"/>
+          </a:xfrm>
+          <a:prstGeom prst="roundRect">
+            <a:avLst/>
+          </a:prstGeom>
+          <a:solidFill>
+            <a:srgbClr val="FFFFFF"/>
+          </a:solidFill>
+          <a:ln>
+            <a:solidFill>
+              <a:srgbClr val="DCDCDC"/>
+            </a:solidFill>
+          </a:ln>
+        </p:spPr>
+        <p:style>
+          <a:lnRef idx="1">
+            <a:schemeClr val="accent1"/>
+          </a:lnRef>
+          <a:fillRef idx="3">
+            <a:schemeClr val="accent1"/>
+          </a:fillRef>
+          <a:effectRef idx="2">
+            <a:schemeClr val="accent1"/>
+          </a:effectRef>
+          <a:fontRef idx="minor">
+            <a:schemeClr val="lt1"/>
+          </a:fontRef>
+        </p:style>
+        <p:txBody>
+          <a:bodyPr rtlCol="0" anchor="ctr"/>
+          <a:lstStyle/>
+          <a:p>
+            <a:pPr algn="ctr"/>
+          </a:p>
+        </p:txBody>
+      </p:sp>
+      <p:sp>
+        <p:nvSpPr>
+          <p:cNvPr id="9" name="Rectangle 8"/>
+          <p:cNvSpPr/>
+          <p:nvPr/>
+        </p:nvSpPr>
+        <p:spPr>
+          <a:xfrm>
+            <a:off x="6263640" y="1234440"/>
+            <a:ext cx="91440" cy="1828800"/>
+          </a:xfrm>
+          <a:prstGeom prst="rect">
+            <a:avLst/>
+          </a:prstGeom>
+          <a:solidFill>
+            <a:srgbClr val="02C39A"/>
+          </a:solidFill>
+          <a:ln>
+            <a:noFill/>
+          </a:ln>
+        </p:spPr>
+        <p:style>
+          <a:lnRef idx="1">
+            <a:schemeClr val="accent1"/>
+          </a:lnRef>
+          <a:fillRef idx="3">
+            <a:schemeClr val="accent1"/>
+          </a:fillRef>
+          <a:effectRef idx="2">
+            <a:schemeClr val="accent1"/>
+          </a:effectRef>
+          <a:fontRef idx="minor">
+            <a:schemeClr val="lt1"/>
+          </a:fontRef>
+        </p:style>
+        <p:txBody>
+          <a:bodyPr rtlCol="0" anchor="ctr"/>
+          <a:lstStyle/>
+          <a:p>
+            <a:pPr algn="ctr"/>
+          </a:p>
+        </p:txBody>
+      </p:sp>
+      <p:sp>
+        <p:nvSpPr>
+          <p:cNvPr id="10" name="TextBox 9"/>
+          <p:cNvSpPr txBox="1"/>
+          <p:nvPr/>
+        </p:nvSpPr>
+        <p:spPr>
+          <a:xfrm>
+            <a:off x="6446520" y="1344168"/>
+            <a:ext cx="4983480" cy="1664208"/>
+          </a:xfrm>
+          <a:prstGeom prst="rect">
+            <a:avLst/>
+          </a:prstGeom>
+          <a:noFill/>
+        </p:spPr>
+        <p:txBody>
+          <a:bodyPr wrap="square" lIns="0" rIns="0">
+            <a:spAutoFit/>
+          </a:bodyPr>
+          <a:lstStyle/>
+          <a:p>
+            <a:pPr>
+              <a:defRPr b="1" sz="1500">
+                <a:solidFill>
+                  <a:srgbClr val="1E2761"/>
+                </a:solidFill>
+                <a:latin typeface="Aptos Display"/>
+              </a:defRPr>
+            </a:pPr>
+            <a:r>
+              <a:t>Why it helps</a:t>
             </a:r>
           </a:p>
           <a:p>
@@ -6336,29 +6372,25 @@
               </a:defRPr>
             </a:pPr>
             <a:r>
-              <a:t>• Authoring assistance</a:t>
+              <a:t>• Tenant/capacity constraints</a:t>
             </a:r>
             <a:br/>
             <a:r>
-              <a:t>• Summarization</a:t>
-            </a:r>
-            <a:br/>
-            <a:r>
-              <a:t>• Data exploration</a:t>
-            </a:r>
-          </a:p>
-        </p:txBody>
-      </p:sp>
-      <p:sp>
-        <p:nvSpPr>
-          <p:cNvPr id="8" name="Rounded Rectangle 7"/>
+              <a:t>• Gov availability caveats</a:t>
+            </a:r>
+          </a:p>
+        </p:txBody>
+      </p:sp>
+      <p:sp>
+        <p:nvSpPr>
+          <p:cNvPr id="11" name="Rounded Rectangle 10"/>
           <p:cNvSpPr/>
           <p:nvPr/>
         </p:nvSpPr>
         <p:spPr>
           <a:xfrm>
-            <a:off x="6263640" y="1234440"/>
-            <a:ext cx="5303520" cy="1828800"/>
+            <a:off x="822960" y="4160520"/>
+            <a:ext cx="10424160" cy="868680"/>
           </a:xfrm>
           <a:prstGeom prst="roundRect">
             <a:avLst/>
@@ -6396,20 +6428,20 @@
       </p:sp>
       <p:sp>
         <p:nvSpPr>
-          <p:cNvPr id="9" name="Rectangle 8"/>
+          <p:cNvPr id="12" name="Rectangle 11"/>
           <p:cNvSpPr/>
           <p:nvPr/>
         </p:nvSpPr>
         <p:spPr>
           <a:xfrm>
-            <a:off x="6263640" y="1234440"/>
-            <a:ext cx="91440" cy="1828800"/>
+            <a:off x="822960" y="4160520"/>
+            <a:ext cx="91440" cy="868680"/>
           </a:xfrm>
           <a:prstGeom prst="rect">
             <a:avLst/>
           </a:prstGeom>
           <a:solidFill>
-            <a:srgbClr val="02C39A"/>
+            <a:srgbClr val="F9B700"/>
           </a:solidFill>
           <a:ln>
             <a:noFill/>
@@ -6439,14 +6471,14 @@
       </p:sp>
       <p:sp>
         <p:nvSpPr>
-          <p:cNvPr id="10" name="TextBox 9"/>
+          <p:cNvPr id="13" name="TextBox 12"/>
           <p:cNvSpPr txBox="1"/>
           <p:nvPr/>
         </p:nvSpPr>
         <p:spPr>
           <a:xfrm>
-            <a:off x="6446520" y="1344168"/>
-            <a:ext cx="4983480" cy="1664208"/>
+            <a:off x="1005840" y="4270248"/>
+            <a:ext cx="10104120" cy="704088"/>
           </a:xfrm>
           <a:prstGeom prst="rect">
             <a:avLst/>
@@ -6468,167 +6500,7 @@
               </a:defRPr>
             </a:pPr>
             <a:r>
-              <a:t>Why it helps</a:t>
-            </a:r>
-          </a:p>
-          <a:p>
-            <a:pPr>
-              <a:spcBef>
-                <a:spcPts val="400"/>
-              </a:spcBef>
-              <a:defRPr sz="1050">
-                <a:solidFill>
-                  <a:srgbClr val="242424"/>
-                </a:solidFill>
-                <a:latin typeface="Aptos"/>
-              </a:defRPr>
-            </a:pPr>
-            <a:r>
-              <a:t>• Tenant/capacity constraints</a:t>
-            </a:r>
-            <a:br/>
-            <a:r>
-              <a:t>• Gov availability caveats</a:t>
-            </a:r>
-          </a:p>
-        </p:txBody>
-      </p:sp>
-      <p:sp>
-        <p:nvSpPr>
-          <p:cNvPr id="11" name="Rounded Rectangle 10"/>
-          <p:cNvSpPr/>
-          <p:nvPr/>
-        </p:nvSpPr>
-        <p:spPr>
-          <a:xfrm>
-            <a:off x="822960" y="4160520"/>
-            <a:ext cx="10424160" cy="868680"/>
-          </a:xfrm>
-          <a:prstGeom prst="roundRect">
-            <a:avLst/>
-          </a:prstGeom>
-          <a:solidFill>
-            <a:srgbClr val="FFFFFF"/>
-          </a:solidFill>
-          <a:ln>
-            <a:solidFill>
-              <a:srgbClr val="DCDCDC"/>
-            </a:solidFill>
-          </a:ln>
-        </p:spPr>
-        <p:style>
-          <a:lnRef idx="1">
-            <a:schemeClr val="accent1"/>
-          </a:lnRef>
-          <a:fillRef idx="3">
-            <a:schemeClr val="accent1"/>
-          </a:fillRef>
-          <a:effectRef idx="2">
-            <a:schemeClr val="accent1"/>
-          </a:effectRef>
-          <a:fontRef idx="minor">
-            <a:schemeClr val="lt1"/>
-          </a:fontRef>
-        </p:style>
-        <p:txBody>
-          <a:bodyPr rtlCol="0" anchor="ctr"/>
-          <a:lstStyle/>
-          <a:p>
-            <a:pPr algn="ctr"/>
-          </a:p>
-        </p:txBody>
-      </p:sp>
-      <p:sp>
-        <p:nvSpPr>
-          <p:cNvPr id="12" name="Rectangle 11"/>
-          <p:cNvSpPr/>
-          <p:nvPr/>
-        </p:nvSpPr>
-        <p:spPr>
-          <a:xfrm>
-            <a:off x="822960" y="4160520"/>
-            <a:ext cx="91440" cy="868680"/>
-          </a:xfrm>
-          <a:prstGeom prst="rect">
-            <a:avLst/>
-          </a:prstGeom>
-          <a:solidFill>
-            <a:srgbClr val="F9B700"/>
-          </a:solidFill>
-          <a:ln>
-            <a:noFill/>
-          </a:ln>
-        </p:spPr>
-        <p:style>
-          <a:lnRef idx="1">
-            <a:schemeClr val="accent1"/>
-          </a:lnRef>
-          <a:fillRef idx="3">
-            <a:schemeClr val="accent1"/>
-          </a:fillRef>
-          <a:effectRef idx="2">
-            <a:schemeClr val="accent1"/>
-          </a:effectRef>
-          <a:fontRef idx="minor">
-            <a:schemeClr val="lt1"/>
-          </a:fontRef>
-        </p:style>
-        <p:txBody>
-          <a:bodyPr rtlCol="0" anchor="ctr"/>
-          <a:lstStyle/>
-          <a:p>
-            <a:pPr algn="ctr"/>
-          </a:p>
-        </p:txBody>
-      </p:sp>
-      <p:sp>
-        <p:nvSpPr>
-          <p:cNvPr id="13" name="TextBox 12"/>
-          <p:cNvSpPr txBox="1"/>
-          <p:nvPr/>
-        </p:nvSpPr>
-        <p:spPr>
-          <a:xfrm>
-            <a:off x="1005840" y="4270248"/>
-            <a:ext cx="10104120" cy="704088"/>
-          </a:xfrm>
-          <a:prstGeom prst="rect">
-            <a:avLst/>
-          </a:prstGeom>
-          <a:noFill/>
-        </p:spPr>
-        <p:txBody>
-          <a:bodyPr wrap="square" lIns="0" rIns="0">
-            <a:spAutoFit/>
-          </a:bodyPr>
-          <a:lstStyle/>
-          <a:p>
-            <a:pPr>
-              <a:defRPr b="1" sz="1500">
-                <a:solidFill>
-                  <a:srgbClr val="1E2761"/>
-                </a:solidFill>
-                <a:latin typeface="Aptos Display"/>
-              </a:defRPr>
-            </a:pPr>
-            <a:r>
-              <a:t>Lab connection</a:t>
-            </a:r>
-          </a:p>
-          <a:p>
-            <a:pPr>
-              <a:spcBef>
-                <a:spcPts val="400"/>
-              </a:spcBef>
-              <a:defRPr sz="1050">
-                <a:solidFill>
-                  <a:srgbClr val="242424"/>
-                </a:solidFill>
-                <a:latin typeface="Aptos"/>
-              </a:defRPr>
-            </a:pPr>
-            <a:r>
-              <a:t>Coverage: Covered. Use the lab README to demonstrate or discuss this topic. Review terms: assistance, authoring, caveats, exploration, summarization.</a:t>
+              <a:t>In the lab, you will apply this pattern, validate the expected behavior, and discuss where it fits in a real Power BI solution.</a:t>
             </a:r>
           </a:p>
         </p:txBody>
@@ -6767,42 +6639,6 @@
       </p:sp>
       <p:sp>
         <p:nvSpPr>
-          <p:cNvPr id="4" name="TextBox 3"/>
-          <p:cNvSpPr txBox="1"/>
-          <p:nvPr/>
-        </p:nvSpPr>
-        <p:spPr>
-          <a:xfrm>
-            <a:off x="530352" y="914400"/>
-            <a:ext cx="10515600" cy="320040"/>
-          </a:xfrm>
-          <a:prstGeom prst="rect">
-            <a:avLst/>
-          </a:prstGeom>
-          <a:noFill/>
-        </p:spPr>
-        <p:txBody>
-          <a:bodyPr wrap="none">
-            <a:spAutoFit/>
-          </a:bodyPr>
-          <a:lstStyle/>
-          <a:p>
-            <a:pPr>
-              <a:defRPr sz="1200">
-                <a:solidFill>
-                  <a:srgbClr val="5C5C5C"/>
-                </a:solidFill>
-                <a:latin typeface="Aptos"/>
-              </a:defRPr>
-            </a:pPr>
-            <a:r>
-              <a:t>Talking points, learner value, and lab connection</a:t>
-            </a:r>
-          </a:p>
-        </p:txBody>
-      </p:sp>
-      <p:sp>
-        <p:nvSpPr>
           <p:cNvPr id="5" name="Rounded Rectangle 4"/>
           <p:cNvSpPr/>
           <p:nvPr/>
@@ -6920,7 +6756,143 @@
               </a:defRPr>
             </a:pPr>
             <a:r>
-              <a:t>Talking points</a:t>
+              <a:t>Key ideas</a:t>
+            </a:r>
+            <a:br/>
+            <a:r>
+              <a:t>• What-if parameters</a:t>
+            </a:r>
+            <a:br/>
+            <a:r>
+              <a:t>• Manual driver analysis</a:t>
+            </a:r>
+            <a:br/>
+            <a:r>
+              <a:t>• Decomposition with standard visuals</a:t>
+            </a:r>
+          </a:p>
+        </p:txBody>
+      </p:sp>
+      <p:sp>
+        <p:nvSpPr>
+          <p:cNvPr id="8" name="Rounded Rectangle 7"/>
+          <p:cNvSpPr/>
+          <p:nvPr/>
+        </p:nvSpPr>
+        <p:spPr>
+          <a:xfrm>
+            <a:off x="6263640" y="1234440"/>
+            <a:ext cx="5303520" cy="1828800"/>
+          </a:xfrm>
+          <a:prstGeom prst="roundRect">
+            <a:avLst/>
+          </a:prstGeom>
+          <a:solidFill>
+            <a:srgbClr val="FFFFFF"/>
+          </a:solidFill>
+          <a:ln>
+            <a:solidFill>
+              <a:srgbClr val="DCDCDC"/>
+            </a:solidFill>
+          </a:ln>
+        </p:spPr>
+        <p:style>
+          <a:lnRef idx="1">
+            <a:schemeClr val="accent1"/>
+          </a:lnRef>
+          <a:fillRef idx="3">
+            <a:schemeClr val="accent1"/>
+          </a:fillRef>
+          <a:effectRef idx="2">
+            <a:schemeClr val="accent1"/>
+          </a:effectRef>
+          <a:fontRef idx="minor">
+            <a:schemeClr val="lt1"/>
+          </a:fontRef>
+        </p:style>
+        <p:txBody>
+          <a:bodyPr rtlCol="0" anchor="ctr"/>
+          <a:lstStyle/>
+          <a:p>
+            <a:pPr algn="ctr"/>
+          </a:p>
+        </p:txBody>
+      </p:sp>
+      <p:sp>
+        <p:nvSpPr>
+          <p:cNvPr id="9" name="Rectangle 8"/>
+          <p:cNvSpPr/>
+          <p:nvPr/>
+        </p:nvSpPr>
+        <p:spPr>
+          <a:xfrm>
+            <a:off x="6263640" y="1234440"/>
+            <a:ext cx="91440" cy="1828800"/>
+          </a:xfrm>
+          <a:prstGeom prst="rect">
+            <a:avLst/>
+          </a:prstGeom>
+          <a:solidFill>
+            <a:srgbClr val="02C39A"/>
+          </a:solidFill>
+          <a:ln>
+            <a:noFill/>
+          </a:ln>
+        </p:spPr>
+        <p:style>
+          <a:lnRef idx="1">
+            <a:schemeClr val="accent1"/>
+          </a:lnRef>
+          <a:fillRef idx="3">
+            <a:schemeClr val="accent1"/>
+          </a:fillRef>
+          <a:effectRef idx="2">
+            <a:schemeClr val="accent1"/>
+          </a:effectRef>
+          <a:fontRef idx="minor">
+            <a:schemeClr val="lt1"/>
+          </a:fontRef>
+        </p:style>
+        <p:txBody>
+          <a:bodyPr rtlCol="0" anchor="ctr"/>
+          <a:lstStyle/>
+          <a:p>
+            <a:pPr algn="ctr"/>
+          </a:p>
+        </p:txBody>
+      </p:sp>
+      <p:sp>
+        <p:nvSpPr>
+          <p:cNvPr id="10" name="TextBox 9"/>
+          <p:cNvSpPr txBox="1"/>
+          <p:nvPr/>
+        </p:nvSpPr>
+        <p:spPr>
+          <a:xfrm>
+            <a:off x="6446520" y="1344168"/>
+            <a:ext cx="4983480" cy="1664208"/>
+          </a:xfrm>
+          <a:prstGeom prst="rect">
+            <a:avLst/>
+          </a:prstGeom>
+          <a:noFill/>
+        </p:spPr>
+        <p:txBody>
+          <a:bodyPr wrap="square" lIns="0" rIns="0">
+            <a:spAutoFit/>
+          </a:bodyPr>
+          <a:lstStyle/>
+          <a:p>
+            <a:pPr>
+              <a:defRPr b="1" sz="1500">
+                <a:solidFill>
+                  <a:srgbClr val="1E2761"/>
+                </a:solidFill>
+                <a:latin typeface="Aptos Display"/>
+              </a:defRPr>
+            </a:pPr>
+            <a:r>
+              <a:t>Why it helps</a:t>
             </a:r>
           </a:p>
           <a:p>
@@ -6936,29 +6908,25 @@
               </a:defRPr>
             </a:pPr>
             <a:r>
-              <a:t>• What-if parameters</a:t>
+              <a:t>• DAX-based exception flags</a:t>
             </a:r>
             <a:br/>
             <a:r>
-              <a:t>• Manual driver analysis</a:t>
-            </a:r>
-            <a:br/>
-            <a:r>
-              <a:t>• Decomposition with standard visuals</a:t>
-            </a:r>
-          </a:p>
-        </p:txBody>
-      </p:sp>
-      <p:sp>
-        <p:nvSpPr>
-          <p:cNvPr id="8" name="Rounded Rectangle 7"/>
+              <a:t>• Documented assumptions</a:t>
+            </a:r>
+          </a:p>
+        </p:txBody>
+      </p:sp>
+      <p:sp>
+        <p:nvSpPr>
+          <p:cNvPr id="11" name="Rounded Rectangle 10"/>
           <p:cNvSpPr/>
           <p:nvPr/>
         </p:nvSpPr>
         <p:spPr>
           <a:xfrm>
-            <a:off x="6263640" y="1234440"/>
-            <a:ext cx="5303520" cy="1828800"/>
+            <a:off x="822960" y="4160520"/>
+            <a:ext cx="10424160" cy="868680"/>
           </a:xfrm>
           <a:prstGeom prst="roundRect">
             <a:avLst/>
@@ -6996,20 +6964,20 @@
       </p:sp>
       <p:sp>
         <p:nvSpPr>
-          <p:cNvPr id="9" name="Rectangle 8"/>
+          <p:cNvPr id="12" name="Rectangle 11"/>
           <p:cNvSpPr/>
           <p:nvPr/>
         </p:nvSpPr>
         <p:spPr>
           <a:xfrm>
-            <a:off x="6263640" y="1234440"/>
-            <a:ext cx="91440" cy="1828800"/>
+            <a:off x="822960" y="4160520"/>
+            <a:ext cx="91440" cy="868680"/>
           </a:xfrm>
           <a:prstGeom prst="rect">
             <a:avLst/>
           </a:prstGeom>
           <a:solidFill>
-            <a:srgbClr val="02C39A"/>
+            <a:srgbClr val="F9B700"/>
           </a:solidFill>
           <a:ln>
             <a:noFill/>
@@ -7039,14 +7007,14 @@
       </p:sp>
       <p:sp>
         <p:nvSpPr>
-          <p:cNvPr id="10" name="TextBox 9"/>
+          <p:cNvPr id="13" name="TextBox 12"/>
           <p:cNvSpPr txBox="1"/>
           <p:nvPr/>
         </p:nvSpPr>
         <p:spPr>
           <a:xfrm>
-            <a:off x="6446520" y="1344168"/>
-            <a:ext cx="4983480" cy="1664208"/>
+            <a:off x="1005840" y="4270248"/>
+            <a:ext cx="10104120" cy="704088"/>
           </a:xfrm>
           <a:prstGeom prst="rect">
             <a:avLst/>
@@ -7068,167 +7036,7 @@
               </a:defRPr>
             </a:pPr>
             <a:r>
-              <a:t>Why it helps</a:t>
-            </a:r>
-          </a:p>
-          <a:p>
-            <a:pPr>
-              <a:spcBef>
-                <a:spcPts val="400"/>
-              </a:spcBef>
-              <a:defRPr sz="1050">
-                <a:solidFill>
-                  <a:srgbClr val="242424"/>
-                </a:solidFill>
-                <a:latin typeface="Aptos"/>
-              </a:defRPr>
-            </a:pPr>
-            <a:r>
-              <a:t>• DAX-based exception flags</a:t>
-            </a:r>
-            <a:br/>
-            <a:r>
-              <a:t>• Documented assumptions</a:t>
-            </a:r>
-          </a:p>
-        </p:txBody>
-      </p:sp>
-      <p:sp>
-        <p:nvSpPr>
-          <p:cNvPr id="11" name="Rounded Rectangle 10"/>
-          <p:cNvSpPr/>
-          <p:nvPr/>
-        </p:nvSpPr>
-        <p:spPr>
-          <a:xfrm>
-            <a:off x="822960" y="4160520"/>
-            <a:ext cx="10424160" cy="868680"/>
-          </a:xfrm>
-          <a:prstGeom prst="roundRect">
-            <a:avLst/>
-          </a:prstGeom>
-          <a:solidFill>
-            <a:srgbClr val="FFFFFF"/>
-          </a:solidFill>
-          <a:ln>
-            <a:solidFill>
-              <a:srgbClr val="DCDCDC"/>
-            </a:solidFill>
-          </a:ln>
-        </p:spPr>
-        <p:style>
-          <a:lnRef idx="1">
-            <a:schemeClr val="accent1"/>
-          </a:lnRef>
-          <a:fillRef idx="3">
-            <a:schemeClr val="accent1"/>
-          </a:fillRef>
-          <a:effectRef idx="2">
-            <a:schemeClr val="accent1"/>
-          </a:effectRef>
-          <a:fontRef idx="minor">
-            <a:schemeClr val="lt1"/>
-          </a:fontRef>
-        </p:style>
-        <p:txBody>
-          <a:bodyPr rtlCol="0" anchor="ctr"/>
-          <a:lstStyle/>
-          <a:p>
-            <a:pPr algn="ctr"/>
-          </a:p>
-        </p:txBody>
-      </p:sp>
-      <p:sp>
-        <p:nvSpPr>
-          <p:cNvPr id="12" name="Rectangle 11"/>
-          <p:cNvSpPr/>
-          <p:nvPr/>
-        </p:nvSpPr>
-        <p:spPr>
-          <a:xfrm>
-            <a:off x="822960" y="4160520"/>
-            <a:ext cx="91440" cy="868680"/>
-          </a:xfrm>
-          <a:prstGeom prst="rect">
-            <a:avLst/>
-          </a:prstGeom>
-          <a:solidFill>
-            <a:srgbClr val="F9B700"/>
-          </a:solidFill>
-          <a:ln>
-            <a:noFill/>
-          </a:ln>
-        </p:spPr>
-        <p:style>
-          <a:lnRef idx="1">
-            <a:schemeClr val="accent1"/>
-          </a:lnRef>
-          <a:fillRef idx="3">
-            <a:schemeClr val="accent1"/>
-          </a:fillRef>
-          <a:effectRef idx="2">
-            <a:schemeClr val="accent1"/>
-          </a:effectRef>
-          <a:fontRef idx="minor">
-            <a:schemeClr val="lt1"/>
-          </a:fontRef>
-        </p:style>
-        <p:txBody>
-          <a:bodyPr rtlCol="0" anchor="ctr"/>
-          <a:lstStyle/>
-          <a:p>
-            <a:pPr algn="ctr"/>
-          </a:p>
-        </p:txBody>
-      </p:sp>
-      <p:sp>
-        <p:nvSpPr>
-          <p:cNvPr id="13" name="TextBox 12"/>
-          <p:cNvSpPr txBox="1"/>
-          <p:nvPr/>
-        </p:nvSpPr>
-        <p:spPr>
-          <a:xfrm>
-            <a:off x="1005840" y="4270248"/>
-            <a:ext cx="10104120" cy="704088"/>
-          </a:xfrm>
-          <a:prstGeom prst="rect">
-            <a:avLst/>
-          </a:prstGeom>
-          <a:noFill/>
-        </p:spPr>
-        <p:txBody>
-          <a:bodyPr wrap="square" lIns="0" rIns="0">
-            <a:spAutoFit/>
-          </a:bodyPr>
-          <a:lstStyle/>
-          <a:p>
-            <a:pPr>
-              <a:defRPr b="1" sz="1500">
-                <a:solidFill>
-                  <a:srgbClr val="1E2761"/>
-                </a:solidFill>
-                <a:latin typeface="Aptos Display"/>
-              </a:defRPr>
-            </a:pPr>
-            <a:r>
-              <a:t>Lab connection</a:t>
-            </a:r>
-          </a:p>
-          <a:p>
-            <a:pPr>
-              <a:spcBef>
-                <a:spcPts val="400"/>
-              </a:spcBef>
-              <a:defRPr sz="1050">
-                <a:solidFill>
-                  <a:srgbClr val="242424"/>
-                </a:solidFill>
-                <a:latin typeface="Aptos"/>
-              </a:defRPr>
-            </a:pPr>
-            <a:r>
-              <a:t>Coverage: Covered. Use the lab README to demonstrate or discuss this topic. Review terms: exception, flags, standard.</a:t>
+              <a:t>In the lab, you will apply this pattern, validate the expected behavior, and discuss where it fits in a real Power BI solution.</a:t>
             </a:r>
           </a:p>
         </p:txBody>
@@ -7367,42 +7175,6 @@
       </p:sp>
       <p:sp>
         <p:nvSpPr>
-          <p:cNvPr id="4" name="TextBox 3"/>
-          <p:cNvSpPr txBox="1"/>
-          <p:nvPr/>
-        </p:nvSpPr>
-        <p:spPr>
-          <a:xfrm>
-            <a:off x="530352" y="914400"/>
-            <a:ext cx="10515600" cy="320040"/>
-          </a:xfrm>
-          <a:prstGeom prst="rect">
-            <a:avLst/>
-          </a:prstGeom>
-          <a:noFill/>
-        </p:spPr>
-        <p:txBody>
-          <a:bodyPr wrap="none">
-            <a:spAutoFit/>
-          </a:bodyPr>
-          <a:lstStyle/>
-          <a:p>
-            <a:pPr>
-              <a:defRPr sz="1200">
-                <a:solidFill>
-                  <a:srgbClr val="5C5C5C"/>
-                </a:solidFill>
-                <a:latin typeface="Aptos"/>
-              </a:defRPr>
-            </a:pPr>
-            <a:r>
-              <a:t>Talking points, learner value, and lab connection</a:t>
-            </a:r>
-          </a:p>
-        </p:txBody>
-      </p:sp>
-      <p:sp>
-        <p:nvSpPr>
           <p:cNvPr id="5" name="Rounded Rectangle 4"/>
           <p:cNvSpPr/>
           <p:nvPr/>
@@ -7520,7 +7292,139 @@
               </a:defRPr>
             </a:pPr>
             <a:r>
-              <a:t>Talking points</a:t>
+              <a:t>Key ideas</a:t>
+            </a:r>
+            <a:br/>
+            <a:r>
+              <a:t>• Is the feature available?</a:t>
+            </a:r>
+            <a:br/>
+            <a:r>
+              <a:t>• Is it approved?</a:t>
+            </a:r>
+          </a:p>
+        </p:txBody>
+      </p:sp>
+      <p:sp>
+        <p:nvSpPr>
+          <p:cNvPr id="8" name="Rounded Rectangle 7"/>
+          <p:cNvSpPr/>
+          <p:nvPr/>
+        </p:nvSpPr>
+        <p:spPr>
+          <a:xfrm>
+            <a:off x="6263640" y="1234440"/>
+            <a:ext cx="5303520" cy="1828800"/>
+          </a:xfrm>
+          <a:prstGeom prst="roundRect">
+            <a:avLst/>
+          </a:prstGeom>
+          <a:solidFill>
+            <a:srgbClr val="FFFFFF"/>
+          </a:solidFill>
+          <a:ln>
+            <a:solidFill>
+              <a:srgbClr val="DCDCDC"/>
+            </a:solidFill>
+          </a:ln>
+        </p:spPr>
+        <p:style>
+          <a:lnRef idx="1">
+            <a:schemeClr val="accent1"/>
+          </a:lnRef>
+          <a:fillRef idx="3">
+            <a:schemeClr val="accent1"/>
+          </a:fillRef>
+          <a:effectRef idx="2">
+            <a:schemeClr val="accent1"/>
+          </a:effectRef>
+          <a:fontRef idx="minor">
+            <a:schemeClr val="lt1"/>
+          </a:fontRef>
+        </p:style>
+        <p:txBody>
+          <a:bodyPr rtlCol="0" anchor="ctr"/>
+          <a:lstStyle/>
+          <a:p>
+            <a:pPr algn="ctr"/>
+          </a:p>
+        </p:txBody>
+      </p:sp>
+      <p:sp>
+        <p:nvSpPr>
+          <p:cNvPr id="9" name="Rectangle 8"/>
+          <p:cNvSpPr/>
+          <p:nvPr/>
+        </p:nvSpPr>
+        <p:spPr>
+          <a:xfrm>
+            <a:off x="6263640" y="1234440"/>
+            <a:ext cx="91440" cy="1828800"/>
+          </a:xfrm>
+          <a:prstGeom prst="rect">
+            <a:avLst/>
+          </a:prstGeom>
+          <a:solidFill>
+            <a:srgbClr val="02C39A"/>
+          </a:solidFill>
+          <a:ln>
+            <a:noFill/>
+          </a:ln>
+        </p:spPr>
+        <p:style>
+          <a:lnRef idx="1">
+            <a:schemeClr val="accent1"/>
+          </a:lnRef>
+          <a:fillRef idx="3">
+            <a:schemeClr val="accent1"/>
+          </a:fillRef>
+          <a:effectRef idx="2">
+            <a:schemeClr val="accent1"/>
+          </a:effectRef>
+          <a:fontRef idx="minor">
+            <a:schemeClr val="lt1"/>
+          </a:fontRef>
+        </p:style>
+        <p:txBody>
+          <a:bodyPr rtlCol="0" anchor="ctr"/>
+          <a:lstStyle/>
+          <a:p>
+            <a:pPr algn="ctr"/>
+          </a:p>
+        </p:txBody>
+      </p:sp>
+      <p:sp>
+        <p:nvSpPr>
+          <p:cNvPr id="10" name="TextBox 9"/>
+          <p:cNvSpPr txBox="1"/>
+          <p:nvPr/>
+        </p:nvSpPr>
+        <p:spPr>
+          <a:xfrm>
+            <a:off x="6446520" y="1344168"/>
+            <a:ext cx="4983480" cy="1664208"/>
+          </a:xfrm>
+          <a:prstGeom prst="rect">
+            <a:avLst/>
+          </a:prstGeom>
+          <a:noFill/>
+        </p:spPr>
+        <p:txBody>
+          <a:bodyPr wrap="square" lIns="0" rIns="0">
+            <a:spAutoFit/>
+          </a:bodyPr>
+          <a:lstStyle/>
+          <a:p>
+            <a:pPr>
+              <a:defRPr b="1" sz="1500">
+                <a:solidFill>
+                  <a:srgbClr val="1E2761"/>
+                </a:solidFill>
+                <a:latin typeface="Aptos Display"/>
+              </a:defRPr>
+            </a:pPr>
+            <a:r>
+              <a:t>Why it helps</a:t>
             </a:r>
           </a:p>
           <a:p>
@@ -7536,25 +7440,25 @@
               </a:defRPr>
             </a:pPr>
             <a:r>
-              <a:t>• Is the feature available?</a:t>
+              <a:t>• Is data residency acceptable?</a:t>
             </a:r>
             <a:br/>
             <a:r>
-              <a:t>• Is it approved?</a:t>
-            </a:r>
-          </a:p>
-        </p:txBody>
-      </p:sp>
-      <p:sp>
-        <p:nvSpPr>
-          <p:cNvPr id="8" name="Rounded Rectangle 7"/>
+              <a:t>• Is there a non-AI fallback?</a:t>
+            </a:r>
+          </a:p>
+        </p:txBody>
+      </p:sp>
+      <p:sp>
+        <p:nvSpPr>
+          <p:cNvPr id="11" name="Rounded Rectangle 10"/>
           <p:cNvSpPr/>
           <p:nvPr/>
         </p:nvSpPr>
         <p:spPr>
           <a:xfrm>
-            <a:off x="6263640" y="1234440"/>
-            <a:ext cx="5303520" cy="1828800"/>
+            <a:off x="822960" y="4160520"/>
+            <a:ext cx="10424160" cy="868680"/>
           </a:xfrm>
           <a:prstGeom prst="roundRect">
             <a:avLst/>
@@ -7592,20 +7496,20 @@
       </p:sp>
       <p:sp>
         <p:nvSpPr>
-          <p:cNvPr id="9" name="Rectangle 8"/>
+          <p:cNvPr id="12" name="Rectangle 11"/>
           <p:cNvSpPr/>
           <p:nvPr/>
         </p:nvSpPr>
         <p:spPr>
           <a:xfrm>
-            <a:off x="6263640" y="1234440"/>
-            <a:ext cx="91440" cy="1828800"/>
+            <a:off x="822960" y="4160520"/>
+            <a:ext cx="91440" cy="868680"/>
           </a:xfrm>
           <a:prstGeom prst="rect">
             <a:avLst/>
           </a:prstGeom>
           <a:solidFill>
-            <a:srgbClr val="02C39A"/>
+            <a:srgbClr val="F9B700"/>
           </a:solidFill>
           <a:ln>
             <a:noFill/>
@@ -7635,14 +7539,14 @@
       </p:sp>
       <p:sp>
         <p:nvSpPr>
-          <p:cNvPr id="10" name="TextBox 9"/>
+          <p:cNvPr id="13" name="TextBox 12"/>
           <p:cNvSpPr txBox="1"/>
           <p:nvPr/>
         </p:nvSpPr>
         <p:spPr>
           <a:xfrm>
-            <a:off x="6446520" y="1344168"/>
-            <a:ext cx="4983480" cy="1664208"/>
+            <a:off x="1005840" y="4270248"/>
+            <a:ext cx="10104120" cy="704088"/>
           </a:xfrm>
           <a:prstGeom prst="rect">
             <a:avLst/>
@@ -7664,167 +7568,7 @@
               </a:defRPr>
             </a:pPr>
             <a:r>
-              <a:t>Why it helps</a:t>
-            </a:r>
-          </a:p>
-          <a:p>
-            <a:pPr>
-              <a:spcBef>
-                <a:spcPts val="400"/>
-              </a:spcBef>
-              <a:defRPr sz="1050">
-                <a:solidFill>
-                  <a:srgbClr val="242424"/>
-                </a:solidFill>
-                <a:latin typeface="Aptos"/>
-              </a:defRPr>
-            </a:pPr>
-            <a:r>
-              <a:t>• Is data residency acceptable?</a:t>
-            </a:r>
-            <a:br/>
-            <a:r>
-              <a:t>• Is there a non-AI fallback?</a:t>
-            </a:r>
-          </a:p>
-        </p:txBody>
-      </p:sp>
-      <p:sp>
-        <p:nvSpPr>
-          <p:cNvPr id="11" name="Rounded Rectangle 10"/>
-          <p:cNvSpPr/>
-          <p:nvPr/>
-        </p:nvSpPr>
-        <p:spPr>
-          <a:xfrm>
-            <a:off x="822960" y="4160520"/>
-            <a:ext cx="10424160" cy="868680"/>
-          </a:xfrm>
-          <a:prstGeom prst="roundRect">
-            <a:avLst/>
-          </a:prstGeom>
-          <a:solidFill>
-            <a:srgbClr val="FFFFFF"/>
-          </a:solidFill>
-          <a:ln>
-            <a:solidFill>
-              <a:srgbClr val="DCDCDC"/>
-            </a:solidFill>
-          </a:ln>
-        </p:spPr>
-        <p:style>
-          <a:lnRef idx="1">
-            <a:schemeClr val="accent1"/>
-          </a:lnRef>
-          <a:fillRef idx="3">
-            <a:schemeClr val="accent1"/>
-          </a:fillRef>
-          <a:effectRef idx="2">
-            <a:schemeClr val="accent1"/>
-          </a:effectRef>
-          <a:fontRef idx="minor">
-            <a:schemeClr val="lt1"/>
-          </a:fontRef>
-        </p:style>
-        <p:txBody>
-          <a:bodyPr rtlCol="0" anchor="ctr"/>
-          <a:lstStyle/>
-          <a:p>
-            <a:pPr algn="ctr"/>
-          </a:p>
-        </p:txBody>
-      </p:sp>
-      <p:sp>
-        <p:nvSpPr>
-          <p:cNvPr id="12" name="Rectangle 11"/>
-          <p:cNvSpPr/>
-          <p:nvPr/>
-        </p:nvSpPr>
-        <p:spPr>
-          <a:xfrm>
-            <a:off x="822960" y="4160520"/>
-            <a:ext cx="91440" cy="868680"/>
-          </a:xfrm>
-          <a:prstGeom prst="rect">
-            <a:avLst/>
-          </a:prstGeom>
-          <a:solidFill>
-            <a:srgbClr val="F9B700"/>
-          </a:solidFill>
-          <a:ln>
-            <a:noFill/>
-          </a:ln>
-        </p:spPr>
-        <p:style>
-          <a:lnRef idx="1">
-            <a:schemeClr val="accent1"/>
-          </a:lnRef>
-          <a:fillRef idx="3">
-            <a:schemeClr val="accent1"/>
-          </a:fillRef>
-          <a:effectRef idx="2">
-            <a:schemeClr val="accent1"/>
-          </a:effectRef>
-          <a:fontRef idx="minor">
-            <a:schemeClr val="lt1"/>
-          </a:fontRef>
-        </p:style>
-        <p:txBody>
-          <a:bodyPr rtlCol="0" anchor="ctr"/>
-          <a:lstStyle/>
-          <a:p>
-            <a:pPr algn="ctr"/>
-          </a:p>
-        </p:txBody>
-      </p:sp>
-      <p:sp>
-        <p:nvSpPr>
-          <p:cNvPr id="13" name="TextBox 12"/>
-          <p:cNvSpPr txBox="1"/>
-          <p:nvPr/>
-        </p:nvSpPr>
-        <p:spPr>
-          <a:xfrm>
-            <a:off x="1005840" y="4270248"/>
-            <a:ext cx="10104120" cy="704088"/>
-          </a:xfrm>
-          <a:prstGeom prst="rect">
-            <a:avLst/>
-          </a:prstGeom>
-          <a:noFill/>
-        </p:spPr>
-        <p:txBody>
-          <a:bodyPr wrap="square" lIns="0" rIns="0">
-            <a:spAutoFit/>
-          </a:bodyPr>
-          <a:lstStyle/>
-          <a:p>
-            <a:pPr>
-              <a:defRPr b="1" sz="1500">
-                <a:solidFill>
-                  <a:srgbClr val="1E2761"/>
-                </a:solidFill>
-                <a:latin typeface="Aptos Display"/>
-              </a:defRPr>
-            </a:pPr>
-            <a:r>
-              <a:t>Lab connection</a:t>
-            </a:r>
-          </a:p>
-          <a:p>
-            <a:pPr>
-              <a:spcBef>
-                <a:spcPts val="400"/>
-              </a:spcBef>
-              <a:defRPr sz="1050">
-                <a:solidFill>
-                  <a:srgbClr val="242424"/>
-                </a:solidFill>
-                <a:latin typeface="Aptos"/>
-              </a:defRPr>
-            </a:pPr>
-            <a:r>
-              <a:t>Coverage: Covered. Use the lab README to demonstrate or discuss this topic. Review terms: acceptable, decision, framework.</a:t>
+              <a:t>In the lab, you will apply this pattern, validate the expected behavior, and discuss where it fits in a real Power BI solution.</a:t>
             </a:r>
           </a:p>
         </p:txBody>
@@ -7963,42 +7707,6 @@
       </p:sp>
       <p:sp>
         <p:nvSpPr>
-          <p:cNvPr id="4" name="TextBox 3"/>
-          <p:cNvSpPr txBox="1"/>
-          <p:nvPr/>
-        </p:nvSpPr>
-        <p:spPr>
-          <a:xfrm>
-            <a:off x="530352" y="914400"/>
-            <a:ext cx="10515600" cy="320040"/>
-          </a:xfrm>
-          <a:prstGeom prst="rect">
-            <a:avLst/>
-          </a:prstGeom>
-          <a:noFill/>
-        </p:spPr>
-        <p:txBody>
-          <a:bodyPr wrap="none">
-            <a:spAutoFit/>
-          </a:bodyPr>
-          <a:lstStyle/>
-          <a:p>
-            <a:pPr>
-              <a:defRPr sz="1200">
-                <a:solidFill>
-                  <a:srgbClr val="5C5C5C"/>
-                </a:solidFill>
-                <a:latin typeface="Aptos"/>
-              </a:defRPr>
-            </a:pPr>
-            <a:r>
-              <a:t>Talking points, learner value, and lab connection</a:t>
-            </a:r>
-          </a:p>
-        </p:txBody>
-      </p:sp>
-      <p:sp>
-        <p:nvSpPr>
           <p:cNvPr id="5" name="Rounded Rectangle 4"/>
           <p:cNvSpPr/>
           <p:nvPr/>
@@ -8116,7 +7824,139 @@
               </a:defRPr>
             </a:pPr>
             <a:r>
-              <a:t>Talking points</a:t>
+              <a:t>Key ideas</a:t>
+            </a:r>
+            <a:br/>
+            <a:r>
+              <a:t>• Feature labels</a:t>
+            </a:r>
+            <a:br/>
+            <a:r>
+              <a:t>• Scenario output</a:t>
+            </a:r>
+          </a:p>
+        </p:txBody>
+      </p:sp>
+      <p:sp>
+        <p:nvSpPr>
+          <p:cNvPr id="8" name="Rounded Rectangle 7"/>
+          <p:cNvSpPr/>
+          <p:nvPr/>
+        </p:nvSpPr>
+        <p:spPr>
+          <a:xfrm>
+            <a:off x="6263640" y="1234440"/>
+            <a:ext cx="5303520" cy="1828800"/>
+          </a:xfrm>
+          <a:prstGeom prst="roundRect">
+            <a:avLst/>
+          </a:prstGeom>
+          <a:solidFill>
+            <a:srgbClr val="FFFFFF"/>
+          </a:solidFill>
+          <a:ln>
+            <a:solidFill>
+              <a:srgbClr val="DCDCDC"/>
+            </a:solidFill>
+          </a:ln>
+        </p:spPr>
+        <p:style>
+          <a:lnRef idx="1">
+            <a:schemeClr val="accent1"/>
+          </a:lnRef>
+          <a:fillRef idx="3">
+            <a:schemeClr val="accent1"/>
+          </a:fillRef>
+          <a:effectRef idx="2">
+            <a:schemeClr val="accent1"/>
+          </a:effectRef>
+          <a:fontRef idx="minor">
+            <a:schemeClr val="lt1"/>
+          </a:fontRef>
+        </p:style>
+        <p:txBody>
+          <a:bodyPr rtlCol="0" anchor="ctr"/>
+          <a:lstStyle/>
+          <a:p>
+            <a:pPr algn="ctr"/>
+          </a:p>
+        </p:txBody>
+      </p:sp>
+      <p:sp>
+        <p:nvSpPr>
+          <p:cNvPr id="9" name="Rectangle 8"/>
+          <p:cNvSpPr/>
+          <p:nvPr/>
+        </p:nvSpPr>
+        <p:spPr>
+          <a:xfrm>
+            <a:off x="6263640" y="1234440"/>
+            <a:ext cx="91440" cy="1828800"/>
+          </a:xfrm>
+          <a:prstGeom prst="rect">
+            <a:avLst/>
+          </a:prstGeom>
+          <a:solidFill>
+            <a:srgbClr val="02C39A"/>
+          </a:solidFill>
+          <a:ln>
+            <a:noFill/>
+          </a:ln>
+        </p:spPr>
+        <p:style>
+          <a:lnRef idx="1">
+            <a:schemeClr val="accent1"/>
+          </a:lnRef>
+          <a:fillRef idx="3">
+            <a:schemeClr val="accent1"/>
+          </a:fillRef>
+          <a:effectRef idx="2">
+            <a:schemeClr val="accent1"/>
+          </a:effectRef>
+          <a:fontRef idx="minor">
+            <a:schemeClr val="lt1"/>
+          </a:fontRef>
+        </p:style>
+        <p:txBody>
+          <a:bodyPr rtlCol="0" anchor="ctr"/>
+          <a:lstStyle/>
+          <a:p>
+            <a:pPr algn="ctr"/>
+          </a:p>
+        </p:txBody>
+      </p:sp>
+      <p:sp>
+        <p:nvSpPr>
+          <p:cNvPr id="10" name="TextBox 9"/>
+          <p:cNvSpPr txBox="1"/>
+          <p:nvPr/>
+        </p:nvSpPr>
+        <p:spPr>
+          <a:xfrm>
+            <a:off x="6446520" y="1344168"/>
+            <a:ext cx="4983480" cy="1664208"/>
+          </a:xfrm>
+          <a:prstGeom prst="rect">
+            <a:avLst/>
+          </a:prstGeom>
+          <a:noFill/>
+        </p:spPr>
+        <p:txBody>
+          <a:bodyPr wrap="square" lIns="0" rIns="0">
+            <a:spAutoFit/>
+          </a:bodyPr>
+          <a:lstStyle/>
+          <a:p>
+            <a:pPr>
+              <a:defRPr b="1" sz="1500">
+                <a:solidFill>
+                  <a:srgbClr val="1E2761"/>
+                </a:solidFill>
+                <a:latin typeface="Aptos Display"/>
+              </a:defRPr>
+            </a:pPr>
+            <a:r>
+              <a:t>Why it helps</a:t>
             </a:r>
           </a:p>
           <a:p>
@@ -8132,25 +7972,21 @@
               </a:defRPr>
             </a:pPr>
             <a:r>
-              <a:t>• Feature labels</a:t>
-            </a:r>
-            <a:br/>
-            <a:r>
-              <a:t>• Scenario output</a:t>
-            </a:r>
-          </a:p>
-        </p:txBody>
-      </p:sp>
-      <p:sp>
-        <p:nvSpPr>
-          <p:cNvPr id="8" name="Rounded Rectangle 7"/>
+              <a:t>• Governance notes</a:t>
+            </a:r>
+          </a:p>
+        </p:txBody>
+      </p:sp>
+      <p:sp>
+        <p:nvSpPr>
+          <p:cNvPr id="11" name="Rounded Rectangle 10"/>
           <p:cNvSpPr/>
           <p:nvPr/>
         </p:nvSpPr>
         <p:spPr>
           <a:xfrm>
-            <a:off x="6263640" y="1234440"/>
-            <a:ext cx="5303520" cy="1828800"/>
+            <a:off x="822960" y="4160520"/>
+            <a:ext cx="10424160" cy="868680"/>
           </a:xfrm>
           <a:prstGeom prst="roundRect">
             <a:avLst/>
@@ -8188,20 +8024,20 @@
       </p:sp>
       <p:sp>
         <p:nvSpPr>
-          <p:cNvPr id="9" name="Rectangle 8"/>
+          <p:cNvPr id="12" name="Rectangle 11"/>
           <p:cNvSpPr/>
           <p:nvPr/>
         </p:nvSpPr>
         <p:spPr>
           <a:xfrm>
-            <a:off x="6263640" y="1234440"/>
-            <a:ext cx="91440" cy="1828800"/>
+            <a:off x="822960" y="4160520"/>
+            <a:ext cx="91440" cy="868680"/>
           </a:xfrm>
           <a:prstGeom prst="rect">
             <a:avLst/>
           </a:prstGeom>
           <a:solidFill>
-            <a:srgbClr val="02C39A"/>
+            <a:srgbClr val="F9B700"/>
           </a:solidFill>
           <a:ln>
             <a:noFill/>
@@ -8231,14 +8067,14 @@
       </p:sp>
       <p:sp>
         <p:nvSpPr>
-          <p:cNvPr id="10" name="TextBox 9"/>
+          <p:cNvPr id="13" name="TextBox 12"/>
           <p:cNvSpPr txBox="1"/>
           <p:nvPr/>
         </p:nvSpPr>
         <p:spPr>
           <a:xfrm>
-            <a:off x="6446520" y="1344168"/>
-            <a:ext cx="4983480" cy="1664208"/>
+            <a:off x="1005840" y="4270248"/>
+            <a:ext cx="10104120" cy="704088"/>
           </a:xfrm>
           <a:prstGeom prst="rect">
             <a:avLst/>
@@ -8260,163 +8096,7 @@
               </a:defRPr>
             </a:pPr>
             <a:r>
-              <a:t>Why it helps</a:t>
-            </a:r>
-          </a:p>
-          <a:p>
-            <a:pPr>
-              <a:spcBef>
-                <a:spcPts val="400"/>
-              </a:spcBef>
-              <a:defRPr sz="1050">
-                <a:solidFill>
-                  <a:srgbClr val="242424"/>
-                </a:solidFill>
-                <a:latin typeface="Aptos"/>
-              </a:defRPr>
-            </a:pPr>
-            <a:r>
-              <a:t>• Governance notes</a:t>
-            </a:r>
-          </a:p>
-        </p:txBody>
-      </p:sp>
-      <p:sp>
-        <p:nvSpPr>
-          <p:cNvPr id="11" name="Rounded Rectangle 10"/>
-          <p:cNvSpPr/>
-          <p:nvPr/>
-        </p:nvSpPr>
-        <p:spPr>
-          <a:xfrm>
-            <a:off x="822960" y="4160520"/>
-            <a:ext cx="10424160" cy="868680"/>
-          </a:xfrm>
-          <a:prstGeom prst="roundRect">
-            <a:avLst/>
-          </a:prstGeom>
-          <a:solidFill>
-            <a:srgbClr val="FFFFFF"/>
-          </a:solidFill>
-          <a:ln>
-            <a:solidFill>
-              <a:srgbClr val="DCDCDC"/>
-            </a:solidFill>
-          </a:ln>
-        </p:spPr>
-        <p:style>
-          <a:lnRef idx="1">
-            <a:schemeClr val="accent1"/>
-          </a:lnRef>
-          <a:fillRef idx="3">
-            <a:schemeClr val="accent1"/>
-          </a:fillRef>
-          <a:effectRef idx="2">
-            <a:schemeClr val="accent1"/>
-          </a:effectRef>
-          <a:fontRef idx="minor">
-            <a:schemeClr val="lt1"/>
-          </a:fontRef>
-        </p:style>
-        <p:txBody>
-          <a:bodyPr rtlCol="0" anchor="ctr"/>
-          <a:lstStyle/>
-          <a:p>
-            <a:pPr algn="ctr"/>
-          </a:p>
-        </p:txBody>
-      </p:sp>
-      <p:sp>
-        <p:nvSpPr>
-          <p:cNvPr id="12" name="Rectangle 11"/>
-          <p:cNvSpPr/>
-          <p:nvPr/>
-        </p:nvSpPr>
-        <p:spPr>
-          <a:xfrm>
-            <a:off x="822960" y="4160520"/>
-            <a:ext cx="91440" cy="868680"/>
-          </a:xfrm>
-          <a:prstGeom prst="rect">
-            <a:avLst/>
-          </a:prstGeom>
-          <a:solidFill>
-            <a:srgbClr val="F9B700"/>
-          </a:solidFill>
-          <a:ln>
-            <a:noFill/>
-          </a:ln>
-        </p:spPr>
-        <p:style>
-          <a:lnRef idx="1">
-            <a:schemeClr val="accent1"/>
-          </a:lnRef>
-          <a:fillRef idx="3">
-            <a:schemeClr val="accent1"/>
-          </a:fillRef>
-          <a:effectRef idx="2">
-            <a:schemeClr val="accent1"/>
-          </a:effectRef>
-          <a:fontRef idx="minor">
-            <a:schemeClr val="lt1"/>
-          </a:fontRef>
-        </p:style>
-        <p:txBody>
-          <a:bodyPr rtlCol="0" anchor="ctr"/>
-          <a:lstStyle/>
-          <a:p>
-            <a:pPr algn="ctr"/>
-          </a:p>
-        </p:txBody>
-      </p:sp>
-      <p:sp>
-        <p:nvSpPr>
-          <p:cNvPr id="13" name="TextBox 12"/>
-          <p:cNvSpPr txBox="1"/>
-          <p:nvPr/>
-        </p:nvSpPr>
-        <p:spPr>
-          <a:xfrm>
-            <a:off x="1005840" y="4270248"/>
-            <a:ext cx="10104120" cy="704088"/>
-          </a:xfrm>
-          <a:prstGeom prst="rect">
-            <a:avLst/>
-          </a:prstGeom>
-          <a:noFill/>
-        </p:spPr>
-        <p:txBody>
-          <a:bodyPr wrap="square" lIns="0" rIns="0">
-            <a:spAutoFit/>
-          </a:bodyPr>
-          <a:lstStyle/>
-          <a:p>
-            <a:pPr>
-              <a:defRPr b="1" sz="1500">
-                <a:solidFill>
-                  <a:srgbClr val="1E2761"/>
-                </a:solidFill>
-                <a:latin typeface="Aptos Display"/>
-              </a:defRPr>
-            </a:pPr>
-            <a:r>
-              <a:t>Lab connection</a:t>
-            </a:r>
-          </a:p>
-          <a:p>
-            <a:pPr>
-              <a:spcBef>
-                <a:spcPts val="400"/>
-              </a:spcBef>
-              <a:defRPr sz="1050">
-                <a:solidFill>
-                  <a:srgbClr val="242424"/>
-                </a:solidFill>
-                <a:latin typeface="Aptos"/>
-              </a:defRPr>
-            </a:pPr>
-            <a:r>
-              <a:t>Coverage: Covered. Use the lab README to demonstrate or discuss this topic. Review terms: labels, notes.</a:t>
+              <a:t>In the lab, you will apply this pattern, validate the expected behavior, and discuss where it fits in a real Power BI solution.</a:t>
             </a:r>
           </a:p>
         </p:txBody>
@@ -9423,42 +9103,6 @@
       </p:sp>
       <p:sp>
         <p:nvSpPr>
-          <p:cNvPr id="4" name="TextBox 3"/>
-          <p:cNvSpPr txBox="1"/>
-          <p:nvPr/>
-        </p:nvSpPr>
-        <p:spPr>
-          <a:xfrm>
-            <a:off x="530352" y="914400"/>
-            <a:ext cx="10515600" cy="320040"/>
-          </a:xfrm>
-          <a:prstGeom prst="rect">
-            <a:avLst/>
-          </a:prstGeom>
-          <a:noFill/>
-        </p:spPr>
-        <p:txBody>
-          <a:bodyPr wrap="none">
-            <a:spAutoFit/>
-          </a:bodyPr>
-          <a:lstStyle/>
-          <a:p>
-            <a:pPr>
-              <a:defRPr sz="1200">
-                <a:solidFill>
-                  <a:srgbClr val="5C5C5C"/>
-                </a:solidFill>
-                <a:latin typeface="Aptos"/>
-              </a:defRPr>
-            </a:pPr>
-            <a:r>
-              <a:t>Use this to introduce the section before hands-on labs.</a:t>
-            </a:r>
-          </a:p>
-        </p:txBody>
-      </p:sp>
-      <p:sp>
-        <p:nvSpPr>
           <p:cNvPr id="5" name="Rounded Rectangle 4"/>
           <p:cNvSpPr/>
           <p:nvPr/>
@@ -10711,42 +10355,6 @@
       </p:sp>
       <p:sp>
         <p:nvSpPr>
-          <p:cNvPr id="4" name="TextBox 3"/>
-          <p:cNvSpPr txBox="1"/>
-          <p:nvPr/>
-        </p:nvSpPr>
-        <p:spPr>
-          <a:xfrm>
-            <a:off x="530352" y="914400"/>
-            <a:ext cx="10515600" cy="320040"/>
-          </a:xfrm>
-          <a:prstGeom prst="rect">
-            <a:avLst/>
-          </a:prstGeom>
-          <a:noFill/>
-        </p:spPr>
-        <p:txBody>
-          <a:bodyPr wrap="none">
-            <a:spAutoFit/>
-          </a:bodyPr>
-          <a:lstStyle/>
-          <a:p>
-            <a:pPr>
-              <a:defRPr sz="1200">
-                <a:solidFill>
-                  <a:srgbClr val="5C5C5C"/>
-                </a:solidFill>
-                <a:latin typeface="Aptos"/>
-              </a:defRPr>
-            </a:pPr>
-            <a:r>
-              <a:t>Talking points, learner value, and lab connection</a:t>
-            </a:r>
-          </a:p>
-        </p:txBody>
-      </p:sp>
-      <p:sp>
-        <p:nvSpPr>
           <p:cNvPr id="5" name="Rounded Rectangle 4"/>
           <p:cNvSpPr/>
           <p:nvPr/>
@@ -10864,7 +10472,143 @@
               </a:defRPr>
             </a:pPr>
             <a:r>
-              <a:t>Talking points</a:t>
+              <a:t>Key ideas</a:t>
+            </a:r>
+            <a:br/>
+            <a:r>
+              <a:t>• Analytical patterns</a:t>
+            </a:r>
+            <a:br/>
+            <a:r>
+              <a:t>• AI visuals</a:t>
+            </a:r>
+            <a:br/>
+            <a:r>
+              <a:t>• External ML integration</a:t>
+            </a:r>
+          </a:p>
+        </p:txBody>
+      </p:sp>
+      <p:sp>
+        <p:nvSpPr>
+          <p:cNvPr id="8" name="Rounded Rectangle 7"/>
+          <p:cNvSpPr/>
+          <p:nvPr/>
+        </p:nvSpPr>
+        <p:spPr>
+          <a:xfrm>
+            <a:off x="6263640" y="1234440"/>
+            <a:ext cx="5303520" cy="1828800"/>
+          </a:xfrm>
+          <a:prstGeom prst="roundRect">
+            <a:avLst/>
+          </a:prstGeom>
+          <a:solidFill>
+            <a:srgbClr val="FFFFFF"/>
+          </a:solidFill>
+          <a:ln>
+            <a:solidFill>
+              <a:srgbClr val="DCDCDC"/>
+            </a:solidFill>
+          </a:ln>
+        </p:spPr>
+        <p:style>
+          <a:lnRef idx="1">
+            <a:schemeClr val="accent1"/>
+          </a:lnRef>
+          <a:fillRef idx="3">
+            <a:schemeClr val="accent1"/>
+          </a:fillRef>
+          <a:effectRef idx="2">
+            <a:schemeClr val="accent1"/>
+          </a:effectRef>
+          <a:fontRef idx="minor">
+            <a:schemeClr val="lt1"/>
+          </a:fontRef>
+        </p:style>
+        <p:txBody>
+          <a:bodyPr rtlCol="0" anchor="ctr"/>
+          <a:lstStyle/>
+          <a:p>
+            <a:pPr algn="ctr"/>
+          </a:p>
+        </p:txBody>
+      </p:sp>
+      <p:sp>
+        <p:nvSpPr>
+          <p:cNvPr id="9" name="Rectangle 8"/>
+          <p:cNvSpPr/>
+          <p:nvPr/>
+        </p:nvSpPr>
+        <p:spPr>
+          <a:xfrm>
+            <a:off x="6263640" y="1234440"/>
+            <a:ext cx="91440" cy="1828800"/>
+          </a:xfrm>
+          <a:prstGeom prst="rect">
+            <a:avLst/>
+          </a:prstGeom>
+          <a:solidFill>
+            <a:srgbClr val="02C39A"/>
+          </a:solidFill>
+          <a:ln>
+            <a:noFill/>
+          </a:ln>
+        </p:spPr>
+        <p:style>
+          <a:lnRef idx="1">
+            <a:schemeClr val="accent1"/>
+          </a:lnRef>
+          <a:fillRef idx="3">
+            <a:schemeClr val="accent1"/>
+          </a:fillRef>
+          <a:effectRef idx="2">
+            <a:schemeClr val="accent1"/>
+          </a:effectRef>
+          <a:fontRef idx="minor">
+            <a:schemeClr val="lt1"/>
+          </a:fontRef>
+        </p:style>
+        <p:txBody>
+          <a:bodyPr rtlCol="0" anchor="ctr"/>
+          <a:lstStyle/>
+          <a:p>
+            <a:pPr algn="ctr"/>
+          </a:p>
+        </p:txBody>
+      </p:sp>
+      <p:sp>
+        <p:nvSpPr>
+          <p:cNvPr id="10" name="TextBox 9"/>
+          <p:cNvSpPr txBox="1"/>
+          <p:nvPr/>
+        </p:nvSpPr>
+        <p:spPr>
+          <a:xfrm>
+            <a:off x="6446520" y="1344168"/>
+            <a:ext cx="4983480" cy="1664208"/>
+          </a:xfrm>
+          <a:prstGeom prst="rect">
+            <a:avLst/>
+          </a:prstGeom>
+          <a:noFill/>
+        </p:spPr>
+        <p:txBody>
+          <a:bodyPr wrap="square" lIns="0" rIns="0">
+            <a:spAutoFit/>
+          </a:bodyPr>
+          <a:lstStyle/>
+          <a:p>
+            <a:pPr>
+              <a:defRPr b="1" sz="1500">
+                <a:solidFill>
+                  <a:srgbClr val="1E2761"/>
+                </a:solidFill>
+                <a:latin typeface="Aptos Display"/>
+              </a:defRPr>
+            </a:pPr>
+            <a:r>
+              <a:t>Why it helps</a:t>
             </a:r>
           </a:p>
           <a:p>
@@ -10880,29 +10624,25 @@
               </a:defRPr>
             </a:pPr>
             <a:r>
-              <a:t>• Analytical patterns</a:t>
+              <a:t>• Copilot experiences</a:t>
             </a:r>
             <a:br/>
             <a:r>
-              <a:t>• AI visuals</a:t>
-            </a:r>
-            <a:br/>
-            <a:r>
-              <a:t>• External ML integration</a:t>
-            </a:r>
-          </a:p>
-        </p:txBody>
-      </p:sp>
-      <p:sp>
-        <p:nvSpPr>
-          <p:cNvPr id="8" name="Rounded Rectangle 7"/>
+              <a:t>• Governance and availability</a:t>
+            </a:r>
+          </a:p>
+        </p:txBody>
+      </p:sp>
+      <p:sp>
+        <p:nvSpPr>
+          <p:cNvPr id="11" name="Rounded Rectangle 10"/>
           <p:cNvSpPr/>
           <p:nvPr/>
         </p:nvSpPr>
         <p:spPr>
           <a:xfrm>
-            <a:off x="6263640" y="1234440"/>
-            <a:ext cx="5303520" cy="1828800"/>
+            <a:off x="822960" y="4160520"/>
+            <a:ext cx="10424160" cy="868680"/>
           </a:xfrm>
           <a:prstGeom prst="roundRect">
             <a:avLst/>
@@ -10940,20 +10680,20 @@
       </p:sp>
       <p:sp>
         <p:nvSpPr>
-          <p:cNvPr id="9" name="Rectangle 8"/>
+          <p:cNvPr id="12" name="Rectangle 11"/>
           <p:cNvSpPr/>
           <p:nvPr/>
         </p:nvSpPr>
         <p:spPr>
           <a:xfrm>
-            <a:off x="6263640" y="1234440"/>
-            <a:ext cx="91440" cy="1828800"/>
+            <a:off x="822960" y="4160520"/>
+            <a:ext cx="91440" cy="868680"/>
           </a:xfrm>
           <a:prstGeom prst="rect">
             <a:avLst/>
           </a:prstGeom>
           <a:solidFill>
-            <a:srgbClr val="02C39A"/>
+            <a:srgbClr val="F9B700"/>
           </a:solidFill>
           <a:ln>
             <a:noFill/>
@@ -10983,14 +10723,14 @@
       </p:sp>
       <p:sp>
         <p:nvSpPr>
-          <p:cNvPr id="10" name="TextBox 9"/>
+          <p:cNvPr id="13" name="TextBox 12"/>
           <p:cNvSpPr txBox="1"/>
           <p:nvPr/>
         </p:nvSpPr>
         <p:spPr>
           <a:xfrm>
-            <a:off x="6446520" y="1344168"/>
-            <a:ext cx="4983480" cy="1664208"/>
+            <a:off x="1005840" y="4270248"/>
+            <a:ext cx="10104120" cy="704088"/>
           </a:xfrm>
           <a:prstGeom prst="rect">
             <a:avLst/>
@@ -11012,167 +10752,7 @@
               </a:defRPr>
             </a:pPr>
             <a:r>
-              <a:t>Why it helps</a:t>
-            </a:r>
-          </a:p>
-          <a:p>
-            <a:pPr>
-              <a:spcBef>
-                <a:spcPts val="400"/>
-              </a:spcBef>
-              <a:defRPr sz="1050">
-                <a:solidFill>
-                  <a:srgbClr val="242424"/>
-                </a:solidFill>
-                <a:latin typeface="Aptos"/>
-              </a:defRPr>
-            </a:pPr>
-            <a:r>
-              <a:t>• Copilot experiences</a:t>
-            </a:r>
-            <a:br/>
-            <a:r>
-              <a:t>• Governance and availability</a:t>
-            </a:r>
-          </a:p>
-        </p:txBody>
-      </p:sp>
-      <p:sp>
-        <p:nvSpPr>
-          <p:cNvPr id="11" name="Rounded Rectangle 10"/>
-          <p:cNvSpPr/>
-          <p:nvPr/>
-        </p:nvSpPr>
-        <p:spPr>
-          <a:xfrm>
-            <a:off x="822960" y="4160520"/>
-            <a:ext cx="10424160" cy="868680"/>
-          </a:xfrm>
-          <a:prstGeom prst="roundRect">
-            <a:avLst/>
-          </a:prstGeom>
-          <a:solidFill>
-            <a:srgbClr val="FFFFFF"/>
-          </a:solidFill>
-          <a:ln>
-            <a:solidFill>
-              <a:srgbClr val="DCDCDC"/>
-            </a:solidFill>
-          </a:ln>
-        </p:spPr>
-        <p:style>
-          <a:lnRef idx="1">
-            <a:schemeClr val="accent1"/>
-          </a:lnRef>
-          <a:fillRef idx="3">
-            <a:schemeClr val="accent1"/>
-          </a:fillRef>
-          <a:effectRef idx="2">
-            <a:schemeClr val="accent1"/>
-          </a:effectRef>
-          <a:fontRef idx="minor">
-            <a:schemeClr val="lt1"/>
-          </a:fontRef>
-        </p:style>
-        <p:txBody>
-          <a:bodyPr rtlCol="0" anchor="ctr"/>
-          <a:lstStyle/>
-          <a:p>
-            <a:pPr algn="ctr"/>
-          </a:p>
-        </p:txBody>
-      </p:sp>
-      <p:sp>
-        <p:nvSpPr>
-          <p:cNvPr id="12" name="Rectangle 11"/>
-          <p:cNvSpPr/>
-          <p:nvPr/>
-        </p:nvSpPr>
-        <p:spPr>
-          <a:xfrm>
-            <a:off x="822960" y="4160520"/>
-            <a:ext cx="91440" cy="868680"/>
-          </a:xfrm>
-          <a:prstGeom prst="rect">
-            <a:avLst/>
-          </a:prstGeom>
-          <a:solidFill>
-            <a:srgbClr val="F9B700"/>
-          </a:solidFill>
-          <a:ln>
-            <a:noFill/>
-          </a:ln>
-        </p:spPr>
-        <p:style>
-          <a:lnRef idx="1">
-            <a:schemeClr val="accent1"/>
-          </a:lnRef>
-          <a:fillRef idx="3">
-            <a:schemeClr val="accent1"/>
-          </a:fillRef>
-          <a:effectRef idx="2">
-            <a:schemeClr val="accent1"/>
-          </a:effectRef>
-          <a:fontRef idx="minor">
-            <a:schemeClr val="lt1"/>
-          </a:fontRef>
-        </p:style>
-        <p:txBody>
-          <a:bodyPr rtlCol="0" anchor="ctr"/>
-          <a:lstStyle/>
-          <a:p>
-            <a:pPr algn="ctr"/>
-          </a:p>
-        </p:txBody>
-      </p:sp>
-      <p:sp>
-        <p:nvSpPr>
-          <p:cNvPr id="13" name="TextBox 12"/>
-          <p:cNvSpPr txBox="1"/>
-          <p:nvPr/>
-        </p:nvSpPr>
-        <p:spPr>
-          <a:xfrm>
-            <a:off x="1005840" y="4270248"/>
-            <a:ext cx="10104120" cy="704088"/>
-          </a:xfrm>
-          <a:prstGeom prst="rect">
-            <a:avLst/>
-          </a:prstGeom>
-          <a:noFill/>
-        </p:spPr>
-        <p:txBody>
-          <a:bodyPr wrap="square" lIns="0" rIns="0">
-            <a:spAutoFit/>
-          </a:bodyPr>
-          <a:lstStyle/>
-          <a:p>
-            <a:pPr>
-              <a:defRPr b="1" sz="1500">
-                <a:solidFill>
-                  <a:srgbClr val="1E2761"/>
-                </a:solidFill>
-                <a:latin typeface="Aptos Display"/>
-              </a:defRPr>
-            </a:pPr>
-            <a:r>
-              <a:t>Lab connection</a:t>
-            </a:r>
-          </a:p>
-          <a:p>
-            <a:pPr>
-              <a:spcBef>
-                <a:spcPts val="400"/>
-              </a:spcBef>
-              <a:defRPr sz="1050">
-                <a:solidFill>
-                  <a:srgbClr val="242424"/>
-                </a:solidFill>
-                <a:latin typeface="Aptos"/>
-              </a:defRPr>
-            </a:pPr>
-            <a:r>
-              <a:t>Coverage: Covered. Use the lab README to demonstrate or discuss this topic. Review terms: experiences, external, patterns.</a:t>
+              <a:t>In the lab, you will apply this pattern, validate the expected behavior, and discuss where it fits in a real Power BI solution.</a:t>
             </a:r>
           </a:p>
         </p:txBody>
@@ -11311,42 +10891,6 @@
       </p:sp>
       <p:sp>
         <p:nvSpPr>
-          <p:cNvPr id="4" name="TextBox 3"/>
-          <p:cNvSpPr txBox="1"/>
-          <p:nvPr/>
-        </p:nvSpPr>
-        <p:spPr>
-          <a:xfrm>
-            <a:off x="530352" y="914400"/>
-            <a:ext cx="10515600" cy="320040"/>
-          </a:xfrm>
-          <a:prstGeom prst="rect">
-            <a:avLst/>
-          </a:prstGeom>
-          <a:noFill/>
-        </p:spPr>
-        <p:txBody>
-          <a:bodyPr wrap="none">
-            <a:spAutoFit/>
-          </a:bodyPr>
-          <a:lstStyle/>
-          <a:p>
-            <a:pPr>
-              <a:defRPr sz="1200">
-                <a:solidFill>
-                  <a:srgbClr val="5C5C5C"/>
-                </a:solidFill>
-                <a:latin typeface="Aptos"/>
-              </a:defRPr>
-            </a:pPr>
-            <a:r>
-              <a:t>Talking points, learner value, and lab connection</a:t>
-            </a:r>
-          </a:p>
-        </p:txBody>
-      </p:sp>
-      <p:sp>
-        <p:nvSpPr>
           <p:cNvPr id="5" name="Rounded Rectangle 4"/>
           <p:cNvSpPr/>
           <p:nvPr/>
@@ -11464,7 +11008,139 @@
               </a:defRPr>
             </a:pPr>
             <a:r>
-              <a:t>Talking points</a:t>
+              <a:t>Key ideas</a:t>
+            </a:r>
+            <a:br/>
+            <a:r>
+              <a:t>• Parameter table</a:t>
+            </a:r>
+            <a:br/>
+            <a:r>
+              <a:t>• Generated measure</a:t>
+            </a:r>
+          </a:p>
+        </p:txBody>
+      </p:sp>
+      <p:sp>
+        <p:nvSpPr>
+          <p:cNvPr id="8" name="Rounded Rectangle 7"/>
+          <p:cNvSpPr/>
+          <p:nvPr/>
+        </p:nvSpPr>
+        <p:spPr>
+          <a:xfrm>
+            <a:off x="6263640" y="1234440"/>
+            <a:ext cx="5303520" cy="1828800"/>
+          </a:xfrm>
+          <a:prstGeom prst="roundRect">
+            <a:avLst/>
+          </a:prstGeom>
+          <a:solidFill>
+            <a:srgbClr val="FFFFFF"/>
+          </a:solidFill>
+          <a:ln>
+            <a:solidFill>
+              <a:srgbClr val="DCDCDC"/>
+            </a:solidFill>
+          </a:ln>
+        </p:spPr>
+        <p:style>
+          <a:lnRef idx="1">
+            <a:schemeClr val="accent1"/>
+          </a:lnRef>
+          <a:fillRef idx="3">
+            <a:schemeClr val="accent1"/>
+          </a:fillRef>
+          <a:effectRef idx="2">
+            <a:schemeClr val="accent1"/>
+          </a:effectRef>
+          <a:fontRef idx="minor">
+            <a:schemeClr val="lt1"/>
+          </a:fontRef>
+        </p:style>
+        <p:txBody>
+          <a:bodyPr rtlCol="0" anchor="ctr"/>
+          <a:lstStyle/>
+          <a:p>
+            <a:pPr algn="ctr"/>
+          </a:p>
+        </p:txBody>
+      </p:sp>
+      <p:sp>
+        <p:nvSpPr>
+          <p:cNvPr id="9" name="Rectangle 8"/>
+          <p:cNvSpPr/>
+          <p:nvPr/>
+        </p:nvSpPr>
+        <p:spPr>
+          <a:xfrm>
+            <a:off x="6263640" y="1234440"/>
+            <a:ext cx="91440" cy="1828800"/>
+          </a:xfrm>
+          <a:prstGeom prst="rect">
+            <a:avLst/>
+          </a:prstGeom>
+          <a:solidFill>
+            <a:srgbClr val="02C39A"/>
+          </a:solidFill>
+          <a:ln>
+            <a:noFill/>
+          </a:ln>
+        </p:spPr>
+        <p:style>
+          <a:lnRef idx="1">
+            <a:schemeClr val="accent1"/>
+          </a:lnRef>
+          <a:fillRef idx="3">
+            <a:schemeClr val="accent1"/>
+          </a:fillRef>
+          <a:effectRef idx="2">
+            <a:schemeClr val="accent1"/>
+          </a:effectRef>
+          <a:fontRef idx="minor">
+            <a:schemeClr val="lt1"/>
+          </a:fontRef>
+        </p:style>
+        <p:txBody>
+          <a:bodyPr rtlCol="0" anchor="ctr"/>
+          <a:lstStyle/>
+          <a:p>
+            <a:pPr algn="ctr"/>
+          </a:p>
+        </p:txBody>
+      </p:sp>
+      <p:sp>
+        <p:nvSpPr>
+          <p:cNvPr id="10" name="TextBox 9"/>
+          <p:cNvSpPr txBox="1"/>
+          <p:nvPr/>
+        </p:nvSpPr>
+        <p:spPr>
+          <a:xfrm>
+            <a:off x="6446520" y="1344168"/>
+            <a:ext cx="4983480" cy="1664208"/>
+          </a:xfrm>
+          <a:prstGeom prst="rect">
+            <a:avLst/>
+          </a:prstGeom>
+          <a:noFill/>
+        </p:spPr>
+        <p:txBody>
+          <a:bodyPr wrap="square" lIns="0" rIns="0">
+            <a:spAutoFit/>
+          </a:bodyPr>
+          <a:lstStyle/>
+          <a:p>
+            <a:pPr>
+              <a:defRPr b="1" sz="1500">
+                <a:solidFill>
+                  <a:srgbClr val="1E2761"/>
+                </a:solidFill>
+                <a:latin typeface="Aptos Display"/>
+              </a:defRPr>
+            </a:pPr>
+            <a:r>
+              <a:t>Why it helps</a:t>
             </a:r>
           </a:p>
           <a:p>
@@ -11480,25 +11156,25 @@
               </a:defRPr>
             </a:pPr>
             <a:r>
-              <a:t>• Parameter table</a:t>
+              <a:t>• Scenario analysis</a:t>
             </a:r>
             <a:br/>
             <a:r>
-              <a:t>• Generated measure</a:t>
-            </a:r>
-          </a:p>
-        </p:txBody>
-      </p:sp>
-      <p:sp>
-        <p:nvSpPr>
-          <p:cNvPr id="8" name="Rounded Rectangle 7"/>
+              <a:t>• Business interpretation</a:t>
+            </a:r>
+          </a:p>
+        </p:txBody>
+      </p:sp>
+      <p:sp>
+        <p:nvSpPr>
+          <p:cNvPr id="11" name="Rounded Rectangle 10"/>
           <p:cNvSpPr/>
           <p:nvPr/>
         </p:nvSpPr>
         <p:spPr>
           <a:xfrm>
-            <a:off x="6263640" y="1234440"/>
-            <a:ext cx="5303520" cy="1828800"/>
+            <a:off x="822960" y="4160520"/>
+            <a:ext cx="10424160" cy="868680"/>
           </a:xfrm>
           <a:prstGeom prst="roundRect">
             <a:avLst/>
@@ -11536,20 +11212,20 @@
       </p:sp>
       <p:sp>
         <p:nvSpPr>
-          <p:cNvPr id="9" name="Rectangle 8"/>
+          <p:cNvPr id="12" name="Rectangle 11"/>
           <p:cNvSpPr/>
           <p:nvPr/>
         </p:nvSpPr>
         <p:spPr>
           <a:xfrm>
-            <a:off x="6263640" y="1234440"/>
-            <a:ext cx="91440" cy="1828800"/>
+            <a:off x="822960" y="4160520"/>
+            <a:ext cx="91440" cy="868680"/>
           </a:xfrm>
           <a:prstGeom prst="rect">
             <a:avLst/>
           </a:prstGeom>
           <a:solidFill>
-            <a:srgbClr val="02C39A"/>
+            <a:srgbClr val="F9B700"/>
           </a:solidFill>
           <a:ln>
             <a:noFill/>
@@ -11579,14 +11255,14 @@
       </p:sp>
       <p:sp>
         <p:nvSpPr>
-          <p:cNvPr id="10" name="TextBox 9"/>
+          <p:cNvPr id="13" name="TextBox 12"/>
           <p:cNvSpPr txBox="1"/>
           <p:nvPr/>
         </p:nvSpPr>
         <p:spPr>
           <a:xfrm>
-            <a:off x="6446520" y="1344168"/>
-            <a:ext cx="4983480" cy="1664208"/>
+            <a:off x="1005840" y="4270248"/>
+            <a:ext cx="10104120" cy="704088"/>
           </a:xfrm>
           <a:prstGeom prst="rect">
             <a:avLst/>
@@ -11608,167 +11284,7 @@
               </a:defRPr>
             </a:pPr>
             <a:r>
-              <a:t>Why it helps</a:t>
-            </a:r>
-          </a:p>
-          <a:p>
-            <a:pPr>
-              <a:spcBef>
-                <a:spcPts val="400"/>
-              </a:spcBef>
-              <a:defRPr sz="1050">
-                <a:solidFill>
-                  <a:srgbClr val="242424"/>
-                </a:solidFill>
-                <a:latin typeface="Aptos"/>
-              </a:defRPr>
-            </a:pPr>
-            <a:r>
-              <a:t>• Scenario analysis</a:t>
-            </a:r>
-            <a:br/>
-            <a:r>
-              <a:t>• Business interpretation</a:t>
-            </a:r>
-          </a:p>
-        </p:txBody>
-      </p:sp>
-      <p:sp>
-        <p:nvSpPr>
-          <p:cNvPr id="11" name="Rounded Rectangle 10"/>
-          <p:cNvSpPr/>
-          <p:nvPr/>
-        </p:nvSpPr>
-        <p:spPr>
-          <a:xfrm>
-            <a:off x="822960" y="4160520"/>
-            <a:ext cx="10424160" cy="868680"/>
-          </a:xfrm>
-          <a:prstGeom prst="roundRect">
-            <a:avLst/>
-          </a:prstGeom>
-          <a:solidFill>
-            <a:srgbClr val="FFFFFF"/>
-          </a:solidFill>
-          <a:ln>
-            <a:solidFill>
-              <a:srgbClr val="DCDCDC"/>
-            </a:solidFill>
-          </a:ln>
-        </p:spPr>
-        <p:style>
-          <a:lnRef idx="1">
-            <a:schemeClr val="accent1"/>
-          </a:lnRef>
-          <a:fillRef idx="3">
-            <a:schemeClr val="accent1"/>
-          </a:fillRef>
-          <a:effectRef idx="2">
-            <a:schemeClr val="accent1"/>
-          </a:effectRef>
-          <a:fontRef idx="minor">
-            <a:schemeClr val="lt1"/>
-          </a:fontRef>
-        </p:style>
-        <p:txBody>
-          <a:bodyPr rtlCol="0" anchor="ctr"/>
-          <a:lstStyle/>
-          <a:p>
-            <a:pPr algn="ctr"/>
-          </a:p>
-        </p:txBody>
-      </p:sp>
-      <p:sp>
-        <p:nvSpPr>
-          <p:cNvPr id="12" name="Rectangle 11"/>
-          <p:cNvSpPr/>
-          <p:nvPr/>
-        </p:nvSpPr>
-        <p:spPr>
-          <a:xfrm>
-            <a:off x="822960" y="4160520"/>
-            <a:ext cx="91440" cy="868680"/>
-          </a:xfrm>
-          <a:prstGeom prst="rect">
-            <a:avLst/>
-          </a:prstGeom>
-          <a:solidFill>
-            <a:srgbClr val="F9B700"/>
-          </a:solidFill>
-          <a:ln>
-            <a:noFill/>
-          </a:ln>
-        </p:spPr>
-        <p:style>
-          <a:lnRef idx="1">
-            <a:schemeClr val="accent1"/>
-          </a:lnRef>
-          <a:fillRef idx="3">
-            <a:schemeClr val="accent1"/>
-          </a:fillRef>
-          <a:effectRef idx="2">
-            <a:schemeClr val="accent1"/>
-          </a:effectRef>
-          <a:fontRef idx="minor">
-            <a:schemeClr val="lt1"/>
-          </a:fontRef>
-        </p:style>
-        <p:txBody>
-          <a:bodyPr rtlCol="0" anchor="ctr"/>
-          <a:lstStyle/>
-          <a:p>
-            <a:pPr algn="ctr"/>
-          </a:p>
-        </p:txBody>
-      </p:sp>
-      <p:sp>
-        <p:nvSpPr>
-          <p:cNvPr id="13" name="TextBox 12"/>
-          <p:cNvSpPr txBox="1"/>
-          <p:nvPr/>
-        </p:nvSpPr>
-        <p:spPr>
-          <a:xfrm>
-            <a:off x="1005840" y="4270248"/>
-            <a:ext cx="10104120" cy="704088"/>
-          </a:xfrm>
-          <a:prstGeom prst="rect">
-            <a:avLst/>
-          </a:prstGeom>
-          <a:noFill/>
-        </p:spPr>
-        <p:txBody>
-          <a:bodyPr wrap="square" lIns="0" rIns="0">
-            <a:spAutoFit/>
-          </a:bodyPr>
-          <a:lstStyle/>
-          <a:p>
-            <a:pPr>
-              <a:defRPr b="1" sz="1500">
-                <a:solidFill>
-                  <a:srgbClr val="1E2761"/>
-                </a:solidFill>
-                <a:latin typeface="Aptos Display"/>
-              </a:defRPr>
-            </a:pPr>
-            <a:r>
-              <a:t>Lab connection</a:t>
-            </a:r>
-          </a:p>
-          <a:p>
-            <a:pPr>
-              <a:spcBef>
-                <a:spcPts val="400"/>
-              </a:spcBef>
-              <a:defRPr sz="1050">
-                <a:solidFill>
-                  <a:srgbClr val="242424"/>
-                </a:solidFill>
-                <a:latin typeface="Aptos"/>
-              </a:defRPr>
-            </a:pPr>
-            <a:r>
-              <a:t>Coverage: Covered. Use the lab README to demonstrate or discuss this topic. Review terms: business.</a:t>
+              <a:t>In the lab, you will apply this pattern, validate the expected behavior, and discuss where it fits in a real Power BI solution.</a:t>
             </a:r>
           </a:p>
         </p:txBody>
@@ -11907,42 +11423,6 @@
       </p:sp>
       <p:sp>
         <p:nvSpPr>
-          <p:cNvPr id="4" name="TextBox 3"/>
-          <p:cNvSpPr txBox="1"/>
-          <p:nvPr/>
-        </p:nvSpPr>
-        <p:spPr>
-          <a:xfrm>
-            <a:off x="530352" y="914400"/>
-            <a:ext cx="10515600" cy="320040"/>
-          </a:xfrm>
-          <a:prstGeom prst="rect">
-            <a:avLst/>
-          </a:prstGeom>
-          <a:noFill/>
-        </p:spPr>
-        <p:txBody>
-          <a:bodyPr wrap="none">
-            <a:spAutoFit/>
-          </a:bodyPr>
-          <a:lstStyle/>
-          <a:p>
-            <a:pPr>
-              <a:defRPr sz="1200">
-                <a:solidFill>
-                  <a:srgbClr val="5C5C5C"/>
-                </a:solidFill>
-                <a:latin typeface="Aptos"/>
-              </a:defRPr>
-            </a:pPr>
-            <a:r>
-              <a:t>Talking points, learner value, and lab connection</a:t>
-            </a:r>
-          </a:p>
-        </p:txBody>
-      </p:sp>
-      <p:sp>
-        <p:nvSpPr>
           <p:cNvPr id="5" name="Rounded Rectangle 4"/>
           <p:cNvSpPr/>
           <p:nvPr/>
@@ -12060,7 +11540,139 @@
               </a:defRPr>
             </a:pPr>
             <a:r>
-              <a:t>Talking points</a:t>
+              <a:t>Key ideas</a:t>
+            </a:r>
+            <a:br/>
+            <a:r>
+              <a:t>• Driver analysis</a:t>
+            </a:r>
+            <a:br/>
+            <a:r>
+              <a:t>• Explain by fields</a:t>
+            </a:r>
+          </a:p>
+        </p:txBody>
+      </p:sp>
+      <p:sp>
+        <p:nvSpPr>
+          <p:cNvPr id="8" name="Rounded Rectangle 7"/>
+          <p:cNvSpPr/>
+          <p:nvPr/>
+        </p:nvSpPr>
+        <p:spPr>
+          <a:xfrm>
+            <a:off x="6263640" y="1234440"/>
+            <a:ext cx="5303520" cy="1828800"/>
+          </a:xfrm>
+          <a:prstGeom prst="roundRect">
+            <a:avLst/>
+          </a:prstGeom>
+          <a:solidFill>
+            <a:srgbClr val="FFFFFF"/>
+          </a:solidFill>
+          <a:ln>
+            <a:solidFill>
+              <a:srgbClr val="DCDCDC"/>
+            </a:solidFill>
+          </a:ln>
+        </p:spPr>
+        <p:style>
+          <a:lnRef idx="1">
+            <a:schemeClr val="accent1"/>
+          </a:lnRef>
+          <a:fillRef idx="3">
+            <a:schemeClr val="accent1"/>
+          </a:fillRef>
+          <a:effectRef idx="2">
+            <a:schemeClr val="accent1"/>
+          </a:effectRef>
+          <a:fontRef idx="minor">
+            <a:schemeClr val="lt1"/>
+          </a:fontRef>
+        </p:style>
+        <p:txBody>
+          <a:bodyPr rtlCol="0" anchor="ctr"/>
+          <a:lstStyle/>
+          <a:p>
+            <a:pPr algn="ctr"/>
+          </a:p>
+        </p:txBody>
+      </p:sp>
+      <p:sp>
+        <p:nvSpPr>
+          <p:cNvPr id="9" name="Rectangle 8"/>
+          <p:cNvSpPr/>
+          <p:nvPr/>
+        </p:nvSpPr>
+        <p:spPr>
+          <a:xfrm>
+            <a:off x="6263640" y="1234440"/>
+            <a:ext cx="91440" cy="1828800"/>
+          </a:xfrm>
+          <a:prstGeom prst="rect">
+            <a:avLst/>
+          </a:prstGeom>
+          <a:solidFill>
+            <a:srgbClr val="02C39A"/>
+          </a:solidFill>
+          <a:ln>
+            <a:noFill/>
+          </a:ln>
+        </p:spPr>
+        <p:style>
+          <a:lnRef idx="1">
+            <a:schemeClr val="accent1"/>
+          </a:lnRef>
+          <a:fillRef idx="3">
+            <a:schemeClr val="accent1"/>
+          </a:fillRef>
+          <a:effectRef idx="2">
+            <a:schemeClr val="accent1"/>
+          </a:effectRef>
+          <a:fontRef idx="minor">
+            <a:schemeClr val="lt1"/>
+          </a:fontRef>
+        </p:style>
+        <p:txBody>
+          <a:bodyPr rtlCol="0" anchor="ctr"/>
+          <a:lstStyle/>
+          <a:p>
+            <a:pPr algn="ctr"/>
+          </a:p>
+        </p:txBody>
+      </p:sp>
+      <p:sp>
+        <p:nvSpPr>
+          <p:cNvPr id="10" name="TextBox 9"/>
+          <p:cNvSpPr txBox="1"/>
+          <p:nvPr/>
+        </p:nvSpPr>
+        <p:spPr>
+          <a:xfrm>
+            <a:off x="6446520" y="1344168"/>
+            <a:ext cx="4983480" cy="1664208"/>
+          </a:xfrm>
+          <a:prstGeom prst="rect">
+            <a:avLst/>
+          </a:prstGeom>
+          <a:noFill/>
+        </p:spPr>
+        <p:txBody>
+          <a:bodyPr wrap="square" lIns="0" rIns="0">
+            <a:spAutoFit/>
+          </a:bodyPr>
+          <a:lstStyle/>
+          <a:p>
+            <a:pPr>
+              <a:defRPr b="1" sz="1500">
+                <a:solidFill>
+                  <a:srgbClr val="1E2761"/>
+                </a:solidFill>
+                <a:latin typeface="Aptos Display"/>
+              </a:defRPr>
+            </a:pPr>
+            <a:r>
+              <a:t>Why it helps</a:t>
             </a:r>
           </a:p>
           <a:p>
@@ -12076,25 +11688,25 @@
               </a:defRPr>
             </a:pPr>
             <a:r>
-              <a:t>• Driver analysis</a:t>
+              <a:t>• Guided exploration</a:t>
             </a:r>
             <a:br/>
             <a:r>
-              <a:t>• Explain by fields</a:t>
-            </a:r>
-          </a:p>
-        </p:txBody>
-      </p:sp>
-      <p:sp>
-        <p:nvSpPr>
-          <p:cNvPr id="8" name="Rounded Rectangle 7"/>
+              <a:t>• Availability validation</a:t>
+            </a:r>
+          </a:p>
+        </p:txBody>
+      </p:sp>
+      <p:sp>
+        <p:nvSpPr>
+          <p:cNvPr id="11" name="Rounded Rectangle 10"/>
           <p:cNvSpPr/>
           <p:nvPr/>
         </p:nvSpPr>
         <p:spPr>
           <a:xfrm>
-            <a:off x="6263640" y="1234440"/>
-            <a:ext cx="5303520" cy="1828800"/>
+            <a:off x="822960" y="4160520"/>
+            <a:ext cx="10424160" cy="868680"/>
           </a:xfrm>
           <a:prstGeom prst="roundRect">
             <a:avLst/>
@@ -12132,20 +11744,20 @@
       </p:sp>
       <p:sp>
         <p:nvSpPr>
-          <p:cNvPr id="9" name="Rectangle 8"/>
+          <p:cNvPr id="12" name="Rectangle 11"/>
           <p:cNvSpPr/>
           <p:nvPr/>
         </p:nvSpPr>
         <p:spPr>
           <a:xfrm>
-            <a:off x="6263640" y="1234440"/>
-            <a:ext cx="91440" cy="1828800"/>
+            <a:off x="822960" y="4160520"/>
+            <a:ext cx="91440" cy="868680"/>
           </a:xfrm>
           <a:prstGeom prst="rect">
             <a:avLst/>
           </a:prstGeom>
           <a:solidFill>
-            <a:srgbClr val="02C39A"/>
+            <a:srgbClr val="F9B700"/>
           </a:solidFill>
           <a:ln>
             <a:noFill/>
@@ -12175,14 +11787,14 @@
       </p:sp>
       <p:sp>
         <p:nvSpPr>
-          <p:cNvPr id="10" name="TextBox 9"/>
+          <p:cNvPr id="13" name="TextBox 12"/>
           <p:cNvSpPr txBox="1"/>
           <p:nvPr/>
         </p:nvSpPr>
         <p:spPr>
           <a:xfrm>
-            <a:off x="6446520" y="1344168"/>
-            <a:ext cx="4983480" cy="1664208"/>
+            <a:off x="1005840" y="4270248"/>
+            <a:ext cx="10104120" cy="704088"/>
           </a:xfrm>
           <a:prstGeom prst="rect">
             <a:avLst/>
@@ -12204,167 +11816,7 @@
               </a:defRPr>
             </a:pPr>
             <a:r>
-              <a:t>Why it helps</a:t>
-            </a:r>
-          </a:p>
-          <a:p>
-            <a:pPr>
-              <a:spcBef>
-                <a:spcPts val="400"/>
-              </a:spcBef>
-              <a:defRPr sz="1050">
-                <a:solidFill>
-                  <a:srgbClr val="242424"/>
-                </a:solidFill>
-                <a:latin typeface="Aptos"/>
-              </a:defRPr>
-            </a:pPr>
-            <a:r>
-              <a:t>• Guided exploration</a:t>
-            </a:r>
-            <a:br/>
-            <a:r>
-              <a:t>• Availability validation</a:t>
-            </a:r>
-          </a:p>
-        </p:txBody>
-      </p:sp>
-      <p:sp>
-        <p:nvSpPr>
-          <p:cNvPr id="11" name="Rounded Rectangle 10"/>
-          <p:cNvSpPr/>
-          <p:nvPr/>
-        </p:nvSpPr>
-        <p:spPr>
-          <a:xfrm>
-            <a:off x="822960" y="4160520"/>
-            <a:ext cx="10424160" cy="868680"/>
-          </a:xfrm>
-          <a:prstGeom prst="roundRect">
-            <a:avLst/>
-          </a:prstGeom>
-          <a:solidFill>
-            <a:srgbClr val="FFFFFF"/>
-          </a:solidFill>
-          <a:ln>
-            <a:solidFill>
-              <a:srgbClr val="DCDCDC"/>
-            </a:solidFill>
-          </a:ln>
-        </p:spPr>
-        <p:style>
-          <a:lnRef idx="1">
-            <a:schemeClr val="accent1"/>
-          </a:lnRef>
-          <a:fillRef idx="3">
-            <a:schemeClr val="accent1"/>
-          </a:fillRef>
-          <a:effectRef idx="2">
-            <a:schemeClr val="accent1"/>
-          </a:effectRef>
-          <a:fontRef idx="minor">
-            <a:schemeClr val="lt1"/>
-          </a:fontRef>
-        </p:style>
-        <p:txBody>
-          <a:bodyPr rtlCol="0" anchor="ctr"/>
-          <a:lstStyle/>
-          <a:p>
-            <a:pPr algn="ctr"/>
-          </a:p>
-        </p:txBody>
-      </p:sp>
-      <p:sp>
-        <p:nvSpPr>
-          <p:cNvPr id="12" name="Rectangle 11"/>
-          <p:cNvSpPr/>
-          <p:nvPr/>
-        </p:nvSpPr>
-        <p:spPr>
-          <a:xfrm>
-            <a:off x="822960" y="4160520"/>
-            <a:ext cx="91440" cy="868680"/>
-          </a:xfrm>
-          <a:prstGeom prst="rect">
-            <a:avLst/>
-          </a:prstGeom>
-          <a:solidFill>
-            <a:srgbClr val="F9B700"/>
-          </a:solidFill>
-          <a:ln>
-            <a:noFill/>
-          </a:ln>
-        </p:spPr>
-        <p:style>
-          <a:lnRef idx="1">
-            <a:schemeClr val="accent1"/>
-          </a:lnRef>
-          <a:fillRef idx="3">
-            <a:schemeClr val="accent1"/>
-          </a:fillRef>
-          <a:effectRef idx="2">
-            <a:schemeClr val="accent1"/>
-          </a:effectRef>
-          <a:fontRef idx="minor">
-            <a:schemeClr val="lt1"/>
-          </a:fontRef>
-        </p:style>
-        <p:txBody>
-          <a:bodyPr rtlCol="0" anchor="ctr"/>
-          <a:lstStyle/>
-          <a:p>
-            <a:pPr algn="ctr"/>
-          </a:p>
-        </p:txBody>
-      </p:sp>
-      <p:sp>
-        <p:nvSpPr>
-          <p:cNvPr id="13" name="TextBox 12"/>
-          <p:cNvSpPr txBox="1"/>
-          <p:nvPr/>
-        </p:nvSpPr>
-        <p:spPr>
-          <a:xfrm>
-            <a:off x="1005840" y="4270248"/>
-            <a:ext cx="10104120" cy="704088"/>
-          </a:xfrm>
-          <a:prstGeom prst="rect">
-            <a:avLst/>
-          </a:prstGeom>
-          <a:noFill/>
-        </p:spPr>
-        <p:txBody>
-          <a:bodyPr wrap="square" lIns="0" rIns="0">
-            <a:spAutoFit/>
-          </a:bodyPr>
-          <a:lstStyle/>
-          <a:p>
-            <a:pPr>
-              <a:defRPr b="1" sz="1500">
-                <a:solidFill>
-                  <a:srgbClr val="1E2761"/>
-                </a:solidFill>
-                <a:latin typeface="Aptos Display"/>
-              </a:defRPr>
-            </a:pPr>
-            <a:r>
-              <a:t>Lab connection</a:t>
-            </a:r>
-          </a:p>
-          <a:p>
-            <a:pPr>
-              <a:spcBef>
-                <a:spcPts val="400"/>
-              </a:spcBef>
-              <a:defRPr sz="1050">
-                <a:solidFill>
-                  <a:srgbClr val="242424"/>
-                </a:solidFill>
-                <a:latin typeface="Aptos"/>
-              </a:defRPr>
-            </a:pPr>
-            <a:r>
-              <a:t>Coverage: Covered. Use the lab README to demonstrate or discuss this topic. Review terms: exploration, guided.</a:t>
+              <a:t>In the lab, you will apply this pattern, validate the expected behavior, and discuss where it fits in a real Power BI solution.</a:t>
             </a:r>
           </a:p>
         </p:txBody>
@@ -12503,42 +11955,6 @@
       </p:sp>
       <p:sp>
         <p:nvSpPr>
-          <p:cNvPr id="4" name="TextBox 3"/>
-          <p:cNvSpPr txBox="1"/>
-          <p:nvPr/>
-        </p:nvSpPr>
-        <p:spPr>
-          <a:xfrm>
-            <a:off x="530352" y="914400"/>
-            <a:ext cx="10515600" cy="320040"/>
-          </a:xfrm>
-          <a:prstGeom prst="rect">
-            <a:avLst/>
-          </a:prstGeom>
-          <a:noFill/>
-        </p:spPr>
-        <p:txBody>
-          <a:bodyPr wrap="none">
-            <a:spAutoFit/>
-          </a:bodyPr>
-          <a:lstStyle/>
-          <a:p>
-            <a:pPr>
-              <a:defRPr sz="1200">
-                <a:solidFill>
-                  <a:srgbClr val="5C5C5C"/>
-                </a:solidFill>
-                <a:latin typeface="Aptos"/>
-              </a:defRPr>
-            </a:pPr>
-            <a:r>
-              <a:t>Talking points, learner value, and lab connection</a:t>
-            </a:r>
-          </a:p>
-        </p:txBody>
-      </p:sp>
-      <p:sp>
-        <p:nvSpPr>
           <p:cNvPr id="5" name="Rounded Rectangle 4"/>
           <p:cNvSpPr/>
           <p:nvPr/>
@@ -12656,7 +12072,139 @@
               </a:defRPr>
             </a:pPr>
             <a:r>
-              <a:t>Talking points</a:t>
+              <a:t>Key ideas</a:t>
+            </a:r>
+            <a:br/>
+            <a:r>
+              <a:t>• Time-series requirements</a:t>
+            </a:r>
+            <a:br/>
+            <a:r>
+              <a:t>• Confidence intervals</a:t>
+            </a:r>
+          </a:p>
+        </p:txBody>
+      </p:sp>
+      <p:sp>
+        <p:nvSpPr>
+          <p:cNvPr id="8" name="Rounded Rectangle 7"/>
+          <p:cNvSpPr/>
+          <p:nvPr/>
+        </p:nvSpPr>
+        <p:spPr>
+          <a:xfrm>
+            <a:off x="6263640" y="1234440"/>
+            <a:ext cx="5303520" cy="1828800"/>
+          </a:xfrm>
+          <a:prstGeom prst="roundRect">
+            <a:avLst/>
+          </a:prstGeom>
+          <a:solidFill>
+            <a:srgbClr val="FFFFFF"/>
+          </a:solidFill>
+          <a:ln>
+            <a:solidFill>
+              <a:srgbClr val="DCDCDC"/>
+            </a:solidFill>
+          </a:ln>
+        </p:spPr>
+        <p:style>
+          <a:lnRef idx="1">
+            <a:schemeClr val="accent1"/>
+          </a:lnRef>
+          <a:fillRef idx="3">
+            <a:schemeClr val="accent1"/>
+          </a:fillRef>
+          <a:effectRef idx="2">
+            <a:schemeClr val="accent1"/>
+          </a:effectRef>
+          <a:fontRef idx="minor">
+            <a:schemeClr val="lt1"/>
+          </a:fontRef>
+        </p:style>
+        <p:txBody>
+          <a:bodyPr rtlCol="0" anchor="ctr"/>
+          <a:lstStyle/>
+          <a:p>
+            <a:pPr algn="ctr"/>
+          </a:p>
+        </p:txBody>
+      </p:sp>
+      <p:sp>
+        <p:nvSpPr>
+          <p:cNvPr id="9" name="Rectangle 8"/>
+          <p:cNvSpPr/>
+          <p:nvPr/>
+        </p:nvSpPr>
+        <p:spPr>
+          <a:xfrm>
+            <a:off x="6263640" y="1234440"/>
+            <a:ext cx="91440" cy="1828800"/>
+          </a:xfrm>
+          <a:prstGeom prst="rect">
+            <a:avLst/>
+          </a:prstGeom>
+          <a:solidFill>
+            <a:srgbClr val="02C39A"/>
+          </a:solidFill>
+          <a:ln>
+            <a:noFill/>
+          </a:ln>
+        </p:spPr>
+        <p:style>
+          <a:lnRef idx="1">
+            <a:schemeClr val="accent1"/>
+          </a:lnRef>
+          <a:fillRef idx="3">
+            <a:schemeClr val="accent1"/>
+          </a:fillRef>
+          <a:effectRef idx="2">
+            <a:schemeClr val="accent1"/>
+          </a:effectRef>
+          <a:fontRef idx="minor">
+            <a:schemeClr val="lt1"/>
+          </a:fontRef>
+        </p:style>
+        <p:txBody>
+          <a:bodyPr rtlCol="0" anchor="ctr"/>
+          <a:lstStyle/>
+          <a:p>
+            <a:pPr algn="ctr"/>
+          </a:p>
+        </p:txBody>
+      </p:sp>
+      <p:sp>
+        <p:nvSpPr>
+          <p:cNvPr id="10" name="TextBox 9"/>
+          <p:cNvSpPr txBox="1"/>
+          <p:nvPr/>
+        </p:nvSpPr>
+        <p:spPr>
+          <a:xfrm>
+            <a:off x="6446520" y="1344168"/>
+            <a:ext cx="4983480" cy="1664208"/>
+          </a:xfrm>
+          <a:prstGeom prst="rect">
+            <a:avLst/>
+          </a:prstGeom>
+          <a:noFill/>
+        </p:spPr>
+        <p:txBody>
+          <a:bodyPr wrap="square" lIns="0" rIns="0">
+            <a:spAutoFit/>
+          </a:bodyPr>
+          <a:lstStyle/>
+          <a:p>
+            <a:pPr>
+              <a:defRPr b="1" sz="1500">
+                <a:solidFill>
+                  <a:srgbClr val="1E2761"/>
+                </a:solidFill>
+                <a:latin typeface="Aptos Display"/>
+              </a:defRPr>
+            </a:pPr>
+            <a:r>
+              <a:t>Why it helps</a:t>
             </a:r>
           </a:p>
           <a:p>
@@ -12672,25 +12220,25 @@
               </a:defRPr>
             </a:pPr>
             <a:r>
-              <a:t>• Time-series requirements</a:t>
+              <a:t>• Seasonality considerations</a:t>
             </a:r>
             <a:br/>
             <a:r>
-              <a:t>• Confidence intervals</a:t>
-            </a:r>
-          </a:p>
-        </p:txBody>
-      </p:sp>
-      <p:sp>
-        <p:nvSpPr>
-          <p:cNvPr id="8" name="Rounded Rectangle 7"/>
+              <a:t>• Validation and interpretation</a:t>
+            </a:r>
+          </a:p>
+        </p:txBody>
+      </p:sp>
+      <p:sp>
+        <p:nvSpPr>
+          <p:cNvPr id="11" name="Rounded Rectangle 10"/>
           <p:cNvSpPr/>
           <p:nvPr/>
         </p:nvSpPr>
         <p:spPr>
           <a:xfrm>
-            <a:off x="6263640" y="1234440"/>
-            <a:ext cx="5303520" cy="1828800"/>
+            <a:off x="822960" y="4160520"/>
+            <a:ext cx="10424160" cy="868680"/>
           </a:xfrm>
           <a:prstGeom prst="roundRect">
             <a:avLst/>
@@ -12728,20 +12276,20 @@
       </p:sp>
       <p:sp>
         <p:nvSpPr>
-          <p:cNvPr id="9" name="Rectangle 8"/>
+          <p:cNvPr id="12" name="Rectangle 11"/>
           <p:cNvSpPr/>
           <p:nvPr/>
         </p:nvSpPr>
         <p:spPr>
           <a:xfrm>
-            <a:off x="6263640" y="1234440"/>
-            <a:ext cx="91440" cy="1828800"/>
+            <a:off x="822960" y="4160520"/>
+            <a:ext cx="91440" cy="868680"/>
           </a:xfrm>
           <a:prstGeom prst="rect">
             <a:avLst/>
           </a:prstGeom>
           <a:solidFill>
-            <a:srgbClr val="02C39A"/>
+            <a:srgbClr val="F9B700"/>
           </a:solidFill>
           <a:ln>
             <a:noFill/>
@@ -12771,14 +12319,14 @@
       </p:sp>
       <p:sp>
         <p:nvSpPr>
-          <p:cNvPr id="10" name="TextBox 9"/>
+          <p:cNvPr id="13" name="TextBox 12"/>
           <p:cNvSpPr txBox="1"/>
           <p:nvPr/>
         </p:nvSpPr>
         <p:spPr>
           <a:xfrm>
-            <a:off x="6446520" y="1344168"/>
-            <a:ext cx="4983480" cy="1664208"/>
+            <a:off x="1005840" y="4270248"/>
+            <a:ext cx="10104120" cy="704088"/>
           </a:xfrm>
           <a:prstGeom prst="rect">
             <a:avLst/>
@@ -12800,167 +12348,7 @@
               </a:defRPr>
             </a:pPr>
             <a:r>
-              <a:t>Why it helps</a:t>
-            </a:r>
-          </a:p>
-          <a:p>
-            <a:pPr>
-              <a:spcBef>
-                <a:spcPts val="400"/>
-              </a:spcBef>
-              <a:defRPr sz="1050">
-                <a:solidFill>
-                  <a:srgbClr val="242424"/>
-                </a:solidFill>
-                <a:latin typeface="Aptos"/>
-              </a:defRPr>
-            </a:pPr>
-            <a:r>
-              <a:t>• Seasonality considerations</a:t>
-            </a:r>
-            <a:br/>
-            <a:r>
-              <a:t>• Validation and interpretation</a:t>
-            </a:r>
-          </a:p>
-        </p:txBody>
-      </p:sp>
-      <p:sp>
-        <p:nvSpPr>
-          <p:cNvPr id="11" name="Rounded Rectangle 10"/>
-          <p:cNvSpPr/>
-          <p:nvPr/>
-        </p:nvSpPr>
-        <p:spPr>
-          <a:xfrm>
-            <a:off x="822960" y="4160520"/>
-            <a:ext cx="10424160" cy="868680"/>
-          </a:xfrm>
-          <a:prstGeom prst="roundRect">
-            <a:avLst/>
-          </a:prstGeom>
-          <a:solidFill>
-            <a:srgbClr val="FFFFFF"/>
-          </a:solidFill>
-          <a:ln>
-            <a:solidFill>
-              <a:srgbClr val="DCDCDC"/>
-            </a:solidFill>
-          </a:ln>
-        </p:spPr>
-        <p:style>
-          <a:lnRef idx="1">
-            <a:schemeClr val="accent1"/>
-          </a:lnRef>
-          <a:fillRef idx="3">
-            <a:schemeClr val="accent1"/>
-          </a:fillRef>
-          <a:effectRef idx="2">
-            <a:schemeClr val="accent1"/>
-          </a:effectRef>
-          <a:fontRef idx="minor">
-            <a:schemeClr val="lt1"/>
-          </a:fontRef>
-        </p:style>
-        <p:txBody>
-          <a:bodyPr rtlCol="0" anchor="ctr"/>
-          <a:lstStyle/>
-          <a:p>
-            <a:pPr algn="ctr"/>
-          </a:p>
-        </p:txBody>
-      </p:sp>
-      <p:sp>
-        <p:nvSpPr>
-          <p:cNvPr id="12" name="Rectangle 11"/>
-          <p:cNvSpPr/>
-          <p:nvPr/>
-        </p:nvSpPr>
-        <p:spPr>
-          <a:xfrm>
-            <a:off x="822960" y="4160520"/>
-            <a:ext cx="91440" cy="868680"/>
-          </a:xfrm>
-          <a:prstGeom prst="rect">
-            <a:avLst/>
-          </a:prstGeom>
-          <a:solidFill>
-            <a:srgbClr val="F9B700"/>
-          </a:solidFill>
-          <a:ln>
-            <a:noFill/>
-          </a:ln>
-        </p:spPr>
-        <p:style>
-          <a:lnRef idx="1">
-            <a:schemeClr val="accent1"/>
-          </a:lnRef>
-          <a:fillRef idx="3">
-            <a:schemeClr val="accent1"/>
-          </a:fillRef>
-          <a:effectRef idx="2">
-            <a:schemeClr val="accent1"/>
-          </a:effectRef>
-          <a:fontRef idx="minor">
-            <a:schemeClr val="lt1"/>
-          </a:fontRef>
-        </p:style>
-        <p:txBody>
-          <a:bodyPr rtlCol="0" anchor="ctr"/>
-          <a:lstStyle/>
-          <a:p>
-            <a:pPr algn="ctr"/>
-          </a:p>
-        </p:txBody>
-      </p:sp>
-      <p:sp>
-        <p:nvSpPr>
-          <p:cNvPr id="13" name="TextBox 12"/>
-          <p:cNvSpPr txBox="1"/>
-          <p:nvPr/>
-        </p:nvSpPr>
-        <p:spPr>
-          <a:xfrm>
-            <a:off x="1005840" y="4270248"/>
-            <a:ext cx="10104120" cy="704088"/>
-          </a:xfrm>
-          <a:prstGeom prst="rect">
-            <a:avLst/>
-          </a:prstGeom>
-          <a:noFill/>
-        </p:spPr>
-        <p:txBody>
-          <a:bodyPr wrap="square" lIns="0" rIns="0">
-            <a:spAutoFit/>
-          </a:bodyPr>
-          <a:lstStyle/>
-          <a:p>
-            <a:pPr>
-              <a:defRPr b="1" sz="1500">
-                <a:solidFill>
-                  <a:srgbClr val="1E2761"/>
-                </a:solidFill>
-                <a:latin typeface="Aptos Display"/>
-              </a:defRPr>
-            </a:pPr>
-            <a:r>
-              <a:t>Lab connection</a:t>
-            </a:r>
-          </a:p>
-          <a:p>
-            <a:pPr>
-              <a:spcBef>
-                <a:spcPts val="400"/>
-              </a:spcBef>
-              <a:defRPr sz="1050">
-                <a:solidFill>
-                  <a:srgbClr val="242424"/>
-                </a:solidFill>
-                <a:latin typeface="Aptos"/>
-              </a:defRPr>
-            </a:pPr>
-            <a:r>
-              <a:t>Coverage: Covered. Use the lab README to demonstrate or discuss this topic. Review terms: considerations, seasonality, series.</a:t>
+              <a:t>In the lab, you will apply this pattern, validate the expected behavior, and discuss where it fits in a real Power BI solution.</a:t>
             </a:r>
           </a:p>
         </p:txBody>
@@ -13099,42 +12487,6 @@
       </p:sp>
       <p:sp>
         <p:nvSpPr>
-          <p:cNvPr id="4" name="TextBox 3"/>
-          <p:cNvSpPr txBox="1"/>
-          <p:nvPr/>
-        </p:nvSpPr>
-        <p:spPr>
-          <a:xfrm>
-            <a:off x="530352" y="914400"/>
-            <a:ext cx="10515600" cy="320040"/>
-          </a:xfrm>
-          <a:prstGeom prst="rect">
-            <a:avLst/>
-          </a:prstGeom>
-          <a:noFill/>
-        </p:spPr>
-        <p:txBody>
-          <a:bodyPr wrap="none">
-            <a:spAutoFit/>
-          </a:bodyPr>
-          <a:lstStyle/>
-          <a:p>
-            <a:pPr>
-              <a:defRPr sz="1200">
-                <a:solidFill>
-                  <a:srgbClr val="5C5C5C"/>
-                </a:solidFill>
-                <a:latin typeface="Aptos"/>
-              </a:defRPr>
-            </a:pPr>
-            <a:r>
-              <a:t>Talking points, learner value, and lab connection</a:t>
-            </a:r>
-          </a:p>
-        </p:txBody>
-      </p:sp>
-      <p:sp>
-        <p:nvSpPr>
           <p:cNvPr id="5" name="Rounded Rectangle 4"/>
           <p:cNvSpPr/>
           <p:nvPr/>
@@ -13252,7 +12604,139 @@
               </a:defRPr>
             </a:pPr>
             <a:r>
-              <a:t>Talking points</a:t>
+              <a:t>Key ideas</a:t>
+            </a:r>
+            <a:br/>
+            <a:r>
+              <a:t>• Unusual trend identification</a:t>
+            </a:r>
+            <a:br/>
+            <a:r>
+              <a:t>• Interpretation limits</a:t>
+            </a:r>
+          </a:p>
+        </p:txBody>
+      </p:sp>
+      <p:sp>
+        <p:nvSpPr>
+          <p:cNvPr id="8" name="Rounded Rectangle 7"/>
+          <p:cNvSpPr/>
+          <p:nvPr/>
+        </p:nvSpPr>
+        <p:spPr>
+          <a:xfrm>
+            <a:off x="6263640" y="1234440"/>
+            <a:ext cx="5303520" cy="1828800"/>
+          </a:xfrm>
+          <a:prstGeom prst="roundRect">
+            <a:avLst/>
+          </a:prstGeom>
+          <a:solidFill>
+            <a:srgbClr val="FFFFFF"/>
+          </a:solidFill>
+          <a:ln>
+            <a:solidFill>
+              <a:srgbClr val="DCDCDC"/>
+            </a:solidFill>
+          </a:ln>
+        </p:spPr>
+        <p:style>
+          <a:lnRef idx="1">
+            <a:schemeClr val="accent1"/>
+          </a:lnRef>
+          <a:fillRef idx="3">
+            <a:schemeClr val="accent1"/>
+          </a:fillRef>
+          <a:effectRef idx="2">
+            <a:schemeClr val="accent1"/>
+          </a:effectRef>
+          <a:fontRef idx="minor">
+            <a:schemeClr val="lt1"/>
+          </a:fontRef>
+        </p:style>
+        <p:txBody>
+          <a:bodyPr rtlCol="0" anchor="ctr"/>
+          <a:lstStyle/>
+          <a:p>
+            <a:pPr algn="ctr"/>
+          </a:p>
+        </p:txBody>
+      </p:sp>
+      <p:sp>
+        <p:nvSpPr>
+          <p:cNvPr id="9" name="Rectangle 8"/>
+          <p:cNvSpPr/>
+          <p:nvPr/>
+        </p:nvSpPr>
+        <p:spPr>
+          <a:xfrm>
+            <a:off x="6263640" y="1234440"/>
+            <a:ext cx="91440" cy="1828800"/>
+          </a:xfrm>
+          <a:prstGeom prst="rect">
+            <a:avLst/>
+          </a:prstGeom>
+          <a:solidFill>
+            <a:srgbClr val="02C39A"/>
+          </a:solidFill>
+          <a:ln>
+            <a:noFill/>
+          </a:ln>
+        </p:spPr>
+        <p:style>
+          <a:lnRef idx="1">
+            <a:schemeClr val="accent1"/>
+          </a:lnRef>
+          <a:fillRef idx="3">
+            <a:schemeClr val="accent1"/>
+          </a:fillRef>
+          <a:effectRef idx="2">
+            <a:schemeClr val="accent1"/>
+          </a:effectRef>
+          <a:fontRef idx="minor">
+            <a:schemeClr val="lt1"/>
+          </a:fontRef>
+        </p:style>
+        <p:txBody>
+          <a:bodyPr rtlCol="0" anchor="ctr"/>
+          <a:lstStyle/>
+          <a:p>
+            <a:pPr algn="ctr"/>
+          </a:p>
+        </p:txBody>
+      </p:sp>
+      <p:sp>
+        <p:nvSpPr>
+          <p:cNvPr id="10" name="TextBox 9"/>
+          <p:cNvSpPr txBox="1"/>
+          <p:nvPr/>
+        </p:nvSpPr>
+        <p:spPr>
+          <a:xfrm>
+            <a:off x="6446520" y="1344168"/>
+            <a:ext cx="4983480" cy="1664208"/>
+          </a:xfrm>
+          <a:prstGeom prst="rect">
+            <a:avLst/>
+          </a:prstGeom>
+          <a:noFill/>
+        </p:spPr>
+        <p:txBody>
+          <a:bodyPr wrap="square" lIns="0" rIns="0">
+            <a:spAutoFit/>
+          </a:bodyPr>
+          <a:lstStyle/>
+          <a:p>
+            <a:pPr>
+              <a:defRPr b="1" sz="1500">
+                <a:solidFill>
+                  <a:srgbClr val="1E2761"/>
+                </a:solidFill>
+                <a:latin typeface="Aptos Display"/>
+              </a:defRPr>
+            </a:pPr>
+            <a:r>
+              <a:t>Why it helps</a:t>
             </a:r>
           </a:p>
           <a:p>
@@ -13268,25 +12752,25 @@
               </a:defRPr>
             </a:pPr>
             <a:r>
-              <a:t>• Unusual trend identification</a:t>
+              <a:t>• Data quality considerations</a:t>
             </a:r>
             <a:br/>
             <a:r>
-              <a:t>• Interpretation limits</a:t>
-            </a:r>
-          </a:p>
-        </p:txBody>
-      </p:sp>
-      <p:sp>
-        <p:nvSpPr>
-          <p:cNvPr id="8" name="Rounded Rectangle 7"/>
+              <a:t>• Availability validation</a:t>
+            </a:r>
+          </a:p>
+        </p:txBody>
+      </p:sp>
+      <p:sp>
+        <p:nvSpPr>
+          <p:cNvPr id="11" name="Rounded Rectangle 10"/>
           <p:cNvSpPr/>
           <p:nvPr/>
         </p:nvSpPr>
         <p:spPr>
           <a:xfrm>
-            <a:off x="6263640" y="1234440"/>
-            <a:ext cx="5303520" cy="1828800"/>
+            <a:off x="822960" y="4160520"/>
+            <a:ext cx="10424160" cy="868680"/>
           </a:xfrm>
           <a:prstGeom prst="roundRect">
             <a:avLst/>
@@ -13324,20 +12808,20 @@
       </p:sp>
       <p:sp>
         <p:nvSpPr>
-          <p:cNvPr id="9" name="Rectangle 8"/>
+          <p:cNvPr id="12" name="Rectangle 11"/>
           <p:cNvSpPr/>
           <p:nvPr/>
         </p:nvSpPr>
         <p:spPr>
           <a:xfrm>
-            <a:off x="6263640" y="1234440"/>
-            <a:ext cx="91440" cy="1828800"/>
+            <a:off x="822960" y="4160520"/>
+            <a:ext cx="91440" cy="868680"/>
           </a:xfrm>
           <a:prstGeom prst="rect">
             <a:avLst/>
           </a:prstGeom>
           <a:solidFill>
-            <a:srgbClr val="02C39A"/>
+            <a:srgbClr val="F9B700"/>
           </a:solidFill>
           <a:ln>
             <a:noFill/>
@@ -13367,14 +12851,14 @@
       </p:sp>
       <p:sp>
         <p:nvSpPr>
-          <p:cNvPr id="10" name="TextBox 9"/>
+          <p:cNvPr id="13" name="TextBox 12"/>
           <p:cNvSpPr txBox="1"/>
           <p:nvPr/>
         </p:nvSpPr>
         <p:spPr>
           <a:xfrm>
-            <a:off x="6446520" y="1344168"/>
-            <a:ext cx="4983480" cy="1664208"/>
+            <a:off x="1005840" y="4270248"/>
+            <a:ext cx="10104120" cy="704088"/>
           </a:xfrm>
           <a:prstGeom prst="rect">
             <a:avLst/>
@@ -13396,167 +12880,7 @@
               </a:defRPr>
             </a:pPr>
             <a:r>
-              <a:t>Why it helps</a:t>
-            </a:r>
-          </a:p>
-          <a:p>
-            <a:pPr>
-              <a:spcBef>
-                <a:spcPts val="400"/>
-              </a:spcBef>
-              <a:defRPr sz="1050">
-                <a:solidFill>
-                  <a:srgbClr val="242424"/>
-                </a:solidFill>
-                <a:latin typeface="Aptos"/>
-              </a:defRPr>
-            </a:pPr>
-            <a:r>
-              <a:t>• Data quality considerations</a:t>
-            </a:r>
-            <a:br/>
-            <a:r>
-              <a:t>• Availability validation</a:t>
-            </a:r>
-          </a:p>
-        </p:txBody>
-      </p:sp>
-      <p:sp>
-        <p:nvSpPr>
-          <p:cNvPr id="11" name="Rounded Rectangle 10"/>
-          <p:cNvSpPr/>
-          <p:nvPr/>
-        </p:nvSpPr>
-        <p:spPr>
-          <a:xfrm>
-            <a:off x="822960" y="4160520"/>
-            <a:ext cx="10424160" cy="868680"/>
-          </a:xfrm>
-          <a:prstGeom prst="roundRect">
-            <a:avLst/>
-          </a:prstGeom>
-          <a:solidFill>
-            <a:srgbClr val="FFFFFF"/>
-          </a:solidFill>
-          <a:ln>
-            <a:solidFill>
-              <a:srgbClr val="DCDCDC"/>
-            </a:solidFill>
-          </a:ln>
-        </p:spPr>
-        <p:style>
-          <a:lnRef idx="1">
-            <a:schemeClr val="accent1"/>
-          </a:lnRef>
-          <a:fillRef idx="3">
-            <a:schemeClr val="accent1"/>
-          </a:fillRef>
-          <a:effectRef idx="2">
-            <a:schemeClr val="accent1"/>
-          </a:effectRef>
-          <a:fontRef idx="minor">
-            <a:schemeClr val="lt1"/>
-          </a:fontRef>
-        </p:style>
-        <p:txBody>
-          <a:bodyPr rtlCol="0" anchor="ctr"/>
-          <a:lstStyle/>
-          <a:p>
-            <a:pPr algn="ctr"/>
-          </a:p>
-        </p:txBody>
-      </p:sp>
-      <p:sp>
-        <p:nvSpPr>
-          <p:cNvPr id="12" name="Rectangle 11"/>
-          <p:cNvSpPr/>
-          <p:nvPr/>
-        </p:nvSpPr>
-        <p:spPr>
-          <a:xfrm>
-            <a:off x="822960" y="4160520"/>
-            <a:ext cx="91440" cy="868680"/>
-          </a:xfrm>
-          <a:prstGeom prst="rect">
-            <a:avLst/>
-          </a:prstGeom>
-          <a:solidFill>
-            <a:srgbClr val="F9B700"/>
-          </a:solidFill>
-          <a:ln>
-            <a:noFill/>
-          </a:ln>
-        </p:spPr>
-        <p:style>
-          <a:lnRef idx="1">
-            <a:schemeClr val="accent1"/>
-          </a:lnRef>
-          <a:fillRef idx="3">
-            <a:schemeClr val="accent1"/>
-          </a:fillRef>
-          <a:effectRef idx="2">
-            <a:schemeClr val="accent1"/>
-          </a:effectRef>
-          <a:fontRef idx="minor">
-            <a:schemeClr val="lt1"/>
-          </a:fontRef>
-        </p:style>
-        <p:txBody>
-          <a:bodyPr rtlCol="0" anchor="ctr"/>
-          <a:lstStyle/>
-          <a:p>
-            <a:pPr algn="ctr"/>
-          </a:p>
-        </p:txBody>
-      </p:sp>
-      <p:sp>
-        <p:nvSpPr>
-          <p:cNvPr id="13" name="TextBox 12"/>
-          <p:cNvSpPr txBox="1"/>
-          <p:nvPr/>
-        </p:nvSpPr>
-        <p:spPr>
-          <a:xfrm>
-            <a:off x="1005840" y="4270248"/>
-            <a:ext cx="10104120" cy="704088"/>
-          </a:xfrm>
-          <a:prstGeom prst="rect">
-            <a:avLst/>
-          </a:prstGeom>
-          <a:noFill/>
-        </p:spPr>
-        <p:txBody>
-          <a:bodyPr wrap="square" lIns="0" rIns="0">
-            <a:spAutoFit/>
-          </a:bodyPr>
-          <a:lstStyle/>
-          <a:p>
-            <a:pPr>
-              <a:defRPr b="1" sz="1500">
-                <a:solidFill>
-                  <a:srgbClr val="1E2761"/>
-                </a:solidFill>
-                <a:latin typeface="Aptos Display"/>
-              </a:defRPr>
-            </a:pPr>
-            <a:r>
-              <a:t>Lab connection</a:t>
-            </a:r>
-          </a:p>
-          <a:p>
-            <a:pPr>
-              <a:spcBef>
-                <a:spcPts val="400"/>
-              </a:spcBef>
-              <a:defRPr sz="1050">
-                <a:solidFill>
-                  <a:srgbClr val="242424"/>
-                </a:solidFill>
-                <a:latin typeface="Aptos"/>
-              </a:defRPr>
-            </a:pPr>
-            <a:r>
-              <a:t>Coverage: Covered. Use the lab README to demonstrate or discuss this topic. Review terms: considerations, identification, quality, unusual.</a:t>
+              <a:t>In the lab, you will apply this pattern, validate the expected behavior, and discuss where it fits in a real Power BI solution.</a:t>
             </a:r>
           </a:p>
         </p:txBody>
@@ -13695,42 +13019,6 @@
       </p:sp>
       <p:sp>
         <p:nvSpPr>
-          <p:cNvPr id="4" name="TextBox 3"/>
-          <p:cNvSpPr txBox="1"/>
-          <p:nvPr/>
-        </p:nvSpPr>
-        <p:spPr>
-          <a:xfrm>
-            <a:off x="530352" y="914400"/>
-            <a:ext cx="10515600" cy="320040"/>
-          </a:xfrm>
-          <a:prstGeom prst="rect">
-            <a:avLst/>
-          </a:prstGeom>
-          <a:noFill/>
-        </p:spPr>
-        <p:txBody>
-          <a:bodyPr wrap="none">
-            <a:spAutoFit/>
-          </a:bodyPr>
-          <a:lstStyle/>
-          <a:p>
-            <a:pPr>
-              <a:defRPr sz="1200">
-                <a:solidFill>
-                  <a:srgbClr val="5C5C5C"/>
-                </a:solidFill>
-                <a:latin typeface="Aptos"/>
-              </a:defRPr>
-            </a:pPr>
-            <a:r>
-              <a:t>Talking points, learner value, and lab connection</a:t>
-            </a:r>
-          </a:p>
-        </p:txBody>
-      </p:sp>
-      <p:sp>
-        <p:nvSpPr>
           <p:cNvPr id="5" name="Rounded Rectangle 4"/>
           <p:cNvSpPr/>
           <p:nvPr/>
@@ -13848,7 +13136,139 @@
               </a:defRPr>
             </a:pPr>
             <a:r>
-              <a:t>Talking points</a:t>
+              <a:t>Key ideas</a:t>
+            </a:r>
+            <a:br/>
+            <a:r>
+              <a:t>• Influencer analysis</a:t>
+            </a:r>
+            <a:br/>
+            <a:r>
+              <a:t>• Categorical and numeric outcomes</a:t>
+            </a:r>
+          </a:p>
+        </p:txBody>
+      </p:sp>
+      <p:sp>
+        <p:nvSpPr>
+          <p:cNvPr id="8" name="Rounded Rectangle 7"/>
+          <p:cNvSpPr/>
+          <p:nvPr/>
+        </p:nvSpPr>
+        <p:spPr>
+          <a:xfrm>
+            <a:off x="6263640" y="1234440"/>
+            <a:ext cx="5303520" cy="1828800"/>
+          </a:xfrm>
+          <a:prstGeom prst="roundRect">
+            <a:avLst/>
+          </a:prstGeom>
+          <a:solidFill>
+            <a:srgbClr val="FFFFFF"/>
+          </a:solidFill>
+          <a:ln>
+            <a:solidFill>
+              <a:srgbClr val="DCDCDC"/>
+            </a:solidFill>
+          </a:ln>
+        </p:spPr>
+        <p:style>
+          <a:lnRef idx="1">
+            <a:schemeClr val="accent1"/>
+          </a:lnRef>
+          <a:fillRef idx="3">
+            <a:schemeClr val="accent1"/>
+          </a:fillRef>
+          <a:effectRef idx="2">
+            <a:schemeClr val="accent1"/>
+          </a:effectRef>
+          <a:fontRef idx="minor">
+            <a:schemeClr val="lt1"/>
+          </a:fontRef>
+        </p:style>
+        <p:txBody>
+          <a:bodyPr rtlCol="0" anchor="ctr"/>
+          <a:lstStyle/>
+          <a:p>
+            <a:pPr algn="ctr"/>
+          </a:p>
+        </p:txBody>
+      </p:sp>
+      <p:sp>
+        <p:nvSpPr>
+          <p:cNvPr id="9" name="Rectangle 8"/>
+          <p:cNvSpPr/>
+          <p:nvPr/>
+        </p:nvSpPr>
+        <p:spPr>
+          <a:xfrm>
+            <a:off x="6263640" y="1234440"/>
+            <a:ext cx="91440" cy="1828800"/>
+          </a:xfrm>
+          <a:prstGeom prst="rect">
+            <a:avLst/>
+          </a:prstGeom>
+          <a:solidFill>
+            <a:srgbClr val="02C39A"/>
+          </a:solidFill>
+          <a:ln>
+            <a:noFill/>
+          </a:ln>
+        </p:spPr>
+        <p:style>
+          <a:lnRef idx="1">
+            <a:schemeClr val="accent1"/>
+          </a:lnRef>
+          <a:fillRef idx="3">
+            <a:schemeClr val="accent1"/>
+          </a:fillRef>
+          <a:effectRef idx="2">
+            <a:schemeClr val="accent1"/>
+          </a:effectRef>
+          <a:fontRef idx="minor">
+            <a:schemeClr val="lt1"/>
+          </a:fontRef>
+        </p:style>
+        <p:txBody>
+          <a:bodyPr rtlCol="0" anchor="ctr"/>
+          <a:lstStyle/>
+          <a:p>
+            <a:pPr algn="ctr"/>
+          </a:p>
+        </p:txBody>
+      </p:sp>
+      <p:sp>
+        <p:nvSpPr>
+          <p:cNvPr id="10" name="TextBox 9"/>
+          <p:cNvSpPr txBox="1"/>
+          <p:nvPr/>
+        </p:nvSpPr>
+        <p:spPr>
+          <a:xfrm>
+            <a:off x="6446520" y="1344168"/>
+            <a:ext cx="4983480" cy="1664208"/>
+          </a:xfrm>
+          <a:prstGeom prst="rect">
+            <a:avLst/>
+          </a:prstGeom>
+          <a:noFill/>
+        </p:spPr>
+        <p:txBody>
+          <a:bodyPr wrap="square" lIns="0" rIns="0">
+            <a:spAutoFit/>
+          </a:bodyPr>
+          <a:lstStyle/>
+          <a:p>
+            <a:pPr>
+              <a:defRPr b="1" sz="1500">
+                <a:solidFill>
+                  <a:srgbClr val="1E2761"/>
+                </a:solidFill>
+                <a:latin typeface="Aptos Display"/>
+              </a:defRPr>
+            </a:pPr>
+            <a:r>
+              <a:t>Why it helps</a:t>
             </a:r>
           </a:p>
           <a:p>
@@ -13864,25 +13284,25 @@
               </a:defRPr>
             </a:pPr>
             <a:r>
-              <a:t>• Influencer analysis</a:t>
+              <a:t>• Explainability and limitations</a:t>
             </a:r>
             <a:br/>
             <a:r>
-              <a:t>• Categorical and numeric outcomes</a:t>
-            </a:r>
-          </a:p>
-        </p:txBody>
-      </p:sp>
-      <p:sp>
-        <p:nvSpPr>
-          <p:cNvPr id="8" name="Rounded Rectangle 7"/>
+              <a:t>• Availability validation</a:t>
+            </a:r>
+          </a:p>
+        </p:txBody>
+      </p:sp>
+      <p:sp>
+        <p:nvSpPr>
+          <p:cNvPr id="11" name="Rounded Rectangle 10"/>
           <p:cNvSpPr/>
           <p:nvPr/>
         </p:nvSpPr>
         <p:spPr>
           <a:xfrm>
-            <a:off x="6263640" y="1234440"/>
-            <a:ext cx="5303520" cy="1828800"/>
+            <a:off x="822960" y="4160520"/>
+            <a:ext cx="10424160" cy="868680"/>
           </a:xfrm>
           <a:prstGeom prst="roundRect">
             <a:avLst/>
@@ -13920,20 +13340,20 @@
       </p:sp>
       <p:sp>
         <p:nvSpPr>
-          <p:cNvPr id="9" name="Rectangle 8"/>
+          <p:cNvPr id="12" name="Rectangle 11"/>
           <p:cNvSpPr/>
           <p:nvPr/>
         </p:nvSpPr>
         <p:spPr>
           <a:xfrm>
-            <a:off x="6263640" y="1234440"/>
-            <a:ext cx="91440" cy="1828800"/>
+            <a:off x="822960" y="4160520"/>
+            <a:ext cx="91440" cy="868680"/>
           </a:xfrm>
           <a:prstGeom prst="rect">
             <a:avLst/>
           </a:prstGeom>
           <a:solidFill>
-            <a:srgbClr val="02C39A"/>
+            <a:srgbClr val="F9B700"/>
           </a:solidFill>
           <a:ln>
             <a:noFill/>
@@ -13963,14 +13383,14 @@
       </p:sp>
       <p:sp>
         <p:nvSpPr>
-          <p:cNvPr id="10" name="TextBox 9"/>
+          <p:cNvPr id="13" name="TextBox 12"/>
           <p:cNvSpPr txBox="1"/>
           <p:nvPr/>
         </p:nvSpPr>
         <p:spPr>
           <a:xfrm>
-            <a:off x="6446520" y="1344168"/>
-            <a:ext cx="4983480" cy="1664208"/>
+            <a:off x="1005840" y="4270248"/>
+            <a:ext cx="10104120" cy="704088"/>
           </a:xfrm>
           <a:prstGeom prst="rect">
             <a:avLst/>
@@ -13992,167 +13412,7 @@
               </a:defRPr>
             </a:pPr>
             <a:r>
-              <a:t>Why it helps</a:t>
-            </a:r>
-          </a:p>
-          <a:p>
-            <a:pPr>
-              <a:spcBef>
-                <a:spcPts val="400"/>
-              </a:spcBef>
-              <a:defRPr sz="1050">
-                <a:solidFill>
-                  <a:srgbClr val="242424"/>
-                </a:solidFill>
-                <a:latin typeface="Aptos"/>
-              </a:defRPr>
-            </a:pPr>
-            <a:r>
-              <a:t>• Explainability and limitations</a:t>
-            </a:r>
-            <a:br/>
-            <a:r>
-              <a:t>• Availability validation</a:t>
-            </a:r>
-          </a:p>
-        </p:txBody>
-      </p:sp>
-      <p:sp>
-        <p:nvSpPr>
-          <p:cNvPr id="11" name="Rounded Rectangle 10"/>
-          <p:cNvSpPr/>
-          <p:nvPr/>
-        </p:nvSpPr>
-        <p:spPr>
-          <a:xfrm>
-            <a:off x="822960" y="4160520"/>
-            <a:ext cx="10424160" cy="868680"/>
-          </a:xfrm>
-          <a:prstGeom prst="roundRect">
-            <a:avLst/>
-          </a:prstGeom>
-          <a:solidFill>
-            <a:srgbClr val="FFFFFF"/>
-          </a:solidFill>
-          <a:ln>
-            <a:solidFill>
-              <a:srgbClr val="DCDCDC"/>
-            </a:solidFill>
-          </a:ln>
-        </p:spPr>
-        <p:style>
-          <a:lnRef idx="1">
-            <a:schemeClr val="accent1"/>
-          </a:lnRef>
-          <a:fillRef idx="3">
-            <a:schemeClr val="accent1"/>
-          </a:fillRef>
-          <a:effectRef idx="2">
-            <a:schemeClr val="accent1"/>
-          </a:effectRef>
-          <a:fontRef idx="minor">
-            <a:schemeClr val="lt1"/>
-          </a:fontRef>
-        </p:style>
-        <p:txBody>
-          <a:bodyPr rtlCol="0" anchor="ctr"/>
-          <a:lstStyle/>
-          <a:p>
-            <a:pPr algn="ctr"/>
-          </a:p>
-        </p:txBody>
-      </p:sp>
-      <p:sp>
-        <p:nvSpPr>
-          <p:cNvPr id="12" name="Rectangle 11"/>
-          <p:cNvSpPr/>
-          <p:nvPr/>
-        </p:nvSpPr>
-        <p:spPr>
-          <a:xfrm>
-            <a:off x="822960" y="4160520"/>
-            <a:ext cx="91440" cy="868680"/>
-          </a:xfrm>
-          <a:prstGeom prst="rect">
-            <a:avLst/>
-          </a:prstGeom>
-          <a:solidFill>
-            <a:srgbClr val="F9B700"/>
-          </a:solidFill>
-          <a:ln>
-            <a:noFill/>
-          </a:ln>
-        </p:spPr>
-        <p:style>
-          <a:lnRef idx="1">
-            <a:schemeClr val="accent1"/>
-          </a:lnRef>
-          <a:fillRef idx="3">
-            <a:schemeClr val="accent1"/>
-          </a:fillRef>
-          <a:effectRef idx="2">
-            <a:schemeClr val="accent1"/>
-          </a:effectRef>
-          <a:fontRef idx="minor">
-            <a:schemeClr val="lt1"/>
-          </a:fontRef>
-        </p:style>
-        <p:txBody>
-          <a:bodyPr rtlCol="0" anchor="ctr"/>
-          <a:lstStyle/>
-          <a:p>
-            <a:pPr algn="ctr"/>
-          </a:p>
-        </p:txBody>
-      </p:sp>
-      <p:sp>
-        <p:nvSpPr>
-          <p:cNvPr id="13" name="TextBox 12"/>
-          <p:cNvSpPr txBox="1"/>
-          <p:nvPr/>
-        </p:nvSpPr>
-        <p:spPr>
-          <a:xfrm>
-            <a:off x="1005840" y="4270248"/>
-            <a:ext cx="10104120" cy="704088"/>
-          </a:xfrm>
-          <a:prstGeom prst="rect">
-            <a:avLst/>
-          </a:prstGeom>
-          <a:noFill/>
-        </p:spPr>
-        <p:txBody>
-          <a:bodyPr wrap="square" lIns="0" rIns="0">
-            <a:spAutoFit/>
-          </a:bodyPr>
-          <a:lstStyle/>
-          <a:p>
-            <a:pPr>
-              <a:defRPr b="1" sz="1500">
-                <a:solidFill>
-                  <a:srgbClr val="1E2761"/>
-                </a:solidFill>
-                <a:latin typeface="Aptos Display"/>
-              </a:defRPr>
-            </a:pPr>
-            <a:r>
-              <a:t>Lab connection</a:t>
-            </a:r>
-          </a:p>
-          <a:p>
-            <a:pPr>
-              <a:spcBef>
-                <a:spcPts val="400"/>
-              </a:spcBef>
-              <a:defRPr sz="1050">
-                <a:solidFill>
-                  <a:srgbClr val="242424"/>
-                </a:solidFill>
-                <a:latin typeface="Aptos"/>
-              </a:defRPr>
-            </a:pPr>
-            <a:r>
-              <a:t>Coverage: Covered. Use the lab README to demonstrate or discuss this topic. Review terms: categorical, explainability, outcomes.</a:t>
+              <a:t>In the lab, you will apply this pattern, validate the expected behavior, and discuss where it fits in a real Power BI solution.</a:t>
             </a:r>
           </a:p>
         </p:txBody>
@@ -14291,42 +13551,6 @@
       </p:sp>
       <p:sp>
         <p:nvSpPr>
-          <p:cNvPr id="4" name="TextBox 3"/>
-          <p:cNvSpPr txBox="1"/>
-          <p:nvPr/>
-        </p:nvSpPr>
-        <p:spPr>
-          <a:xfrm>
-            <a:off x="530352" y="914400"/>
-            <a:ext cx="10515600" cy="320040"/>
-          </a:xfrm>
-          <a:prstGeom prst="rect">
-            <a:avLst/>
-          </a:prstGeom>
-          <a:noFill/>
-        </p:spPr>
-        <p:txBody>
-          <a:bodyPr wrap="none">
-            <a:spAutoFit/>
-          </a:bodyPr>
-          <a:lstStyle/>
-          <a:p>
-            <a:pPr>
-              <a:defRPr sz="1200">
-                <a:solidFill>
-                  <a:srgbClr val="5C5C5C"/>
-                </a:solidFill>
-                <a:latin typeface="Aptos"/>
-              </a:defRPr>
-            </a:pPr>
-            <a:r>
-              <a:t>Talking points, learner value, and lab connection</a:t>
-            </a:r>
-          </a:p>
-        </p:txBody>
-      </p:sp>
-      <p:sp>
-        <p:nvSpPr>
           <p:cNvPr id="5" name="Rounded Rectangle 4"/>
           <p:cNvSpPr/>
           <p:nvPr/>
@@ -14444,7 +13668,139 @@
               </a:defRPr>
             </a:pPr>
             <a:r>
-              <a:t>Talking points</a:t>
+              <a:t>Key ideas</a:t>
+            </a:r>
+            <a:br/>
+            <a:r>
+              <a:t>• Runtime requirements</a:t>
+            </a:r>
+            <a:br/>
+            <a:r>
+              <a:t>• Package governance</a:t>
+            </a:r>
+          </a:p>
+        </p:txBody>
+      </p:sp>
+      <p:sp>
+        <p:nvSpPr>
+          <p:cNvPr id="8" name="Rounded Rectangle 7"/>
+          <p:cNvSpPr/>
+          <p:nvPr/>
+        </p:nvSpPr>
+        <p:spPr>
+          <a:xfrm>
+            <a:off x="6263640" y="1234440"/>
+            <a:ext cx="5303520" cy="1828800"/>
+          </a:xfrm>
+          <a:prstGeom prst="roundRect">
+            <a:avLst/>
+          </a:prstGeom>
+          <a:solidFill>
+            <a:srgbClr val="FFFFFF"/>
+          </a:solidFill>
+          <a:ln>
+            <a:solidFill>
+              <a:srgbClr val="DCDCDC"/>
+            </a:solidFill>
+          </a:ln>
+        </p:spPr>
+        <p:style>
+          <a:lnRef idx="1">
+            <a:schemeClr val="accent1"/>
+          </a:lnRef>
+          <a:fillRef idx="3">
+            <a:schemeClr val="accent1"/>
+          </a:fillRef>
+          <a:effectRef idx="2">
+            <a:schemeClr val="accent1"/>
+          </a:effectRef>
+          <a:fontRef idx="minor">
+            <a:schemeClr val="lt1"/>
+          </a:fontRef>
+        </p:style>
+        <p:txBody>
+          <a:bodyPr rtlCol="0" anchor="ctr"/>
+          <a:lstStyle/>
+          <a:p>
+            <a:pPr algn="ctr"/>
+          </a:p>
+        </p:txBody>
+      </p:sp>
+      <p:sp>
+        <p:nvSpPr>
+          <p:cNvPr id="9" name="Rectangle 8"/>
+          <p:cNvSpPr/>
+          <p:nvPr/>
+        </p:nvSpPr>
+        <p:spPr>
+          <a:xfrm>
+            <a:off x="6263640" y="1234440"/>
+            <a:ext cx="91440" cy="1828800"/>
+          </a:xfrm>
+          <a:prstGeom prst="rect">
+            <a:avLst/>
+          </a:prstGeom>
+          <a:solidFill>
+            <a:srgbClr val="02C39A"/>
+          </a:solidFill>
+          <a:ln>
+            <a:noFill/>
+          </a:ln>
+        </p:spPr>
+        <p:style>
+          <a:lnRef idx="1">
+            <a:schemeClr val="accent1"/>
+          </a:lnRef>
+          <a:fillRef idx="3">
+            <a:schemeClr val="accent1"/>
+          </a:fillRef>
+          <a:effectRef idx="2">
+            <a:schemeClr val="accent1"/>
+          </a:effectRef>
+          <a:fontRef idx="minor">
+            <a:schemeClr val="lt1"/>
+          </a:fontRef>
+        </p:style>
+        <p:txBody>
+          <a:bodyPr rtlCol="0" anchor="ctr"/>
+          <a:lstStyle/>
+          <a:p>
+            <a:pPr algn="ctr"/>
+          </a:p>
+        </p:txBody>
+      </p:sp>
+      <p:sp>
+        <p:nvSpPr>
+          <p:cNvPr id="10" name="TextBox 9"/>
+          <p:cNvSpPr txBox="1"/>
+          <p:nvPr/>
+        </p:nvSpPr>
+        <p:spPr>
+          <a:xfrm>
+            <a:off x="6446520" y="1344168"/>
+            <a:ext cx="4983480" cy="1664208"/>
+          </a:xfrm>
+          <a:prstGeom prst="rect">
+            <a:avLst/>
+          </a:prstGeom>
+          <a:noFill/>
+        </p:spPr>
+        <p:txBody>
+          <a:bodyPr wrap="square" lIns="0" rIns="0">
+            <a:spAutoFit/>
+          </a:bodyPr>
+          <a:lstStyle/>
+          <a:p>
+            <a:pPr>
+              <a:defRPr b="1" sz="1500">
+                <a:solidFill>
+                  <a:srgbClr val="1E2761"/>
+                </a:solidFill>
+                <a:latin typeface="Aptos Display"/>
+              </a:defRPr>
+            </a:pPr>
+            <a:r>
+              <a:t>Why it helps</a:t>
             </a:r>
           </a:p>
           <a:p>
@@ -14460,25 +13816,25 @@
               </a:defRPr>
             </a:pPr>
             <a:r>
-              <a:t>• Runtime requirements</a:t>
+              <a:t>• Service limitations</a:t>
             </a:r>
             <a:br/>
             <a:r>
-              <a:t>• Package governance</a:t>
-            </a:r>
-          </a:p>
-        </p:txBody>
-      </p:sp>
-      <p:sp>
-        <p:nvSpPr>
-          <p:cNvPr id="8" name="Rounded Rectangle 7"/>
+              <a:t>• Security considerations</a:t>
+            </a:r>
+          </a:p>
+        </p:txBody>
+      </p:sp>
+      <p:sp>
+        <p:nvSpPr>
+          <p:cNvPr id="11" name="Rounded Rectangle 10"/>
           <p:cNvSpPr/>
           <p:nvPr/>
         </p:nvSpPr>
         <p:spPr>
           <a:xfrm>
-            <a:off x="6263640" y="1234440"/>
-            <a:ext cx="5303520" cy="1828800"/>
+            <a:off x="822960" y="4160520"/>
+            <a:ext cx="10424160" cy="868680"/>
           </a:xfrm>
           <a:prstGeom prst="roundRect">
             <a:avLst/>
@@ -14516,20 +13872,20 @@
       </p:sp>
       <p:sp>
         <p:nvSpPr>
-          <p:cNvPr id="9" name="Rectangle 8"/>
+          <p:cNvPr id="12" name="Rectangle 11"/>
           <p:cNvSpPr/>
           <p:nvPr/>
         </p:nvSpPr>
         <p:spPr>
           <a:xfrm>
-            <a:off x="6263640" y="1234440"/>
-            <a:ext cx="91440" cy="1828800"/>
+            <a:off x="822960" y="4160520"/>
+            <a:ext cx="91440" cy="868680"/>
           </a:xfrm>
           <a:prstGeom prst="rect">
             <a:avLst/>
           </a:prstGeom>
           <a:solidFill>
-            <a:srgbClr val="02C39A"/>
+            <a:srgbClr val="F9B700"/>
           </a:solidFill>
           <a:ln>
             <a:noFill/>
@@ -14559,14 +13915,14 @@
       </p:sp>
       <p:sp>
         <p:nvSpPr>
-          <p:cNvPr id="10" name="TextBox 9"/>
+          <p:cNvPr id="13" name="TextBox 12"/>
           <p:cNvSpPr txBox="1"/>
           <p:nvPr/>
         </p:nvSpPr>
         <p:spPr>
           <a:xfrm>
-            <a:off x="6446520" y="1344168"/>
-            <a:ext cx="4983480" cy="1664208"/>
+            <a:off x="1005840" y="4270248"/>
+            <a:ext cx="10104120" cy="704088"/>
           </a:xfrm>
           <a:prstGeom prst="rect">
             <a:avLst/>
@@ -14588,167 +13944,7 @@
               </a:defRPr>
             </a:pPr>
             <a:r>
-              <a:t>Why it helps</a:t>
-            </a:r>
-          </a:p>
-          <a:p>
-            <a:pPr>
-              <a:spcBef>
-                <a:spcPts val="400"/>
-              </a:spcBef>
-              <a:defRPr sz="1050">
-                <a:solidFill>
-                  <a:srgbClr val="242424"/>
-                </a:solidFill>
-                <a:latin typeface="Aptos"/>
-              </a:defRPr>
-            </a:pPr>
-            <a:r>
-              <a:t>• Service limitations</a:t>
-            </a:r>
-            <a:br/>
-            <a:r>
-              <a:t>• Security considerations</a:t>
-            </a:r>
-          </a:p>
-        </p:txBody>
-      </p:sp>
-      <p:sp>
-        <p:nvSpPr>
-          <p:cNvPr id="11" name="Rounded Rectangle 10"/>
-          <p:cNvSpPr/>
-          <p:nvPr/>
-        </p:nvSpPr>
-        <p:spPr>
-          <a:xfrm>
-            <a:off x="822960" y="4160520"/>
-            <a:ext cx="10424160" cy="868680"/>
-          </a:xfrm>
-          <a:prstGeom prst="roundRect">
-            <a:avLst/>
-          </a:prstGeom>
-          <a:solidFill>
-            <a:srgbClr val="FFFFFF"/>
-          </a:solidFill>
-          <a:ln>
-            <a:solidFill>
-              <a:srgbClr val="DCDCDC"/>
-            </a:solidFill>
-          </a:ln>
-        </p:spPr>
-        <p:style>
-          <a:lnRef idx="1">
-            <a:schemeClr val="accent1"/>
-          </a:lnRef>
-          <a:fillRef idx="3">
-            <a:schemeClr val="accent1"/>
-          </a:fillRef>
-          <a:effectRef idx="2">
-            <a:schemeClr val="accent1"/>
-          </a:effectRef>
-          <a:fontRef idx="minor">
-            <a:schemeClr val="lt1"/>
-          </a:fontRef>
-        </p:style>
-        <p:txBody>
-          <a:bodyPr rtlCol="0" anchor="ctr"/>
-          <a:lstStyle/>
-          <a:p>
-            <a:pPr algn="ctr"/>
-          </a:p>
-        </p:txBody>
-      </p:sp>
-      <p:sp>
-        <p:nvSpPr>
-          <p:cNvPr id="12" name="Rectangle 11"/>
-          <p:cNvSpPr/>
-          <p:nvPr/>
-        </p:nvSpPr>
-        <p:spPr>
-          <a:xfrm>
-            <a:off x="822960" y="4160520"/>
-            <a:ext cx="91440" cy="868680"/>
-          </a:xfrm>
-          <a:prstGeom prst="rect">
-            <a:avLst/>
-          </a:prstGeom>
-          <a:solidFill>
-            <a:srgbClr val="F9B700"/>
-          </a:solidFill>
-          <a:ln>
-            <a:noFill/>
-          </a:ln>
-        </p:spPr>
-        <p:style>
-          <a:lnRef idx="1">
-            <a:schemeClr val="accent1"/>
-          </a:lnRef>
-          <a:fillRef idx="3">
-            <a:schemeClr val="accent1"/>
-          </a:fillRef>
-          <a:effectRef idx="2">
-            <a:schemeClr val="accent1"/>
-          </a:effectRef>
-          <a:fontRef idx="minor">
-            <a:schemeClr val="lt1"/>
-          </a:fontRef>
-        </p:style>
-        <p:txBody>
-          <a:bodyPr rtlCol="0" anchor="ctr"/>
-          <a:lstStyle/>
-          <a:p>
-            <a:pPr algn="ctr"/>
-          </a:p>
-        </p:txBody>
-      </p:sp>
-      <p:sp>
-        <p:nvSpPr>
-          <p:cNvPr id="13" name="TextBox 12"/>
-          <p:cNvSpPr txBox="1"/>
-          <p:nvPr/>
-        </p:nvSpPr>
-        <p:spPr>
-          <a:xfrm>
-            <a:off x="1005840" y="4270248"/>
-            <a:ext cx="10104120" cy="704088"/>
-          </a:xfrm>
-          <a:prstGeom prst="rect">
-            <a:avLst/>
-          </a:prstGeom>
-          <a:noFill/>
-        </p:spPr>
-        <p:txBody>
-          <a:bodyPr wrap="square" lIns="0" rIns="0">
-            <a:spAutoFit/>
-          </a:bodyPr>
-          <a:lstStyle/>
-          <a:p>
-            <a:pPr>
-              <a:defRPr b="1" sz="1500">
-                <a:solidFill>
-                  <a:srgbClr val="1E2761"/>
-                </a:solidFill>
-                <a:latin typeface="Aptos Display"/>
-              </a:defRPr>
-            </a:pPr>
-            <a:r>
-              <a:t>Lab connection</a:t>
-            </a:r>
-          </a:p>
-          <a:p>
-            <a:pPr>
-              <a:spcBef>
-                <a:spcPts val="400"/>
-              </a:spcBef>
-              <a:defRPr sz="1050">
-                <a:solidFill>
-                  <a:srgbClr val="242424"/>
-                </a:solidFill>
-                <a:latin typeface="Aptos"/>
-              </a:defRPr>
-            </a:pPr>
-            <a:r>
-              <a:t>Coverage: Covered. Use the lab README to demonstrate or discuss this topic. Review terms: considerations, security.</a:t>
+              <a:t>In the lab, you will apply this pattern, validate the expected behavior, and discuss where it fits in a real Power BI solution.</a:t>
             </a:r>
           </a:p>
         </p:txBody>
